--- a/documentation/guide/bahith-guide.pptx
+++ b/documentation/guide/bahith-guide.pptx
@@ -138,21 +138,21 @@
   <p:extLst>
     <p:ext uri="{521415D9-36F7-43E2-AB2F-B90AF26B5E84}">
       <p14:sectionLst xmlns:p14="http://schemas.microsoft.com/office/powerpoint/2010/main">
-        <p14:section name="المقدمة" id="{9620b81f-69ef-5c7b-98be-2a15ed1475e4}">
+        <p14:section name="المقدمة" id="{2cc50664-0518-b5d4-90d9-077a9fe3c4a9}">
           <p14:sldIdLst>
             <p14:sldId id="256"/>
             <p14:sldId id="257"/>
             <p14:sldId id="258"/>
           </p14:sldIdLst>
         </p14:section>
-        <p14:section name="البدء" id="{589db440-41c6-d3ee-cbe3-3f2454a6e635}">
+        <p14:section name="البدء" id="{e77a4415-21c1-fa00-725d-6488c7b0e79c}">
           <p14:sldIdLst>
             <p14:sldId id="259"/>
             <p14:sldId id="260"/>
             <p14:sldId id="261"/>
           </p14:sldIdLst>
         </p14:section>
-        <p14:section name="الشاشات" id="{e87ed267-5116-b903-45d7-a017a50162d3}">
+        <p14:section name="الشاشات" id="{11ff4dac-b1e6-dbe8-c900-9b4417cb35d3}">
           <p14:sldIdLst>
             <p14:sldId id="262"/>
             <p14:sldId id="263"/>
@@ -178,7 +178,7 @@
             <p14:sldId id="283"/>
           </p14:sldIdLst>
         </p14:section>
-        <p14:section name="الاستخدام" id="{d016bfa8-63ea-017d-3d63-b6e9562339b0}">
+        <p14:section name="الاستخدام" id="{3693fa84-faea-cf55-52ca-7fb44db55e7d}">
           <p14:sldIdLst>
             <p14:sldId id="284"/>
             <p14:sldId id="285"/>
@@ -5823,7 +5823,7 @@
                 <a:latin typeface="Noto Naskh Arabic"/>
                 <a:cs typeface="adwa-assalaf"/>
               </a:rPr>
-              <a:t>الخطوة القادمة ووكيلها، وزر تشغيلها بالمحرك المختار.</a:t>
+              <a:t>المهمة القادمة ووكيلها، وزر تشغيلها بالمحرك المختار.</a:t>
             </a:r>
             <a:endParaRPr lang="ar-AE" sz="1400" dirty="0"/>
           </a:p>
@@ -6973,7 +6973,7 @@
                 <a:latin typeface="Noto Naskh Arabic"/>
                 <a:cs typeface="adwa-assalaf"/>
               </a:rPr>
-              <a:t>كل خطوة</a:t>
+              <a:t>كل مهمة</a:t>
             </a:r>
             <a:endParaRPr lang="ar-AE" sz="1600" dirty="0"/>
           </a:p>
@@ -7457,7 +7457,7 @@
                 <a:latin typeface="Noto Naskh Arabic"/>
                 <a:cs typeface="adwa-assalaf"/>
               </a:rPr>
-              <a:t>تشغيل خطوة في الوضع اليدوي</a:t>
+              <a:t>التشغيل في الوضع اليدوي</a:t>
             </a:r>
             <a:endParaRPr lang="ar-AE" sz="3200" dirty="0"/>
           </a:p>
@@ -12980,7 +12980,7 @@
                 <a:latin typeface="Noto Naskh Arabic"/>
                 <a:cs typeface="adwa-assalaf"/>
               </a:rPr>
-              <a:t>الخطوات</a:t>
+              <a:t>المراحل</a:t>
             </a:r>
             <a:endParaRPr lang="ar-AE" sz="1600" dirty="0"/>
           </a:p>
@@ -13018,7 +13018,7 @@
                 <a:latin typeface="Noto Naskh Arabic"/>
                 <a:cs typeface="adwa-assalaf"/>
               </a:rPr>
-              <a:t>عدد الخطوات ومعرّف السير على كل بطاقة.</a:t>
+              <a:t>عدد المراحل ومعرّف السير على كل بطاقة.</a:t>
             </a:r>
             <a:endParaRPr lang="ar-AE" sz="1400" dirty="0"/>
           </a:p>
@@ -13158,7 +13158,7 @@
                 <a:latin typeface="Noto Naskh Arabic"/>
                 <a:cs typeface="adwa-assalaf"/>
               </a:rPr>
-              <a:t>نقرة تعرض الخطوات ووكلاءها وبواباتها.</a:t>
+              <a:t>نقرة تعرض المراحل ووكلاءها وبواباتها.</a:t>
             </a:r>
             <a:endParaRPr lang="ar-AE" sz="1400" dirty="0"/>
           </a:p>
@@ -18153,7 +18153,7 @@
                 <a:latin typeface="Noto Naskh Arabic"/>
                 <a:cs typeface="adwa-assalaf"/>
               </a:rPr>
-              <a:t>رحلة عمل في سبع خطوات</a:t>
+              <a:t>رحلة عمل في سبع محطات</a:t>
             </a:r>
             <a:endParaRPr lang="ar-AE" sz="3200" dirty="0"/>
           </a:p>
@@ -20615,7 +20615,7 @@
                 <a:latin typeface="Noto Naskh Arabic"/>
                 <a:cs typeface="adwa-assalaf"/>
               </a:rPr>
-              <a:t>ثم اختاروا المحرك، وشغّلوا الخطوة الأولى، واقرؤوا المخرج في الشاشة الجانبية</a:t>
+              <a:t>ثم اختاروا المحرك، وشغّلوا المهمة الأولى، واقرؤوا المخرج في الشاشة الجانبية</a:t>
             </a:r>
             <a:endParaRPr lang="ar-AE" sz="2000" dirty="0"/>
           </a:p>

--- a/documentation/guide/bahith-guide.pptx
+++ b/documentation/guide/bahith-guide.pptx
@@ -138,21 +138,21 @@
   <p:extLst>
     <p:ext uri="{521415D9-36F7-43E2-AB2F-B90AF26B5E84}">
       <p14:sectionLst xmlns:p14="http://schemas.microsoft.com/office/powerpoint/2010/main">
-        <p14:section name="المقدمة" id="{2cc50664-0518-b5d4-90d9-077a9fe3c4a9}">
+        <p14:section name="المقدمة" id="{4ea95716-ebc7-aa9a-02e3-12be8614a0a4}">
           <p14:sldIdLst>
             <p14:sldId id="256"/>
             <p14:sldId id="257"/>
             <p14:sldId id="258"/>
           </p14:sldIdLst>
         </p14:section>
-        <p14:section name="البدء" id="{e77a4415-21c1-fa00-725d-6488c7b0e79c}">
+        <p14:section name="البدء" id="{514f499d-8000-1f75-4a78-a714d672ef74}">
           <p14:sldIdLst>
             <p14:sldId id="259"/>
             <p14:sldId id="260"/>
             <p14:sldId id="261"/>
           </p14:sldIdLst>
         </p14:section>
-        <p14:section name="الشاشات" id="{11ff4dac-b1e6-dbe8-c900-9b4417cb35d3}">
+        <p14:section name="الشاشات" id="{6b74f58a-c0b8-9e0c-1675-128ea9a2a8f8}">
           <p14:sldIdLst>
             <p14:sldId id="262"/>
             <p14:sldId id="263"/>
@@ -178,7 +178,7 @@
             <p14:sldId id="283"/>
           </p14:sldIdLst>
         </p14:section>
-        <p14:section name="الاستخدام" id="{3693fa84-faea-cf55-52ca-7fb44db55e7d}">
+        <p14:section name="الاستخدام" id="{44004584-8b0b-1591-8a4b-5ac9cef3e2c2}">
           <p14:sldIdLst>
             <p14:sldId id="284"/>
             <p14:sldId id="285"/>
@@ -4407,18 +4407,146 @@
       </p:sp>
       <p:sp>
         <p:nvSpPr>
-          <p:cNvPr id="3" name="screen-frame"/>
+          <p:cNvPr id="3" name="role-band"/>
           <p:cNvSpPr/>
           <p:nvPr/>
         </p:nvSpPr>
         <p:spPr>
           <a:xfrm>
-            <a:off x="493776" y="1271016"/>
-            <a:ext cx="7424928" cy="4224528"/>
+            <a:off x="548640" y="1161288"/>
+            <a:ext cx="11091672" cy="530352"/>
           </a:xfrm>
           <a:prstGeom prst="roundRect">
             <a:avLst>
-              <a:gd name="adj" fmla="val 1732"/>
+              <a:gd name="adj" fmla="val 13793"/>
+            </a:avLst>
+          </a:prstGeom>
+          <a:solidFill>
+            <a:srgbClr val="EAF2FA"/>
+          </a:solidFill>
+          <a:ln w="12700">
+            <a:solidFill>
+              <a:srgbClr val="EAF2FA"/>
+            </a:solidFill>
+            <a:prstDash val="solid"/>
+          </a:ln>
+        </p:spPr>
+      </p:sp>
+      <p:sp>
+        <p:nvSpPr>
+          <p:cNvPr id="4" name="Shape 2"/>
+          <p:cNvSpPr/>
+          <p:nvPr/>
+        </p:nvSpPr>
+        <p:spPr>
+          <a:xfrm>
+            <a:off x="11548872" y="1161288"/>
+            <a:ext cx="91440" cy="530352"/>
+          </a:xfrm>
+          <a:prstGeom prst="rect">
+            <a:avLst/>
+          </a:prstGeom>
+          <a:solidFill>
+            <a:srgbClr val="B8860B"/>
+          </a:solidFill>
+          <a:ln w="12700">
+            <a:solidFill>
+              <a:srgbClr val="B8860B"/>
+            </a:solidFill>
+            <a:prstDash val="solid"/>
+          </a:ln>
+        </p:spPr>
+      </p:sp>
+      <p:sp>
+        <p:nvSpPr>
+          <p:cNvPr id="5" name="Text 3"/>
+          <p:cNvSpPr txBox="1"/>
+          <p:nvPr/>
+        </p:nvSpPr>
+        <p:spPr>
+          <a:xfrm>
+            <a:off x="10515600" y="1161288"/>
+            <a:ext cx="914400" cy="530352"/>
+          </a:xfrm>
+          <a:prstGeom prst="rect">
+            <a:avLst/>
+          </a:prstGeom>
+          <a:noFill/>
+          <a:ln/>
+        </p:spPr>
+        <p:txBody>
+          <a:bodyPr wrap="square" lIns="0" tIns="0" rIns="0" bIns="0" rtlCol="0" anchor="ctr"/>
+          <a:lstStyle/>
+          <a:p>
+            <a:pPr rtl="1" algn="r" indent="0" marL="0">
+              <a:buNone/>
+            </a:pPr>
+            <a:r>
+              <a:rPr lang="ar-AE" altLang="en-US" sz="1500" b="1" dirty="0">
+                <a:solidFill>
+                  <a:srgbClr val="B8860B"/>
+                </a:solidFill>
+                <a:latin typeface="Noto Naskh Arabic"/>
+                <a:cs typeface="adwa-assalaf"/>
+              </a:rPr>
+              <a:t>دور الشاشة:</a:t>
+            </a:r>
+            <a:endParaRPr lang="ar-AE" sz="1500" dirty="0"/>
+          </a:p>
+        </p:txBody>
+      </p:sp>
+      <p:sp>
+        <p:nvSpPr>
+          <p:cNvPr id="6" name="Text 4"/>
+          <p:cNvSpPr txBox="1"/>
+          <p:nvPr/>
+        </p:nvSpPr>
+        <p:spPr>
+          <a:xfrm>
+            <a:off x="731520" y="1161288"/>
+            <a:ext cx="9857232" cy="530352"/>
+          </a:xfrm>
+          <a:prstGeom prst="rect">
+            <a:avLst/>
+          </a:prstGeom>
+          <a:noFill/>
+          <a:ln/>
+        </p:spPr>
+        <p:txBody>
+          <a:bodyPr wrap="square" lIns="0" tIns="0" rIns="0" bIns="0" rtlCol="0" anchor="ctr"/>
+          <a:lstStyle/>
+          <a:p>
+            <a:pPr rtl="1" algn="r" indent="0" marL="0">
+              <a:buNone/>
+            </a:pPr>
+            <a:r>
+              <a:rPr lang="ar-AE" altLang="en-US" sz="1500" dirty="0">
+                <a:solidFill>
+                  <a:srgbClr val="12263F"/>
+                </a:solidFill>
+                <a:latin typeface="Noto Naskh Arabic"/>
+                <a:cs typeface="adwa-assalaf"/>
+              </a:rPr>
+              <a:t>سجل المشاريع في مكان واحد: أين وصل كل مشروع، وما المطلوب فيه الآن</a:t>
+            </a:r>
+            <a:endParaRPr lang="ar-AE" sz="1500" dirty="0"/>
+          </a:p>
+        </p:txBody>
+      </p:sp>
+      <p:sp>
+        <p:nvSpPr>
+          <p:cNvPr id="7" name="screen-frame"/>
+          <p:cNvSpPr/>
+          <p:nvPr/>
+        </p:nvSpPr>
+        <p:spPr>
+          <a:xfrm>
+            <a:off x="1133856" y="1819656"/>
+            <a:ext cx="6784848" cy="3864483"/>
+          </a:xfrm>
+          <a:prstGeom prst="roundRect">
+            <a:avLst>
+              <a:gd name="adj" fmla="val 1893"/>
             </a:avLst>
           </a:prstGeom>
           <a:solidFill>
@@ -4441,7 +4569,7 @@
       </p:sp>
       <p:pic>
         <p:nvPicPr>
-          <p:cNvPr id="4" name="screenshot" descr="/tmp/claude-0/-home-user/11b98046-3116-585b-b221-e5c2e170e62a/scratchpad/deck/bshots/02_projects.jpg">    </p:cNvPr>
+          <p:cNvPr id="8" name="screenshot" descr="/tmp/claude-0/-home-user/11b98046-3116-585b-b221-e5c2e170e62a/scratchpad/deck/bshots/02_projects.jpg">    </p:cNvPr>
           <p:cNvPicPr>
             <a:picLocks noChangeAspect="1"/>
           </p:cNvPicPr>
@@ -4455,8 +4583,8 @@
         </p:blipFill>
         <p:spPr>
           <a:xfrm>
-            <a:off x="548640" y="1325880"/>
-            <a:ext cx="7315200" cy="4114800"/>
+            <a:off x="1188720" y="1874520"/>
+            <a:ext cx="6675120" cy="3754755"/>
           </a:xfrm>
           <a:prstGeom prst="rect">
             <a:avLst/>
@@ -4465,13 +4593,13 @@
       </p:pic>
       <p:sp>
         <p:nvSpPr>
-          <p:cNvPr id="5" name="num-1"/>
+          <p:cNvPr id="9" name="num-1"/>
           <p:cNvSpPr/>
           <p:nvPr/>
         </p:nvSpPr>
         <p:spPr>
           <a:xfrm>
-            <a:off x="11219688" y="1316736"/>
+            <a:off x="11219688" y="1865376"/>
             <a:ext cx="420624" cy="420624"/>
           </a:xfrm>
           <a:prstGeom prst="ellipse">
@@ -4490,13 +4618,13 @@
       </p:sp>
       <p:sp>
         <p:nvSpPr>
-          <p:cNvPr id="6" name="Text 3"/>
-          <p:cNvSpPr txBox="1"/>
-          <p:nvPr/>
-        </p:nvSpPr>
-        <p:spPr>
-          <a:xfrm>
-            <a:off x="11219688" y="1316736"/>
+          <p:cNvPr id="10" name="Text 7"/>
+          <p:cNvSpPr txBox="1"/>
+          <p:nvPr/>
+        </p:nvSpPr>
+        <p:spPr>
+          <a:xfrm>
+            <a:off x="11219688" y="1865376"/>
             <a:ext cx="420624" cy="420624"/>
           </a:xfrm>
           <a:prstGeom prst="rect">
@@ -4529,13 +4657,13 @@
       </p:sp>
       <p:sp>
         <p:nvSpPr>
-          <p:cNvPr id="7" name="Text 4"/>
-          <p:cNvSpPr txBox="1"/>
-          <p:nvPr/>
-        </p:nvSpPr>
-        <p:spPr>
-          <a:xfrm>
-            <a:off x="8183880" y="1298448"/>
+          <p:cNvPr id="11" name="Text 8"/>
+          <p:cNvSpPr txBox="1"/>
+          <p:nvPr/>
+        </p:nvSpPr>
+        <p:spPr>
+          <a:xfrm>
+            <a:off x="8183880" y="1847088"/>
             <a:ext cx="2889504" cy="384048"/>
           </a:xfrm>
           <a:prstGeom prst="rect">
@@ -4567,13 +4695,13 @@
       </p:sp>
       <p:sp>
         <p:nvSpPr>
-          <p:cNvPr id="8" name="Text 5"/>
-          <p:cNvSpPr txBox="1"/>
-          <p:nvPr/>
-        </p:nvSpPr>
-        <p:spPr>
-          <a:xfrm>
-            <a:off x="8183880" y="1682496"/>
+          <p:cNvPr id="12" name="Text 9"/>
+          <p:cNvSpPr txBox="1"/>
+          <p:nvPr/>
+        </p:nvSpPr>
+        <p:spPr>
+          <a:xfrm>
+            <a:off x="8183880" y="2231136"/>
             <a:ext cx="2889504" cy="758952"/>
           </a:xfrm>
           <a:prstGeom prst="rect">
@@ -4605,13 +4733,13 @@
       </p:sp>
       <p:sp>
         <p:nvSpPr>
-          <p:cNvPr id="9" name="num-2"/>
+          <p:cNvPr id="13" name="num-2"/>
           <p:cNvSpPr/>
           <p:nvPr/>
         </p:nvSpPr>
         <p:spPr>
           <a:xfrm>
-            <a:off x="11219688" y="2459736"/>
+            <a:off x="11219688" y="3008376"/>
             <a:ext cx="420624" cy="420624"/>
           </a:xfrm>
           <a:prstGeom prst="ellipse">
@@ -4630,13 +4758,13 @@
       </p:sp>
       <p:sp>
         <p:nvSpPr>
-          <p:cNvPr id="10" name="Text 7"/>
-          <p:cNvSpPr txBox="1"/>
-          <p:nvPr/>
-        </p:nvSpPr>
-        <p:spPr>
-          <a:xfrm>
-            <a:off x="11219688" y="2459736"/>
+          <p:cNvPr id="14" name="Text 11"/>
+          <p:cNvSpPr txBox="1"/>
+          <p:nvPr/>
+        </p:nvSpPr>
+        <p:spPr>
+          <a:xfrm>
+            <a:off x="11219688" y="3008376"/>
             <a:ext cx="420624" cy="420624"/>
           </a:xfrm>
           <a:prstGeom prst="rect">
@@ -4669,13 +4797,13 @@
       </p:sp>
       <p:sp>
         <p:nvSpPr>
-          <p:cNvPr id="11" name="Text 8"/>
-          <p:cNvSpPr txBox="1"/>
-          <p:nvPr/>
-        </p:nvSpPr>
-        <p:spPr>
-          <a:xfrm>
-            <a:off x="8183880" y="2441448"/>
+          <p:cNvPr id="15" name="Text 12"/>
+          <p:cNvSpPr txBox="1"/>
+          <p:nvPr/>
+        </p:nvSpPr>
+        <p:spPr>
+          <a:xfrm>
+            <a:off x="8183880" y="2990088"/>
             <a:ext cx="2889504" cy="384048"/>
           </a:xfrm>
           <a:prstGeom prst="rect">
@@ -4707,13 +4835,13 @@
       </p:sp>
       <p:sp>
         <p:nvSpPr>
-          <p:cNvPr id="12" name="Text 9"/>
-          <p:cNvSpPr txBox="1"/>
-          <p:nvPr/>
-        </p:nvSpPr>
-        <p:spPr>
-          <a:xfrm>
-            <a:off x="8183880" y="2825496"/>
+          <p:cNvPr id="16" name="Text 13"/>
+          <p:cNvSpPr txBox="1"/>
+          <p:nvPr/>
+        </p:nvSpPr>
+        <p:spPr>
+          <a:xfrm>
+            <a:off x="8183880" y="3374136"/>
             <a:ext cx="2889504" cy="758952"/>
           </a:xfrm>
           <a:prstGeom prst="rect">
@@ -4745,13 +4873,13 @@
       </p:sp>
       <p:sp>
         <p:nvSpPr>
-          <p:cNvPr id="13" name="num-3"/>
+          <p:cNvPr id="17" name="num-3"/>
           <p:cNvSpPr/>
           <p:nvPr/>
         </p:nvSpPr>
         <p:spPr>
           <a:xfrm>
-            <a:off x="11219688" y="3602736"/>
+            <a:off x="11219688" y="4151376"/>
             <a:ext cx="420624" cy="420624"/>
           </a:xfrm>
           <a:prstGeom prst="ellipse">
@@ -4770,13 +4898,13 @@
       </p:sp>
       <p:sp>
         <p:nvSpPr>
-          <p:cNvPr id="14" name="Text 11"/>
-          <p:cNvSpPr txBox="1"/>
-          <p:nvPr/>
-        </p:nvSpPr>
-        <p:spPr>
-          <a:xfrm>
-            <a:off x="11219688" y="3602736"/>
+          <p:cNvPr id="18" name="Text 15"/>
+          <p:cNvSpPr txBox="1"/>
+          <p:nvPr/>
+        </p:nvSpPr>
+        <p:spPr>
+          <a:xfrm>
+            <a:off x="11219688" y="4151376"/>
             <a:ext cx="420624" cy="420624"/>
           </a:xfrm>
           <a:prstGeom prst="rect">
@@ -4809,13 +4937,13 @@
       </p:sp>
       <p:sp>
         <p:nvSpPr>
-          <p:cNvPr id="15" name="Text 12"/>
-          <p:cNvSpPr txBox="1"/>
-          <p:nvPr/>
-        </p:nvSpPr>
-        <p:spPr>
-          <a:xfrm>
-            <a:off x="8183880" y="3584448"/>
+          <p:cNvPr id="19" name="Text 16"/>
+          <p:cNvSpPr txBox="1"/>
+          <p:nvPr/>
+        </p:nvSpPr>
+        <p:spPr>
+          <a:xfrm>
+            <a:off x="8183880" y="4133088"/>
             <a:ext cx="2889504" cy="384048"/>
           </a:xfrm>
           <a:prstGeom prst="rect">
@@ -4847,13 +4975,13 @@
       </p:sp>
       <p:sp>
         <p:nvSpPr>
-          <p:cNvPr id="16" name="Text 13"/>
-          <p:cNvSpPr txBox="1"/>
-          <p:nvPr/>
-        </p:nvSpPr>
-        <p:spPr>
-          <a:xfrm>
-            <a:off x="8183880" y="3968496"/>
+          <p:cNvPr id="20" name="Text 17"/>
+          <p:cNvSpPr txBox="1"/>
+          <p:nvPr/>
+        </p:nvSpPr>
+        <p:spPr>
+          <a:xfrm>
+            <a:off x="8183880" y="4517136"/>
             <a:ext cx="2889504" cy="758952"/>
           </a:xfrm>
           <a:prstGeom prst="rect">
@@ -4885,13 +5013,13 @@
       </p:sp>
       <p:sp>
         <p:nvSpPr>
-          <p:cNvPr id="17" name="Text 14"/>
-          <p:cNvSpPr txBox="1"/>
-          <p:nvPr/>
-        </p:nvSpPr>
-        <p:spPr>
-          <a:xfrm>
-            <a:off x="548640" y="5596128"/>
+          <p:cNvPr id="21" name="Text 18"/>
+          <p:cNvSpPr txBox="1"/>
+          <p:nvPr/>
+        </p:nvSpPr>
+        <p:spPr>
+          <a:xfrm>
+            <a:off x="548640" y="5766435"/>
             <a:ext cx="7315200" cy="365760"/>
           </a:xfrm>
           <a:prstGeom prst="rect">
@@ -5039,18 +5167,146 @@
       </p:sp>
       <p:sp>
         <p:nvSpPr>
-          <p:cNvPr id="3" name="screen-frame"/>
+          <p:cNvPr id="3" name="role-band"/>
           <p:cNvSpPr/>
           <p:nvPr/>
         </p:nvSpPr>
         <p:spPr>
           <a:xfrm>
-            <a:off x="493776" y="1271016"/>
-            <a:ext cx="7424928" cy="4224528"/>
+            <a:off x="548640" y="1161288"/>
+            <a:ext cx="11091672" cy="530352"/>
           </a:xfrm>
           <a:prstGeom prst="roundRect">
             <a:avLst>
-              <a:gd name="adj" fmla="val 1732"/>
+              <a:gd name="adj" fmla="val 13793"/>
+            </a:avLst>
+          </a:prstGeom>
+          <a:solidFill>
+            <a:srgbClr val="EAF2FA"/>
+          </a:solidFill>
+          <a:ln w="12700">
+            <a:solidFill>
+              <a:srgbClr val="EAF2FA"/>
+            </a:solidFill>
+            <a:prstDash val="solid"/>
+          </a:ln>
+        </p:spPr>
+      </p:sp>
+      <p:sp>
+        <p:nvSpPr>
+          <p:cNvPr id="4" name="Shape 2"/>
+          <p:cNvSpPr/>
+          <p:nvPr/>
+        </p:nvSpPr>
+        <p:spPr>
+          <a:xfrm>
+            <a:off x="11548872" y="1161288"/>
+            <a:ext cx="91440" cy="530352"/>
+          </a:xfrm>
+          <a:prstGeom prst="rect">
+            <a:avLst/>
+          </a:prstGeom>
+          <a:solidFill>
+            <a:srgbClr val="B8860B"/>
+          </a:solidFill>
+          <a:ln w="12700">
+            <a:solidFill>
+              <a:srgbClr val="B8860B"/>
+            </a:solidFill>
+            <a:prstDash val="solid"/>
+          </a:ln>
+        </p:spPr>
+      </p:sp>
+      <p:sp>
+        <p:nvSpPr>
+          <p:cNvPr id="5" name="Text 3"/>
+          <p:cNvSpPr txBox="1"/>
+          <p:nvPr/>
+        </p:nvSpPr>
+        <p:spPr>
+          <a:xfrm>
+            <a:off x="10515600" y="1161288"/>
+            <a:ext cx="914400" cy="530352"/>
+          </a:xfrm>
+          <a:prstGeom prst="rect">
+            <a:avLst/>
+          </a:prstGeom>
+          <a:noFill/>
+          <a:ln/>
+        </p:spPr>
+        <p:txBody>
+          <a:bodyPr wrap="square" lIns="0" tIns="0" rIns="0" bIns="0" rtlCol="0" anchor="ctr"/>
+          <a:lstStyle/>
+          <a:p>
+            <a:pPr rtl="1" algn="r" indent="0" marL="0">
+              <a:buNone/>
+            </a:pPr>
+            <a:r>
+              <a:rPr lang="ar-AE" altLang="en-US" sz="1500" b="1" dirty="0">
+                <a:solidFill>
+                  <a:srgbClr val="B8860B"/>
+                </a:solidFill>
+                <a:latin typeface="Noto Naskh Arabic"/>
+                <a:cs typeface="adwa-assalaf"/>
+              </a:rPr>
+              <a:t>دور الشاشة:</a:t>
+            </a:r>
+            <a:endParaRPr lang="ar-AE" sz="1500" dirty="0"/>
+          </a:p>
+        </p:txBody>
+      </p:sp>
+      <p:sp>
+        <p:nvSpPr>
+          <p:cNvPr id="6" name="Text 4"/>
+          <p:cNvSpPr txBox="1"/>
+          <p:nvPr/>
+        </p:nvSpPr>
+        <p:spPr>
+          <a:xfrm>
+            <a:off x="731520" y="1161288"/>
+            <a:ext cx="9857232" cy="530352"/>
+          </a:xfrm>
+          <a:prstGeom prst="rect">
+            <a:avLst/>
+          </a:prstGeom>
+          <a:noFill/>
+          <a:ln/>
+        </p:spPr>
+        <p:txBody>
+          <a:bodyPr wrap="square" lIns="0" tIns="0" rIns="0" bIns="0" rtlCol="0" anchor="ctr"/>
+          <a:lstStyle/>
+          <a:p>
+            <a:pPr rtl="1" algn="r" indent="0" marL="0">
+              <a:buNone/>
+            </a:pPr>
+            <a:r>
+              <a:rPr lang="ar-AE" altLang="en-US" sz="1500" dirty="0">
+                <a:solidFill>
+                  <a:srgbClr val="12263F"/>
+                </a:solidFill>
+                <a:latin typeface="Noto Naskh Arabic"/>
+                <a:cs typeface="adwa-assalaf"/>
+              </a:rPr>
+              <a:t>تنشئ المشروع وتختار سير عمله ووكلاءه من ثلاثة أسئلة: الإدارة والنوع والمستوى</a:t>
+            </a:r>
+            <a:endParaRPr lang="ar-AE" sz="1500" dirty="0"/>
+          </a:p>
+        </p:txBody>
+      </p:sp>
+      <p:sp>
+        <p:nvSpPr>
+          <p:cNvPr id="7" name="screen-frame"/>
+          <p:cNvSpPr/>
+          <p:nvPr/>
+        </p:nvSpPr>
+        <p:spPr>
+          <a:xfrm>
+            <a:off x="1133856" y="1819656"/>
+            <a:ext cx="6784848" cy="3864483"/>
+          </a:xfrm>
+          <a:prstGeom prst="roundRect">
+            <a:avLst>
+              <a:gd name="adj" fmla="val 1893"/>
             </a:avLst>
           </a:prstGeom>
           <a:solidFill>
@@ -5073,7 +5329,7 @@
       </p:sp>
       <p:pic>
         <p:nvPicPr>
-          <p:cNvPr id="4" name="screenshot" descr="/tmp/claude-0/-home-user/11b98046-3116-585b-b221-e5c2e170e62a/scratchpad/deck/bshots/03_newproject.jpg">    </p:cNvPr>
+          <p:cNvPr id="8" name="screenshot" descr="/tmp/claude-0/-home-user/11b98046-3116-585b-b221-e5c2e170e62a/scratchpad/deck/bshots/03_newproject.jpg">    </p:cNvPr>
           <p:cNvPicPr>
             <a:picLocks noChangeAspect="1"/>
           </p:cNvPicPr>
@@ -5087,8 +5343,8 @@
         </p:blipFill>
         <p:spPr>
           <a:xfrm>
-            <a:off x="548640" y="1325880"/>
-            <a:ext cx="7315200" cy="4114800"/>
+            <a:off x="1188720" y="1874520"/>
+            <a:ext cx="6675120" cy="3754755"/>
           </a:xfrm>
           <a:prstGeom prst="rect">
             <a:avLst/>
@@ -5097,13 +5353,13 @@
       </p:pic>
       <p:sp>
         <p:nvSpPr>
-          <p:cNvPr id="5" name="num-1"/>
+          <p:cNvPr id="9" name="num-1"/>
           <p:cNvSpPr/>
           <p:nvPr/>
         </p:nvSpPr>
         <p:spPr>
           <a:xfrm>
-            <a:off x="11219688" y="1316736"/>
+            <a:off x="11219688" y="1865376"/>
             <a:ext cx="420624" cy="420624"/>
           </a:xfrm>
           <a:prstGeom prst="ellipse">
@@ -5122,13 +5378,13 @@
       </p:sp>
       <p:sp>
         <p:nvSpPr>
-          <p:cNvPr id="6" name="Text 3"/>
-          <p:cNvSpPr txBox="1"/>
-          <p:nvPr/>
-        </p:nvSpPr>
-        <p:spPr>
-          <a:xfrm>
-            <a:off x="11219688" y="1316736"/>
+          <p:cNvPr id="10" name="Text 7"/>
+          <p:cNvSpPr txBox="1"/>
+          <p:nvPr/>
+        </p:nvSpPr>
+        <p:spPr>
+          <a:xfrm>
+            <a:off x="11219688" y="1865376"/>
             <a:ext cx="420624" cy="420624"/>
           </a:xfrm>
           <a:prstGeom prst="rect">
@@ -5161,13 +5417,13 @@
       </p:sp>
       <p:sp>
         <p:nvSpPr>
-          <p:cNvPr id="7" name="Text 4"/>
-          <p:cNvSpPr txBox="1"/>
-          <p:nvPr/>
-        </p:nvSpPr>
-        <p:spPr>
-          <a:xfrm>
-            <a:off x="8183880" y="1298448"/>
+          <p:cNvPr id="11" name="Text 8"/>
+          <p:cNvSpPr txBox="1"/>
+          <p:nvPr/>
+        </p:nvSpPr>
+        <p:spPr>
+          <a:xfrm>
+            <a:off x="8183880" y="1847088"/>
             <a:ext cx="2889504" cy="384048"/>
           </a:xfrm>
           <a:prstGeom prst="rect">
@@ -5199,13 +5455,13 @@
       </p:sp>
       <p:sp>
         <p:nvSpPr>
-          <p:cNvPr id="8" name="Text 5"/>
-          <p:cNvSpPr txBox="1"/>
-          <p:nvPr/>
-        </p:nvSpPr>
-        <p:spPr>
-          <a:xfrm>
-            <a:off x="8183880" y="1682496"/>
+          <p:cNvPr id="12" name="Text 9"/>
+          <p:cNvSpPr txBox="1"/>
+          <p:nvPr/>
+        </p:nvSpPr>
+        <p:spPr>
+          <a:xfrm>
+            <a:off x="8183880" y="2231136"/>
             <a:ext cx="2889504" cy="758952"/>
           </a:xfrm>
           <a:prstGeom prst="rect">
@@ -5237,13 +5493,13 @@
       </p:sp>
       <p:sp>
         <p:nvSpPr>
-          <p:cNvPr id="9" name="num-2"/>
+          <p:cNvPr id="13" name="num-2"/>
           <p:cNvSpPr/>
           <p:nvPr/>
         </p:nvSpPr>
         <p:spPr>
           <a:xfrm>
-            <a:off x="11219688" y="2459736"/>
+            <a:off x="11219688" y="3008376"/>
             <a:ext cx="420624" cy="420624"/>
           </a:xfrm>
           <a:prstGeom prst="ellipse">
@@ -5262,13 +5518,13 @@
       </p:sp>
       <p:sp>
         <p:nvSpPr>
-          <p:cNvPr id="10" name="Text 7"/>
-          <p:cNvSpPr txBox="1"/>
-          <p:nvPr/>
-        </p:nvSpPr>
-        <p:spPr>
-          <a:xfrm>
-            <a:off x="11219688" y="2459736"/>
+          <p:cNvPr id="14" name="Text 11"/>
+          <p:cNvSpPr txBox="1"/>
+          <p:nvPr/>
+        </p:nvSpPr>
+        <p:spPr>
+          <a:xfrm>
+            <a:off x="11219688" y="3008376"/>
             <a:ext cx="420624" cy="420624"/>
           </a:xfrm>
           <a:prstGeom prst="rect">
@@ -5301,13 +5557,13 @@
       </p:sp>
       <p:sp>
         <p:nvSpPr>
-          <p:cNvPr id="11" name="Text 8"/>
-          <p:cNvSpPr txBox="1"/>
-          <p:nvPr/>
-        </p:nvSpPr>
-        <p:spPr>
-          <a:xfrm>
-            <a:off x="8183880" y="2441448"/>
+          <p:cNvPr id="15" name="Text 12"/>
+          <p:cNvSpPr txBox="1"/>
+          <p:nvPr/>
+        </p:nvSpPr>
+        <p:spPr>
+          <a:xfrm>
+            <a:off x="8183880" y="2990088"/>
             <a:ext cx="2889504" cy="384048"/>
           </a:xfrm>
           <a:prstGeom prst="rect">
@@ -5339,13 +5595,13 @@
       </p:sp>
       <p:sp>
         <p:nvSpPr>
-          <p:cNvPr id="12" name="Text 9"/>
-          <p:cNvSpPr txBox="1"/>
-          <p:nvPr/>
-        </p:nvSpPr>
-        <p:spPr>
-          <a:xfrm>
-            <a:off x="8183880" y="2825496"/>
+          <p:cNvPr id="16" name="Text 13"/>
+          <p:cNvSpPr txBox="1"/>
+          <p:nvPr/>
+        </p:nvSpPr>
+        <p:spPr>
+          <a:xfrm>
+            <a:off x="8183880" y="3374136"/>
             <a:ext cx="2889504" cy="758952"/>
           </a:xfrm>
           <a:prstGeom prst="rect">
@@ -5377,13 +5633,13 @@
       </p:sp>
       <p:sp>
         <p:nvSpPr>
-          <p:cNvPr id="13" name="num-3"/>
+          <p:cNvPr id="17" name="num-3"/>
           <p:cNvSpPr/>
           <p:nvPr/>
         </p:nvSpPr>
         <p:spPr>
           <a:xfrm>
-            <a:off x="11219688" y="3602736"/>
+            <a:off x="11219688" y="4151376"/>
             <a:ext cx="420624" cy="420624"/>
           </a:xfrm>
           <a:prstGeom prst="ellipse">
@@ -5402,13 +5658,13 @@
       </p:sp>
       <p:sp>
         <p:nvSpPr>
-          <p:cNvPr id="14" name="Text 11"/>
-          <p:cNvSpPr txBox="1"/>
-          <p:nvPr/>
-        </p:nvSpPr>
-        <p:spPr>
-          <a:xfrm>
-            <a:off x="11219688" y="3602736"/>
+          <p:cNvPr id="18" name="Text 15"/>
+          <p:cNvSpPr txBox="1"/>
+          <p:nvPr/>
+        </p:nvSpPr>
+        <p:spPr>
+          <a:xfrm>
+            <a:off x="11219688" y="4151376"/>
             <a:ext cx="420624" cy="420624"/>
           </a:xfrm>
           <a:prstGeom prst="rect">
@@ -5441,13 +5697,13 @@
       </p:sp>
       <p:sp>
         <p:nvSpPr>
-          <p:cNvPr id="15" name="Text 12"/>
-          <p:cNvSpPr txBox="1"/>
-          <p:nvPr/>
-        </p:nvSpPr>
-        <p:spPr>
-          <a:xfrm>
-            <a:off x="8183880" y="3584448"/>
+          <p:cNvPr id="19" name="Text 16"/>
+          <p:cNvSpPr txBox="1"/>
+          <p:nvPr/>
+        </p:nvSpPr>
+        <p:spPr>
+          <a:xfrm>
+            <a:off x="8183880" y="4133088"/>
             <a:ext cx="2889504" cy="384048"/>
           </a:xfrm>
           <a:prstGeom prst="rect">
@@ -5479,13 +5735,13 @@
       </p:sp>
       <p:sp>
         <p:nvSpPr>
-          <p:cNvPr id="16" name="Text 13"/>
-          <p:cNvSpPr txBox="1"/>
-          <p:nvPr/>
-        </p:nvSpPr>
-        <p:spPr>
-          <a:xfrm>
-            <a:off x="8183880" y="3968496"/>
+          <p:cNvPr id="20" name="Text 17"/>
+          <p:cNvSpPr txBox="1"/>
+          <p:nvPr/>
+        </p:nvSpPr>
+        <p:spPr>
+          <a:xfrm>
+            <a:off x="8183880" y="4517136"/>
             <a:ext cx="2889504" cy="758952"/>
           </a:xfrm>
           <a:prstGeom prst="rect">
@@ -5633,18 +5889,146 @@
       </p:sp>
       <p:sp>
         <p:nvSpPr>
-          <p:cNvPr id="3" name="screen-frame"/>
+          <p:cNvPr id="3" name="role-band"/>
           <p:cNvSpPr/>
           <p:nvPr/>
         </p:nvSpPr>
         <p:spPr>
           <a:xfrm>
-            <a:off x="493776" y="1271016"/>
-            <a:ext cx="7424928" cy="4224528"/>
+            <a:off x="548640" y="1161288"/>
+            <a:ext cx="11091672" cy="530352"/>
           </a:xfrm>
           <a:prstGeom prst="roundRect">
             <a:avLst>
-              <a:gd name="adj" fmla="val 1732"/>
+              <a:gd name="adj" fmla="val 13793"/>
+            </a:avLst>
+          </a:prstGeom>
+          <a:solidFill>
+            <a:srgbClr val="EAF2FA"/>
+          </a:solidFill>
+          <a:ln w="12700">
+            <a:solidFill>
+              <a:srgbClr val="EAF2FA"/>
+            </a:solidFill>
+            <a:prstDash val="solid"/>
+          </a:ln>
+        </p:spPr>
+      </p:sp>
+      <p:sp>
+        <p:nvSpPr>
+          <p:cNvPr id="4" name="Shape 2"/>
+          <p:cNvSpPr/>
+          <p:nvPr/>
+        </p:nvSpPr>
+        <p:spPr>
+          <a:xfrm>
+            <a:off x="11548872" y="1161288"/>
+            <a:ext cx="91440" cy="530352"/>
+          </a:xfrm>
+          <a:prstGeom prst="rect">
+            <a:avLst/>
+          </a:prstGeom>
+          <a:solidFill>
+            <a:srgbClr val="B8860B"/>
+          </a:solidFill>
+          <a:ln w="12700">
+            <a:solidFill>
+              <a:srgbClr val="B8860B"/>
+            </a:solidFill>
+            <a:prstDash val="solid"/>
+          </a:ln>
+        </p:spPr>
+      </p:sp>
+      <p:sp>
+        <p:nvSpPr>
+          <p:cNvPr id="5" name="Text 3"/>
+          <p:cNvSpPr txBox="1"/>
+          <p:nvPr/>
+        </p:nvSpPr>
+        <p:spPr>
+          <a:xfrm>
+            <a:off x="10515600" y="1161288"/>
+            <a:ext cx="914400" cy="530352"/>
+          </a:xfrm>
+          <a:prstGeom prst="rect">
+            <a:avLst/>
+          </a:prstGeom>
+          <a:noFill/>
+          <a:ln/>
+        </p:spPr>
+        <p:txBody>
+          <a:bodyPr wrap="square" lIns="0" tIns="0" rIns="0" bIns="0" rtlCol="0" anchor="ctr"/>
+          <a:lstStyle/>
+          <a:p>
+            <a:pPr rtl="1" algn="r" indent="0" marL="0">
+              <a:buNone/>
+            </a:pPr>
+            <a:r>
+              <a:rPr lang="ar-AE" altLang="en-US" sz="1500" b="1" dirty="0">
+                <a:solidFill>
+                  <a:srgbClr val="B8860B"/>
+                </a:solidFill>
+                <a:latin typeface="Noto Naskh Arabic"/>
+                <a:cs typeface="adwa-assalaf"/>
+              </a:rPr>
+              <a:t>دور الشاشة:</a:t>
+            </a:r>
+            <a:endParaRPr lang="ar-AE" sz="1500" dirty="0"/>
+          </a:p>
+        </p:txBody>
+      </p:sp>
+      <p:sp>
+        <p:nvSpPr>
+          <p:cNvPr id="6" name="Text 4"/>
+          <p:cNvSpPr txBox="1"/>
+          <p:nvPr/>
+        </p:nvSpPr>
+        <p:spPr>
+          <a:xfrm>
+            <a:off x="731520" y="1161288"/>
+            <a:ext cx="9857232" cy="530352"/>
+          </a:xfrm>
+          <a:prstGeom prst="rect">
+            <a:avLst/>
+          </a:prstGeom>
+          <a:noFill/>
+          <a:ln/>
+        </p:spPr>
+        <p:txBody>
+          <a:bodyPr wrap="square" lIns="0" tIns="0" rIns="0" bIns="0" rtlCol="0" anchor="ctr"/>
+          <a:lstStyle/>
+          <a:p>
+            <a:pPr rtl="1" algn="r" indent="0" marL="0">
+              <a:buNone/>
+            </a:pPr>
+            <a:r>
+              <a:rPr lang="ar-AE" altLang="en-US" sz="1500" dirty="0">
+                <a:solidFill>
+                  <a:srgbClr val="12263F"/>
+                </a:solidFill>
+                <a:latin typeface="Noto Naskh Arabic"/>
+                <a:cs typeface="adwa-assalaf"/>
+              </a:rPr>
+              <a:t>غرفة القيادة للمشروع: العمل التالي ومن ينفذه، والتشغيل والإيقاف، والنص وهو يُكتب</a:t>
+            </a:r>
+            <a:endParaRPr lang="ar-AE" sz="1500" dirty="0"/>
+          </a:p>
+        </p:txBody>
+      </p:sp>
+      <p:sp>
+        <p:nvSpPr>
+          <p:cNvPr id="7" name="screen-frame"/>
+          <p:cNvSpPr/>
+          <p:nvPr/>
+        </p:nvSpPr>
+        <p:spPr>
+          <a:xfrm>
+            <a:off x="1133856" y="1819656"/>
+            <a:ext cx="6784848" cy="3864483"/>
+          </a:xfrm>
+          <a:prstGeom prst="roundRect">
+            <a:avLst>
+              <a:gd name="adj" fmla="val 1893"/>
             </a:avLst>
           </a:prstGeom>
           <a:solidFill>
@@ -5667,7 +6051,7 @@
       </p:sp>
       <p:pic>
         <p:nvPicPr>
-          <p:cNvPr id="4" name="screenshot" descr="/tmp/claude-0/-home-user/11b98046-3116-585b-b221-e5c2e170e62a/scratchpad/deck/bshots/04_project.jpg">    </p:cNvPr>
+          <p:cNvPr id="8" name="screenshot" descr="/tmp/claude-0/-home-user/11b98046-3116-585b-b221-e5c2e170e62a/scratchpad/deck/bshots/04_project.jpg">    </p:cNvPr>
           <p:cNvPicPr>
             <a:picLocks noChangeAspect="1"/>
           </p:cNvPicPr>
@@ -5681,8 +6065,8 @@
         </p:blipFill>
         <p:spPr>
           <a:xfrm>
-            <a:off x="548640" y="1325880"/>
-            <a:ext cx="7315200" cy="4114800"/>
+            <a:off x="1188720" y="1874520"/>
+            <a:ext cx="6675120" cy="3754755"/>
           </a:xfrm>
           <a:prstGeom prst="rect">
             <a:avLst/>
@@ -5691,13 +6075,13 @@
       </p:pic>
       <p:sp>
         <p:nvSpPr>
-          <p:cNvPr id="5" name="num-1"/>
+          <p:cNvPr id="9" name="num-1"/>
           <p:cNvSpPr/>
           <p:nvPr/>
         </p:nvSpPr>
         <p:spPr>
           <a:xfrm>
-            <a:off x="11219688" y="1316736"/>
+            <a:off x="11219688" y="1865376"/>
             <a:ext cx="420624" cy="420624"/>
           </a:xfrm>
           <a:prstGeom prst="ellipse">
@@ -5716,13 +6100,13 @@
       </p:sp>
       <p:sp>
         <p:nvSpPr>
-          <p:cNvPr id="6" name="Text 3"/>
-          <p:cNvSpPr txBox="1"/>
-          <p:nvPr/>
-        </p:nvSpPr>
-        <p:spPr>
-          <a:xfrm>
-            <a:off x="11219688" y="1316736"/>
+          <p:cNvPr id="10" name="Text 7"/>
+          <p:cNvSpPr txBox="1"/>
+          <p:nvPr/>
+        </p:nvSpPr>
+        <p:spPr>
+          <a:xfrm>
+            <a:off x="11219688" y="1865376"/>
             <a:ext cx="420624" cy="420624"/>
           </a:xfrm>
           <a:prstGeom prst="rect">
@@ -5755,13 +6139,13 @@
       </p:sp>
       <p:sp>
         <p:nvSpPr>
-          <p:cNvPr id="7" name="Text 4"/>
-          <p:cNvSpPr txBox="1"/>
-          <p:nvPr/>
-        </p:nvSpPr>
-        <p:spPr>
-          <a:xfrm>
-            <a:off x="8183880" y="1298448"/>
+          <p:cNvPr id="11" name="Text 8"/>
+          <p:cNvSpPr txBox="1"/>
+          <p:nvPr/>
+        </p:nvSpPr>
+        <p:spPr>
+          <a:xfrm>
+            <a:off x="8183880" y="1847088"/>
             <a:ext cx="2889504" cy="384048"/>
           </a:xfrm>
           <a:prstGeom prst="rect">
@@ -5793,13 +6177,13 @@
       </p:sp>
       <p:sp>
         <p:nvSpPr>
-          <p:cNvPr id="8" name="Text 5"/>
-          <p:cNvSpPr txBox="1"/>
-          <p:nvPr/>
-        </p:nvSpPr>
-        <p:spPr>
-          <a:xfrm>
-            <a:off x="8183880" y="1682496"/>
+          <p:cNvPr id="12" name="Text 9"/>
+          <p:cNvSpPr txBox="1"/>
+          <p:nvPr/>
+        </p:nvSpPr>
+        <p:spPr>
+          <a:xfrm>
+            <a:off x="8183880" y="2231136"/>
             <a:ext cx="2889504" cy="758952"/>
           </a:xfrm>
           <a:prstGeom prst="rect">
@@ -5831,13 +6215,13 @@
       </p:sp>
       <p:sp>
         <p:nvSpPr>
-          <p:cNvPr id="9" name="num-2"/>
+          <p:cNvPr id="13" name="num-2"/>
           <p:cNvSpPr/>
           <p:nvPr/>
         </p:nvSpPr>
         <p:spPr>
           <a:xfrm>
-            <a:off x="11219688" y="2459736"/>
+            <a:off x="11219688" y="3008376"/>
             <a:ext cx="420624" cy="420624"/>
           </a:xfrm>
           <a:prstGeom prst="ellipse">
@@ -5856,13 +6240,13 @@
       </p:sp>
       <p:sp>
         <p:nvSpPr>
-          <p:cNvPr id="10" name="Text 7"/>
-          <p:cNvSpPr txBox="1"/>
-          <p:nvPr/>
-        </p:nvSpPr>
-        <p:spPr>
-          <a:xfrm>
-            <a:off x="11219688" y="2459736"/>
+          <p:cNvPr id="14" name="Text 11"/>
+          <p:cNvSpPr txBox="1"/>
+          <p:nvPr/>
+        </p:nvSpPr>
+        <p:spPr>
+          <a:xfrm>
+            <a:off x="11219688" y="3008376"/>
             <a:ext cx="420624" cy="420624"/>
           </a:xfrm>
           <a:prstGeom prst="rect">
@@ -5895,13 +6279,13 @@
       </p:sp>
       <p:sp>
         <p:nvSpPr>
-          <p:cNvPr id="11" name="Text 8"/>
-          <p:cNvSpPr txBox="1"/>
-          <p:nvPr/>
-        </p:nvSpPr>
-        <p:spPr>
-          <a:xfrm>
-            <a:off x="8183880" y="2441448"/>
+          <p:cNvPr id="15" name="Text 12"/>
+          <p:cNvSpPr txBox="1"/>
+          <p:nvPr/>
+        </p:nvSpPr>
+        <p:spPr>
+          <a:xfrm>
+            <a:off x="8183880" y="2990088"/>
             <a:ext cx="2889504" cy="384048"/>
           </a:xfrm>
           <a:prstGeom prst="rect">
@@ -5933,13 +6317,13 @@
       </p:sp>
       <p:sp>
         <p:nvSpPr>
-          <p:cNvPr id="12" name="Text 9"/>
-          <p:cNvSpPr txBox="1"/>
-          <p:nvPr/>
-        </p:nvSpPr>
-        <p:spPr>
-          <a:xfrm>
-            <a:off x="8183880" y="2825496"/>
+          <p:cNvPr id="16" name="Text 13"/>
+          <p:cNvSpPr txBox="1"/>
+          <p:nvPr/>
+        </p:nvSpPr>
+        <p:spPr>
+          <a:xfrm>
+            <a:off x="8183880" y="3374136"/>
             <a:ext cx="2889504" cy="758952"/>
           </a:xfrm>
           <a:prstGeom prst="rect">
@@ -5971,13 +6355,13 @@
       </p:sp>
       <p:sp>
         <p:nvSpPr>
-          <p:cNvPr id="13" name="num-3"/>
+          <p:cNvPr id="17" name="num-3"/>
           <p:cNvSpPr/>
           <p:nvPr/>
         </p:nvSpPr>
         <p:spPr>
           <a:xfrm>
-            <a:off x="11219688" y="3602736"/>
+            <a:off x="11219688" y="4151376"/>
             <a:ext cx="420624" cy="420624"/>
           </a:xfrm>
           <a:prstGeom prst="ellipse">
@@ -5996,13 +6380,13 @@
       </p:sp>
       <p:sp>
         <p:nvSpPr>
-          <p:cNvPr id="14" name="Text 11"/>
-          <p:cNvSpPr txBox="1"/>
-          <p:nvPr/>
-        </p:nvSpPr>
-        <p:spPr>
-          <a:xfrm>
-            <a:off x="11219688" y="3602736"/>
+          <p:cNvPr id="18" name="Text 15"/>
+          <p:cNvSpPr txBox="1"/>
+          <p:nvPr/>
+        </p:nvSpPr>
+        <p:spPr>
+          <a:xfrm>
+            <a:off x="11219688" y="4151376"/>
             <a:ext cx="420624" cy="420624"/>
           </a:xfrm>
           <a:prstGeom prst="rect">
@@ -6035,13 +6419,13 @@
       </p:sp>
       <p:sp>
         <p:nvSpPr>
-          <p:cNvPr id="15" name="Text 12"/>
-          <p:cNvSpPr txBox="1"/>
-          <p:nvPr/>
-        </p:nvSpPr>
-        <p:spPr>
-          <a:xfrm>
-            <a:off x="8183880" y="3584448"/>
+          <p:cNvPr id="19" name="Text 16"/>
+          <p:cNvSpPr txBox="1"/>
+          <p:nvPr/>
+        </p:nvSpPr>
+        <p:spPr>
+          <a:xfrm>
+            <a:off x="8183880" y="4133088"/>
             <a:ext cx="2889504" cy="384048"/>
           </a:xfrm>
           <a:prstGeom prst="rect">
@@ -6073,13 +6457,13 @@
       </p:sp>
       <p:sp>
         <p:nvSpPr>
-          <p:cNvPr id="16" name="Text 13"/>
-          <p:cNvSpPr txBox="1"/>
-          <p:nvPr/>
-        </p:nvSpPr>
-        <p:spPr>
-          <a:xfrm>
-            <a:off x="8183880" y="3968496"/>
+          <p:cNvPr id="20" name="Text 17"/>
+          <p:cNvSpPr txBox="1"/>
+          <p:nvPr/>
+        </p:nvSpPr>
+        <p:spPr>
+          <a:xfrm>
+            <a:off x="8183880" y="4517136"/>
             <a:ext cx="2889504" cy="758952"/>
           </a:xfrm>
           <a:prstGeom prst="rect">
@@ -6227,18 +6611,146 @@
       </p:sp>
       <p:sp>
         <p:nvSpPr>
-          <p:cNvPr id="3" name="screen-frame"/>
+          <p:cNvPr id="3" name="role-band"/>
           <p:cNvSpPr/>
           <p:nvPr/>
         </p:nvSpPr>
         <p:spPr>
           <a:xfrm>
-            <a:off x="493776" y="1271016"/>
-            <a:ext cx="7424928" cy="4224528"/>
+            <a:off x="548640" y="1161288"/>
+            <a:ext cx="11091672" cy="530352"/>
           </a:xfrm>
           <a:prstGeom prst="roundRect">
             <a:avLst>
-              <a:gd name="adj" fmla="val 1732"/>
+              <a:gd name="adj" fmla="val 13793"/>
+            </a:avLst>
+          </a:prstGeom>
+          <a:solidFill>
+            <a:srgbClr val="EAF2FA"/>
+          </a:solidFill>
+          <a:ln w="12700">
+            <a:solidFill>
+              <a:srgbClr val="EAF2FA"/>
+            </a:solidFill>
+            <a:prstDash val="solid"/>
+          </a:ln>
+        </p:spPr>
+      </p:sp>
+      <p:sp>
+        <p:nvSpPr>
+          <p:cNvPr id="4" name="Shape 2"/>
+          <p:cNvSpPr/>
+          <p:nvPr/>
+        </p:nvSpPr>
+        <p:spPr>
+          <a:xfrm>
+            <a:off x="11548872" y="1161288"/>
+            <a:ext cx="91440" cy="530352"/>
+          </a:xfrm>
+          <a:prstGeom prst="rect">
+            <a:avLst/>
+          </a:prstGeom>
+          <a:solidFill>
+            <a:srgbClr val="B8860B"/>
+          </a:solidFill>
+          <a:ln w="12700">
+            <a:solidFill>
+              <a:srgbClr val="B8860B"/>
+            </a:solidFill>
+            <a:prstDash val="solid"/>
+          </a:ln>
+        </p:spPr>
+      </p:sp>
+      <p:sp>
+        <p:nvSpPr>
+          <p:cNvPr id="5" name="Text 3"/>
+          <p:cNvSpPr txBox="1"/>
+          <p:nvPr/>
+        </p:nvSpPr>
+        <p:spPr>
+          <a:xfrm>
+            <a:off x="10515600" y="1161288"/>
+            <a:ext cx="914400" cy="530352"/>
+          </a:xfrm>
+          <a:prstGeom prst="rect">
+            <a:avLst/>
+          </a:prstGeom>
+          <a:noFill/>
+          <a:ln/>
+        </p:spPr>
+        <p:txBody>
+          <a:bodyPr wrap="square" lIns="0" tIns="0" rIns="0" bIns="0" rtlCol="0" anchor="ctr"/>
+          <a:lstStyle/>
+          <a:p>
+            <a:pPr rtl="1" algn="r" indent="0" marL="0">
+              <a:buNone/>
+            </a:pPr>
+            <a:r>
+              <a:rPr lang="ar-AE" altLang="en-US" sz="1500" b="1" dirty="0">
+                <a:solidFill>
+                  <a:srgbClr val="B8860B"/>
+                </a:solidFill>
+                <a:latin typeface="Noto Naskh Arabic"/>
+                <a:cs typeface="adwa-assalaf"/>
+              </a:rPr>
+              <a:t>دور الشاشة:</a:t>
+            </a:r>
+            <a:endParaRPr lang="ar-AE" sz="1500" dirty="0"/>
+          </a:p>
+        </p:txBody>
+      </p:sp>
+      <p:sp>
+        <p:nvSpPr>
+          <p:cNvPr id="6" name="Text 4"/>
+          <p:cNvSpPr txBox="1"/>
+          <p:nvPr/>
+        </p:nvSpPr>
+        <p:spPr>
+          <a:xfrm>
+            <a:off x="731520" y="1161288"/>
+            <a:ext cx="9857232" cy="530352"/>
+          </a:xfrm>
+          <a:prstGeom prst="rect">
+            <a:avLst/>
+          </a:prstGeom>
+          <a:noFill/>
+          <a:ln/>
+        </p:spPr>
+        <p:txBody>
+          <a:bodyPr wrap="square" lIns="0" tIns="0" rIns="0" bIns="0" rtlCol="0" anchor="ctr"/>
+          <a:lstStyle/>
+          <a:p>
+            <a:pPr rtl="1" algn="r" indent="0" marL="0">
+              <a:buNone/>
+            </a:pPr>
+            <a:r>
+              <a:rPr lang="ar-AE" altLang="en-US" sz="1500" dirty="0">
+                <a:solidFill>
+                  <a:srgbClr val="12263F"/>
+                </a:solidFill>
+                <a:latin typeface="Noto Naskh Arabic"/>
+                <a:cs typeface="adwa-assalaf"/>
+              </a:rPr>
+              <a:t>يشغّل الوكلاء تباعاً على المشروع كله، ويتوقفون عند قراركم</a:t>
+            </a:r>
+            <a:endParaRPr lang="ar-AE" sz="1500" dirty="0"/>
+          </a:p>
+        </p:txBody>
+      </p:sp>
+      <p:sp>
+        <p:nvSpPr>
+          <p:cNvPr id="7" name="screen-frame"/>
+          <p:cNvSpPr/>
+          <p:nvPr/>
+        </p:nvSpPr>
+        <p:spPr>
+          <a:xfrm>
+            <a:off x="1133856" y="1819656"/>
+            <a:ext cx="6784848" cy="3864483"/>
+          </a:xfrm>
+          <a:prstGeom prst="roundRect">
+            <a:avLst>
+              <a:gd name="adj" fmla="val 1893"/>
             </a:avLst>
           </a:prstGeom>
           <a:solidFill>
@@ -6261,7 +6773,7 @@
       </p:sp>
       <p:pic>
         <p:nvPicPr>
-          <p:cNvPr id="4" name="screenshot" descr="/tmp/claude-0/-home-user/11b98046-3116-585b-b221-e5c2e170e62a/scratchpad/deck/bshots/04c_autopilot.jpg">    </p:cNvPr>
+          <p:cNvPr id="8" name="screenshot" descr="/tmp/claude-0/-home-user/11b98046-3116-585b-b221-e5c2e170e62a/scratchpad/deck/bshots/04c_autopilot.jpg">    </p:cNvPr>
           <p:cNvPicPr>
             <a:picLocks noChangeAspect="1"/>
           </p:cNvPicPr>
@@ -6275,8 +6787,8 @@
         </p:blipFill>
         <p:spPr>
           <a:xfrm>
-            <a:off x="548640" y="1325880"/>
-            <a:ext cx="7315200" cy="4114800"/>
+            <a:off x="1188720" y="1874520"/>
+            <a:ext cx="6675120" cy="3754755"/>
           </a:xfrm>
           <a:prstGeom prst="rect">
             <a:avLst/>
@@ -6285,13 +6797,13 @@
       </p:pic>
       <p:sp>
         <p:nvSpPr>
-          <p:cNvPr id="5" name="num-1"/>
+          <p:cNvPr id="9" name="num-1"/>
           <p:cNvSpPr/>
           <p:nvPr/>
         </p:nvSpPr>
         <p:spPr>
           <a:xfrm>
-            <a:off x="11219688" y="1316736"/>
+            <a:off x="11219688" y="1865376"/>
             <a:ext cx="420624" cy="420624"/>
           </a:xfrm>
           <a:prstGeom prst="ellipse">
@@ -6310,13 +6822,13 @@
       </p:sp>
       <p:sp>
         <p:nvSpPr>
-          <p:cNvPr id="6" name="Text 3"/>
-          <p:cNvSpPr txBox="1"/>
-          <p:nvPr/>
-        </p:nvSpPr>
-        <p:spPr>
-          <a:xfrm>
-            <a:off x="11219688" y="1316736"/>
+          <p:cNvPr id="10" name="Text 7"/>
+          <p:cNvSpPr txBox="1"/>
+          <p:nvPr/>
+        </p:nvSpPr>
+        <p:spPr>
+          <a:xfrm>
+            <a:off x="11219688" y="1865376"/>
             <a:ext cx="420624" cy="420624"/>
           </a:xfrm>
           <a:prstGeom prst="rect">
@@ -6349,13 +6861,13 @@
       </p:sp>
       <p:sp>
         <p:nvSpPr>
-          <p:cNvPr id="7" name="Text 4"/>
-          <p:cNvSpPr txBox="1"/>
-          <p:nvPr/>
-        </p:nvSpPr>
-        <p:spPr>
-          <a:xfrm>
-            <a:off x="8183880" y="1298448"/>
+          <p:cNvPr id="11" name="Text 8"/>
+          <p:cNvSpPr txBox="1"/>
+          <p:nvPr/>
+        </p:nvSpPr>
+        <p:spPr>
+          <a:xfrm>
+            <a:off x="8183880" y="1847088"/>
             <a:ext cx="2889504" cy="384048"/>
           </a:xfrm>
           <a:prstGeom prst="rect">
@@ -6387,13 +6899,13 @@
       </p:sp>
       <p:sp>
         <p:nvSpPr>
-          <p:cNvPr id="8" name="Text 5"/>
-          <p:cNvSpPr txBox="1"/>
-          <p:nvPr/>
-        </p:nvSpPr>
-        <p:spPr>
-          <a:xfrm>
-            <a:off x="8183880" y="1682496"/>
+          <p:cNvPr id="12" name="Text 9"/>
+          <p:cNvSpPr txBox="1"/>
+          <p:nvPr/>
+        </p:nvSpPr>
+        <p:spPr>
+          <a:xfrm>
+            <a:off x="8183880" y="2231136"/>
             <a:ext cx="2889504" cy="758952"/>
           </a:xfrm>
           <a:prstGeom prst="rect">
@@ -6425,13 +6937,13 @@
       </p:sp>
       <p:sp>
         <p:nvSpPr>
-          <p:cNvPr id="9" name="num-2"/>
+          <p:cNvPr id="13" name="num-2"/>
           <p:cNvSpPr/>
           <p:nvPr/>
         </p:nvSpPr>
         <p:spPr>
           <a:xfrm>
-            <a:off x="11219688" y="2459736"/>
+            <a:off x="11219688" y="3008376"/>
             <a:ext cx="420624" cy="420624"/>
           </a:xfrm>
           <a:prstGeom prst="ellipse">
@@ -6450,13 +6962,13 @@
       </p:sp>
       <p:sp>
         <p:nvSpPr>
-          <p:cNvPr id="10" name="Text 7"/>
-          <p:cNvSpPr txBox="1"/>
-          <p:nvPr/>
-        </p:nvSpPr>
-        <p:spPr>
-          <a:xfrm>
-            <a:off x="11219688" y="2459736"/>
+          <p:cNvPr id="14" name="Text 11"/>
+          <p:cNvSpPr txBox="1"/>
+          <p:nvPr/>
+        </p:nvSpPr>
+        <p:spPr>
+          <a:xfrm>
+            <a:off x="11219688" y="3008376"/>
             <a:ext cx="420624" cy="420624"/>
           </a:xfrm>
           <a:prstGeom prst="rect">
@@ -6489,13 +7001,13 @@
       </p:sp>
       <p:sp>
         <p:nvSpPr>
-          <p:cNvPr id="11" name="Text 8"/>
-          <p:cNvSpPr txBox="1"/>
-          <p:nvPr/>
-        </p:nvSpPr>
-        <p:spPr>
-          <a:xfrm>
-            <a:off x="8183880" y="2441448"/>
+          <p:cNvPr id="15" name="Text 12"/>
+          <p:cNvSpPr txBox="1"/>
+          <p:nvPr/>
+        </p:nvSpPr>
+        <p:spPr>
+          <a:xfrm>
+            <a:off x="8183880" y="2990088"/>
             <a:ext cx="2889504" cy="384048"/>
           </a:xfrm>
           <a:prstGeom prst="rect">
@@ -6527,13 +7039,13 @@
       </p:sp>
       <p:sp>
         <p:nvSpPr>
-          <p:cNvPr id="12" name="Text 9"/>
-          <p:cNvSpPr txBox="1"/>
-          <p:nvPr/>
-        </p:nvSpPr>
-        <p:spPr>
-          <a:xfrm>
-            <a:off x="8183880" y="2825496"/>
+          <p:cNvPr id="16" name="Text 13"/>
+          <p:cNvSpPr txBox="1"/>
+          <p:nvPr/>
+        </p:nvSpPr>
+        <p:spPr>
+          <a:xfrm>
+            <a:off x="8183880" y="3374136"/>
             <a:ext cx="2889504" cy="758952"/>
           </a:xfrm>
           <a:prstGeom prst="rect">
@@ -6565,13 +7077,13 @@
       </p:sp>
       <p:sp>
         <p:nvSpPr>
-          <p:cNvPr id="13" name="num-3"/>
+          <p:cNvPr id="17" name="num-3"/>
           <p:cNvSpPr/>
           <p:nvPr/>
         </p:nvSpPr>
         <p:spPr>
           <a:xfrm>
-            <a:off x="11219688" y="3602736"/>
+            <a:off x="11219688" y="4151376"/>
             <a:ext cx="420624" cy="420624"/>
           </a:xfrm>
           <a:prstGeom prst="ellipse">
@@ -6590,13 +7102,13 @@
       </p:sp>
       <p:sp>
         <p:nvSpPr>
-          <p:cNvPr id="14" name="Text 11"/>
-          <p:cNvSpPr txBox="1"/>
-          <p:nvPr/>
-        </p:nvSpPr>
-        <p:spPr>
-          <a:xfrm>
-            <a:off x="11219688" y="3602736"/>
+          <p:cNvPr id="18" name="Text 15"/>
+          <p:cNvSpPr txBox="1"/>
+          <p:nvPr/>
+        </p:nvSpPr>
+        <p:spPr>
+          <a:xfrm>
+            <a:off x="11219688" y="4151376"/>
             <a:ext cx="420624" cy="420624"/>
           </a:xfrm>
           <a:prstGeom prst="rect">
@@ -6629,13 +7141,13 @@
       </p:sp>
       <p:sp>
         <p:nvSpPr>
-          <p:cNvPr id="15" name="Text 12"/>
-          <p:cNvSpPr txBox="1"/>
-          <p:nvPr/>
-        </p:nvSpPr>
-        <p:spPr>
-          <a:xfrm>
-            <a:off x="8183880" y="3584448"/>
+          <p:cNvPr id="19" name="Text 16"/>
+          <p:cNvSpPr txBox="1"/>
+          <p:nvPr/>
+        </p:nvSpPr>
+        <p:spPr>
+          <a:xfrm>
+            <a:off x="8183880" y="4133088"/>
             <a:ext cx="2889504" cy="384048"/>
           </a:xfrm>
           <a:prstGeom prst="rect">
@@ -6667,13 +7179,13 @@
       </p:sp>
       <p:sp>
         <p:nvSpPr>
-          <p:cNvPr id="16" name="Text 13"/>
-          <p:cNvSpPr txBox="1"/>
-          <p:nvPr/>
-        </p:nvSpPr>
-        <p:spPr>
-          <a:xfrm>
-            <a:off x="8183880" y="3968496"/>
+          <p:cNvPr id="20" name="Text 17"/>
+          <p:cNvSpPr txBox="1"/>
+          <p:nvPr/>
+        </p:nvSpPr>
+        <p:spPr>
+          <a:xfrm>
+            <a:off x="8183880" y="4517136"/>
             <a:ext cx="2889504" cy="758952"/>
           </a:xfrm>
           <a:prstGeom prst="rect">
@@ -6821,18 +7333,146 @@
       </p:sp>
       <p:sp>
         <p:nvSpPr>
-          <p:cNvPr id="3" name="screen-frame"/>
+          <p:cNvPr id="3" name="role-band"/>
           <p:cNvSpPr/>
           <p:nvPr/>
         </p:nvSpPr>
         <p:spPr>
           <a:xfrm>
-            <a:off x="493776" y="1271016"/>
-            <a:ext cx="7424928" cy="4224528"/>
+            <a:off x="548640" y="1161288"/>
+            <a:ext cx="11091672" cy="530352"/>
           </a:xfrm>
           <a:prstGeom prst="roundRect">
             <a:avLst>
-              <a:gd name="adj" fmla="val 1732"/>
+              <a:gd name="adj" fmla="val 13793"/>
+            </a:avLst>
+          </a:prstGeom>
+          <a:solidFill>
+            <a:srgbClr val="EAF2FA"/>
+          </a:solidFill>
+          <a:ln w="12700">
+            <a:solidFill>
+              <a:srgbClr val="EAF2FA"/>
+            </a:solidFill>
+            <a:prstDash val="solid"/>
+          </a:ln>
+        </p:spPr>
+      </p:sp>
+      <p:sp>
+        <p:nvSpPr>
+          <p:cNvPr id="4" name="Shape 2"/>
+          <p:cNvSpPr/>
+          <p:nvPr/>
+        </p:nvSpPr>
+        <p:spPr>
+          <a:xfrm>
+            <a:off x="11548872" y="1161288"/>
+            <a:ext cx="91440" cy="530352"/>
+          </a:xfrm>
+          <a:prstGeom prst="rect">
+            <a:avLst/>
+          </a:prstGeom>
+          <a:solidFill>
+            <a:srgbClr val="B8860B"/>
+          </a:solidFill>
+          <a:ln w="12700">
+            <a:solidFill>
+              <a:srgbClr val="B8860B"/>
+            </a:solidFill>
+            <a:prstDash val="solid"/>
+          </a:ln>
+        </p:spPr>
+      </p:sp>
+      <p:sp>
+        <p:nvSpPr>
+          <p:cNvPr id="5" name="Text 3"/>
+          <p:cNvSpPr txBox="1"/>
+          <p:nvPr/>
+        </p:nvSpPr>
+        <p:spPr>
+          <a:xfrm>
+            <a:off x="10515600" y="1161288"/>
+            <a:ext cx="914400" cy="530352"/>
+          </a:xfrm>
+          <a:prstGeom prst="rect">
+            <a:avLst/>
+          </a:prstGeom>
+          <a:noFill/>
+          <a:ln/>
+        </p:spPr>
+        <p:txBody>
+          <a:bodyPr wrap="square" lIns="0" tIns="0" rIns="0" bIns="0" rtlCol="0" anchor="ctr"/>
+          <a:lstStyle/>
+          <a:p>
+            <a:pPr rtl="1" algn="r" indent="0" marL="0">
+              <a:buNone/>
+            </a:pPr>
+            <a:r>
+              <a:rPr lang="ar-AE" altLang="en-US" sz="1500" b="1" dirty="0">
+                <a:solidFill>
+                  <a:srgbClr val="B8860B"/>
+                </a:solidFill>
+                <a:latin typeface="Noto Naskh Arabic"/>
+                <a:cs typeface="adwa-assalaf"/>
+              </a:rPr>
+              <a:t>دور الشاشة:</a:t>
+            </a:r>
+            <a:endParaRPr lang="ar-AE" sz="1500" dirty="0"/>
+          </a:p>
+        </p:txBody>
+      </p:sp>
+      <p:sp>
+        <p:nvSpPr>
+          <p:cNvPr id="6" name="Text 4"/>
+          <p:cNvSpPr txBox="1"/>
+          <p:nvPr/>
+        </p:nvSpPr>
+        <p:spPr>
+          <a:xfrm>
+            <a:off x="731520" y="1161288"/>
+            <a:ext cx="9857232" cy="530352"/>
+          </a:xfrm>
+          <a:prstGeom prst="rect">
+            <a:avLst/>
+          </a:prstGeom>
+          <a:noFill/>
+          <a:ln/>
+        </p:spPr>
+        <p:txBody>
+          <a:bodyPr wrap="square" lIns="0" tIns="0" rIns="0" bIns="0" rtlCol="0" anchor="ctr"/>
+          <a:lstStyle/>
+          <a:p>
+            <a:pPr rtl="1" algn="r" indent="0" marL="0">
+              <a:buNone/>
+            </a:pPr>
+            <a:r>
+              <a:rPr lang="ar-AE" altLang="en-US" sz="1500" dirty="0">
+                <a:solidFill>
+                  <a:srgbClr val="12263F"/>
+                </a:solidFill>
+                <a:latin typeface="Noto Naskh Arabic"/>
+                <a:cs typeface="adwa-assalaf"/>
+              </a:rPr>
+              <a:t>خريطة المشروع: كل مهمة بوكيلها وصلاحيتها وبوابتها، ومنها التشغيل والاعتماد</a:t>
+            </a:r>
+            <a:endParaRPr lang="ar-AE" sz="1500" dirty="0"/>
+          </a:p>
+        </p:txBody>
+      </p:sp>
+      <p:sp>
+        <p:nvSpPr>
+          <p:cNvPr id="7" name="screen-frame"/>
+          <p:cNvSpPr/>
+          <p:nvPr/>
+        </p:nvSpPr>
+        <p:spPr>
+          <a:xfrm>
+            <a:off x="1133856" y="1819656"/>
+            <a:ext cx="6784848" cy="3864483"/>
+          </a:xfrm>
+          <a:prstGeom prst="roundRect">
+            <a:avLst>
+              <a:gd name="adj" fmla="val 1893"/>
             </a:avLst>
           </a:prstGeom>
           <a:solidFill>
@@ -6855,7 +7495,7 @@
       </p:sp>
       <p:pic>
         <p:nvPicPr>
-          <p:cNvPr id="4" name="screenshot" descr="/tmp/claude-0/-home-user/11b98046-3116-585b-b221-e5c2e170e62a/scratchpad/deck/bshots/04d_plan.jpg">    </p:cNvPr>
+          <p:cNvPr id="8" name="screenshot" descr="/tmp/claude-0/-home-user/11b98046-3116-585b-b221-e5c2e170e62a/scratchpad/deck/bshots/04d_plan.jpg">    </p:cNvPr>
           <p:cNvPicPr>
             <a:picLocks noChangeAspect="1"/>
           </p:cNvPicPr>
@@ -6869,8 +7509,8 @@
         </p:blipFill>
         <p:spPr>
           <a:xfrm>
-            <a:off x="548640" y="1325880"/>
-            <a:ext cx="7315200" cy="4114800"/>
+            <a:off x="1188720" y="1874520"/>
+            <a:ext cx="6675120" cy="3754755"/>
           </a:xfrm>
           <a:prstGeom prst="rect">
             <a:avLst/>
@@ -6879,13 +7519,13 @@
       </p:pic>
       <p:sp>
         <p:nvSpPr>
-          <p:cNvPr id="5" name="num-1"/>
+          <p:cNvPr id="9" name="num-1"/>
           <p:cNvSpPr/>
           <p:nvPr/>
         </p:nvSpPr>
         <p:spPr>
           <a:xfrm>
-            <a:off x="11219688" y="1316736"/>
+            <a:off x="11219688" y="1865376"/>
             <a:ext cx="420624" cy="420624"/>
           </a:xfrm>
           <a:prstGeom prst="ellipse">
@@ -6904,13 +7544,13 @@
       </p:sp>
       <p:sp>
         <p:nvSpPr>
-          <p:cNvPr id="6" name="Text 3"/>
-          <p:cNvSpPr txBox="1"/>
-          <p:nvPr/>
-        </p:nvSpPr>
-        <p:spPr>
-          <a:xfrm>
-            <a:off x="11219688" y="1316736"/>
+          <p:cNvPr id="10" name="Text 7"/>
+          <p:cNvSpPr txBox="1"/>
+          <p:nvPr/>
+        </p:nvSpPr>
+        <p:spPr>
+          <a:xfrm>
+            <a:off x="11219688" y="1865376"/>
             <a:ext cx="420624" cy="420624"/>
           </a:xfrm>
           <a:prstGeom prst="rect">
@@ -6943,13 +7583,13 @@
       </p:sp>
       <p:sp>
         <p:nvSpPr>
-          <p:cNvPr id="7" name="Text 4"/>
-          <p:cNvSpPr txBox="1"/>
-          <p:nvPr/>
-        </p:nvSpPr>
-        <p:spPr>
-          <a:xfrm>
-            <a:off x="8183880" y="1298448"/>
+          <p:cNvPr id="11" name="Text 8"/>
+          <p:cNvSpPr txBox="1"/>
+          <p:nvPr/>
+        </p:nvSpPr>
+        <p:spPr>
+          <a:xfrm>
+            <a:off x="8183880" y="1847088"/>
             <a:ext cx="2889504" cy="384048"/>
           </a:xfrm>
           <a:prstGeom prst="rect">
@@ -6981,13 +7621,13 @@
       </p:sp>
       <p:sp>
         <p:nvSpPr>
-          <p:cNvPr id="8" name="Text 5"/>
-          <p:cNvSpPr txBox="1"/>
-          <p:nvPr/>
-        </p:nvSpPr>
-        <p:spPr>
-          <a:xfrm>
-            <a:off x="8183880" y="1682496"/>
+          <p:cNvPr id="12" name="Text 9"/>
+          <p:cNvSpPr txBox="1"/>
+          <p:nvPr/>
+        </p:nvSpPr>
+        <p:spPr>
+          <a:xfrm>
+            <a:off x="8183880" y="2231136"/>
             <a:ext cx="2889504" cy="758952"/>
           </a:xfrm>
           <a:prstGeom prst="rect">
@@ -7059,13 +7699,13 @@
       </p:sp>
       <p:sp>
         <p:nvSpPr>
-          <p:cNvPr id="9" name="num-2"/>
+          <p:cNvPr id="13" name="num-2"/>
           <p:cNvSpPr/>
           <p:nvPr/>
         </p:nvSpPr>
         <p:spPr>
           <a:xfrm>
-            <a:off x="11219688" y="2459736"/>
+            <a:off x="11219688" y="3008376"/>
             <a:ext cx="420624" cy="420624"/>
           </a:xfrm>
           <a:prstGeom prst="ellipse">
@@ -7084,13 +7724,13 @@
       </p:sp>
       <p:sp>
         <p:nvSpPr>
-          <p:cNvPr id="10" name="Text 7"/>
-          <p:cNvSpPr txBox="1"/>
-          <p:nvPr/>
-        </p:nvSpPr>
-        <p:spPr>
-          <a:xfrm>
-            <a:off x="11219688" y="2459736"/>
+          <p:cNvPr id="14" name="Text 11"/>
+          <p:cNvSpPr txBox="1"/>
+          <p:nvPr/>
+        </p:nvSpPr>
+        <p:spPr>
+          <a:xfrm>
+            <a:off x="11219688" y="3008376"/>
             <a:ext cx="420624" cy="420624"/>
           </a:xfrm>
           <a:prstGeom prst="rect">
@@ -7123,13 +7763,13 @@
       </p:sp>
       <p:sp>
         <p:nvSpPr>
-          <p:cNvPr id="11" name="Text 8"/>
-          <p:cNvSpPr txBox="1"/>
-          <p:nvPr/>
-        </p:nvSpPr>
-        <p:spPr>
-          <a:xfrm>
-            <a:off x="8183880" y="2441448"/>
+          <p:cNvPr id="15" name="Text 12"/>
+          <p:cNvSpPr txBox="1"/>
+          <p:nvPr/>
+        </p:nvSpPr>
+        <p:spPr>
+          <a:xfrm>
+            <a:off x="8183880" y="2990088"/>
             <a:ext cx="2889504" cy="384048"/>
           </a:xfrm>
           <a:prstGeom prst="rect">
@@ -7161,13 +7801,13 @@
       </p:sp>
       <p:sp>
         <p:nvSpPr>
-          <p:cNvPr id="12" name="Text 9"/>
-          <p:cNvSpPr txBox="1"/>
-          <p:nvPr/>
-        </p:nvSpPr>
-        <p:spPr>
-          <a:xfrm>
-            <a:off x="8183880" y="2825496"/>
+          <p:cNvPr id="16" name="Text 13"/>
+          <p:cNvSpPr txBox="1"/>
+          <p:nvPr/>
+        </p:nvSpPr>
+        <p:spPr>
+          <a:xfrm>
+            <a:off x="8183880" y="3374136"/>
             <a:ext cx="2889504" cy="758952"/>
           </a:xfrm>
           <a:prstGeom prst="rect">
@@ -7209,13 +7849,13 @@
       </p:sp>
       <p:sp>
         <p:nvSpPr>
-          <p:cNvPr id="13" name="num-3"/>
+          <p:cNvPr id="17" name="num-3"/>
           <p:cNvSpPr/>
           <p:nvPr/>
         </p:nvSpPr>
         <p:spPr>
           <a:xfrm>
-            <a:off x="11219688" y="3602736"/>
+            <a:off x="11219688" y="4151376"/>
             <a:ext cx="420624" cy="420624"/>
           </a:xfrm>
           <a:prstGeom prst="ellipse">
@@ -7234,13 +7874,13 @@
       </p:sp>
       <p:sp>
         <p:nvSpPr>
-          <p:cNvPr id="14" name="Text 11"/>
-          <p:cNvSpPr txBox="1"/>
-          <p:nvPr/>
-        </p:nvSpPr>
-        <p:spPr>
-          <a:xfrm>
-            <a:off x="11219688" y="3602736"/>
+          <p:cNvPr id="18" name="Text 15"/>
+          <p:cNvSpPr txBox="1"/>
+          <p:nvPr/>
+        </p:nvSpPr>
+        <p:spPr>
+          <a:xfrm>
+            <a:off x="11219688" y="4151376"/>
             <a:ext cx="420624" cy="420624"/>
           </a:xfrm>
           <a:prstGeom prst="rect">
@@ -7273,13 +7913,13 @@
       </p:sp>
       <p:sp>
         <p:nvSpPr>
-          <p:cNvPr id="15" name="Text 12"/>
-          <p:cNvSpPr txBox="1"/>
-          <p:nvPr/>
-        </p:nvSpPr>
-        <p:spPr>
-          <a:xfrm>
-            <a:off x="8183880" y="3584448"/>
+          <p:cNvPr id="19" name="Text 16"/>
+          <p:cNvSpPr txBox="1"/>
+          <p:nvPr/>
+        </p:nvSpPr>
+        <p:spPr>
+          <a:xfrm>
+            <a:off x="8183880" y="4133088"/>
             <a:ext cx="2889504" cy="384048"/>
           </a:xfrm>
           <a:prstGeom prst="rect">
@@ -7311,13 +7951,13 @@
       </p:sp>
       <p:sp>
         <p:nvSpPr>
-          <p:cNvPr id="16" name="Text 13"/>
-          <p:cNvSpPr txBox="1"/>
-          <p:nvPr/>
-        </p:nvSpPr>
-        <p:spPr>
-          <a:xfrm>
-            <a:off x="8183880" y="3968496"/>
+          <p:cNvPr id="20" name="Text 17"/>
+          <p:cNvSpPr txBox="1"/>
+          <p:nvPr/>
+        </p:nvSpPr>
+        <p:spPr>
+          <a:xfrm>
+            <a:off x="8183880" y="4517136"/>
             <a:ext cx="2889504" cy="758952"/>
           </a:xfrm>
           <a:prstGeom prst="rect">
@@ -7465,18 +8105,166 @@
       </p:sp>
       <p:sp>
         <p:nvSpPr>
-          <p:cNvPr id="3" name="screen-frame"/>
+          <p:cNvPr id="3" name="role-band"/>
           <p:cNvSpPr/>
           <p:nvPr/>
         </p:nvSpPr>
         <p:spPr>
           <a:xfrm>
-            <a:off x="493776" y="1271016"/>
-            <a:ext cx="7424928" cy="4224528"/>
+            <a:off x="548640" y="1161288"/>
+            <a:ext cx="11091672" cy="530352"/>
           </a:xfrm>
           <a:prstGeom prst="roundRect">
             <a:avLst>
-              <a:gd name="adj" fmla="val 1732"/>
+              <a:gd name="adj" fmla="val 13793"/>
+            </a:avLst>
+          </a:prstGeom>
+          <a:solidFill>
+            <a:srgbClr val="EAF2FA"/>
+          </a:solidFill>
+          <a:ln w="12700">
+            <a:solidFill>
+              <a:srgbClr val="EAF2FA"/>
+            </a:solidFill>
+            <a:prstDash val="solid"/>
+          </a:ln>
+        </p:spPr>
+      </p:sp>
+      <p:sp>
+        <p:nvSpPr>
+          <p:cNvPr id="4" name="Shape 2"/>
+          <p:cNvSpPr/>
+          <p:nvPr/>
+        </p:nvSpPr>
+        <p:spPr>
+          <a:xfrm>
+            <a:off x="11548872" y="1161288"/>
+            <a:ext cx="91440" cy="530352"/>
+          </a:xfrm>
+          <a:prstGeom prst="rect">
+            <a:avLst/>
+          </a:prstGeom>
+          <a:solidFill>
+            <a:srgbClr val="B8860B"/>
+          </a:solidFill>
+          <a:ln w="12700">
+            <a:solidFill>
+              <a:srgbClr val="B8860B"/>
+            </a:solidFill>
+            <a:prstDash val="solid"/>
+          </a:ln>
+        </p:spPr>
+      </p:sp>
+      <p:sp>
+        <p:nvSpPr>
+          <p:cNvPr id="5" name="Text 3"/>
+          <p:cNvSpPr txBox="1"/>
+          <p:nvPr/>
+        </p:nvSpPr>
+        <p:spPr>
+          <a:xfrm>
+            <a:off x="10515600" y="1161288"/>
+            <a:ext cx="914400" cy="530352"/>
+          </a:xfrm>
+          <a:prstGeom prst="rect">
+            <a:avLst/>
+          </a:prstGeom>
+          <a:noFill/>
+          <a:ln/>
+        </p:spPr>
+        <p:txBody>
+          <a:bodyPr wrap="square" lIns="0" tIns="0" rIns="0" bIns="0" rtlCol="0" anchor="ctr"/>
+          <a:lstStyle/>
+          <a:p>
+            <a:pPr rtl="1" algn="r" indent="0" marL="0">
+              <a:buNone/>
+            </a:pPr>
+            <a:r>
+              <a:rPr lang="ar-AE" altLang="en-US" sz="1500" b="1" dirty="0">
+                <a:solidFill>
+                  <a:srgbClr val="B8860B"/>
+                </a:solidFill>
+                <a:latin typeface="Noto Naskh Arabic"/>
+                <a:cs typeface="adwa-assalaf"/>
+              </a:rPr>
+              <a:t>دور الشاشة:</a:t>
+            </a:r>
+            <a:endParaRPr lang="ar-AE" sz="1500" dirty="0"/>
+          </a:p>
+        </p:txBody>
+      </p:sp>
+      <p:sp>
+        <p:nvSpPr>
+          <p:cNvPr id="6" name="Text 4"/>
+          <p:cNvSpPr txBox="1"/>
+          <p:nvPr/>
+        </p:nvSpPr>
+        <p:spPr>
+          <a:xfrm>
+            <a:off x="731520" y="1161288"/>
+            <a:ext cx="9857232" cy="530352"/>
+          </a:xfrm>
+          <a:prstGeom prst="rect">
+            <a:avLst/>
+          </a:prstGeom>
+          <a:noFill/>
+          <a:ln/>
+        </p:spPr>
+        <p:txBody>
+          <a:bodyPr wrap="square" lIns="0" tIns="0" rIns="0" bIns="0" rtlCol="0" anchor="ctr"/>
+          <a:lstStyle/>
+          <a:p>
+            <a:pPr rtl="1" algn="r" indent="0" marL="0">
+              <a:buNone/>
+            </a:pPr>
+            <a:r>
+              <a:rPr lang="ar-AE" altLang="en-US" sz="1500" dirty="0">
+                <a:solidFill>
+                  <a:srgbClr val="12263F"/>
+                </a:solidFill>
+                <a:latin typeface="Noto Naskh Arabic"/>
+                <a:cs typeface="adwa-assalaf"/>
+              </a:rPr>
+              <a:t>الطريق المتاح دائماً بلا مفتاح: حزمة تكليف كاملة تنقلونها إلى </a:t>
+            </a:r>
+            <a:r>
+              <a:rPr lang="ar-AE" altLang="en-US" sz="1500" dirty="0">
+                <a:solidFill>
+                  <a:srgbClr val="12263F"/>
+                </a:solidFill>
+                <a:latin typeface="Calibri"/>
+                <a:cs typeface="Calibri"/>
+              </a:rPr>
+              <a:t>Claude</a:t>
+            </a:r>
+            <a:r>
+              <a:rPr lang="ar-AE" altLang="en-US" sz="1500" dirty="0">
+                <a:solidFill>
+                  <a:srgbClr val="12263F"/>
+                </a:solidFill>
+                <a:latin typeface="Noto Naskh Arabic"/>
+                <a:cs typeface="adwa-assalaf"/>
+              </a:rPr>
+              <a:t> وتعيدون رده إلى المشروع</a:t>
+            </a:r>
+            <a:endParaRPr lang="ar-AE" sz="1500" dirty="0"/>
+          </a:p>
+        </p:txBody>
+      </p:sp>
+      <p:sp>
+        <p:nvSpPr>
+          <p:cNvPr id="7" name="screen-frame"/>
+          <p:cNvSpPr/>
+          <p:nvPr/>
+        </p:nvSpPr>
+        <p:spPr>
+          <a:xfrm>
+            <a:off x="1133856" y="1819656"/>
+            <a:ext cx="6784848" cy="3864483"/>
+          </a:xfrm>
+          <a:prstGeom prst="roundRect">
+            <a:avLst>
+              <a:gd name="adj" fmla="val 1893"/>
             </a:avLst>
           </a:prstGeom>
           <a:solidFill>
@@ -7499,7 +8287,7 @@
       </p:sp>
       <p:pic>
         <p:nvPicPr>
-          <p:cNvPr id="4" name="screenshot" descr="/tmp/claude-0/-home-user/11b98046-3116-585b-b221-e5c2e170e62a/scratchpad/deck/bshots/06_runstep.jpg">    </p:cNvPr>
+          <p:cNvPr id="8" name="screenshot" descr="/tmp/claude-0/-home-user/11b98046-3116-585b-b221-e5c2e170e62a/scratchpad/deck/bshots/06_runstep.jpg">    </p:cNvPr>
           <p:cNvPicPr>
             <a:picLocks noChangeAspect="1"/>
           </p:cNvPicPr>
@@ -7513,8 +8301,8 @@
         </p:blipFill>
         <p:spPr>
           <a:xfrm>
-            <a:off x="548640" y="1325880"/>
-            <a:ext cx="7315200" cy="4114800"/>
+            <a:off x="1188720" y="1874520"/>
+            <a:ext cx="6675120" cy="3754755"/>
           </a:xfrm>
           <a:prstGeom prst="rect">
             <a:avLst/>
@@ -7523,13 +8311,13 @@
       </p:pic>
       <p:sp>
         <p:nvSpPr>
-          <p:cNvPr id="5" name="num-1"/>
+          <p:cNvPr id="9" name="num-1"/>
           <p:cNvSpPr/>
           <p:nvPr/>
         </p:nvSpPr>
         <p:spPr>
           <a:xfrm>
-            <a:off x="11219688" y="1316736"/>
+            <a:off x="11219688" y="1865376"/>
             <a:ext cx="420624" cy="420624"/>
           </a:xfrm>
           <a:prstGeom prst="ellipse">
@@ -7548,13 +8336,13 @@
       </p:sp>
       <p:sp>
         <p:nvSpPr>
-          <p:cNvPr id="6" name="Text 3"/>
-          <p:cNvSpPr txBox="1"/>
-          <p:nvPr/>
-        </p:nvSpPr>
-        <p:spPr>
-          <a:xfrm>
-            <a:off x="11219688" y="1316736"/>
+          <p:cNvPr id="10" name="Text 7"/>
+          <p:cNvSpPr txBox="1"/>
+          <p:nvPr/>
+        </p:nvSpPr>
+        <p:spPr>
+          <a:xfrm>
+            <a:off x="11219688" y="1865376"/>
             <a:ext cx="420624" cy="420624"/>
           </a:xfrm>
           <a:prstGeom prst="rect">
@@ -7587,13 +8375,13 @@
       </p:sp>
       <p:sp>
         <p:nvSpPr>
-          <p:cNvPr id="7" name="Text 4"/>
-          <p:cNvSpPr txBox="1"/>
-          <p:nvPr/>
-        </p:nvSpPr>
-        <p:spPr>
-          <a:xfrm>
-            <a:off x="8183880" y="1298448"/>
+          <p:cNvPr id="11" name="Text 8"/>
+          <p:cNvSpPr txBox="1"/>
+          <p:nvPr/>
+        </p:nvSpPr>
+        <p:spPr>
+          <a:xfrm>
+            <a:off x="8183880" y="1847088"/>
             <a:ext cx="2889504" cy="384048"/>
           </a:xfrm>
           <a:prstGeom prst="rect">
@@ -7625,13 +8413,13 @@
       </p:sp>
       <p:sp>
         <p:nvSpPr>
-          <p:cNvPr id="8" name="Text 5"/>
-          <p:cNvSpPr txBox="1"/>
-          <p:nvPr/>
-        </p:nvSpPr>
-        <p:spPr>
-          <a:xfrm>
-            <a:off x="8183880" y="1682496"/>
+          <p:cNvPr id="12" name="Text 9"/>
+          <p:cNvSpPr txBox="1"/>
+          <p:nvPr/>
+        </p:nvSpPr>
+        <p:spPr>
+          <a:xfrm>
+            <a:off x="8183880" y="2231136"/>
             <a:ext cx="2889504" cy="758952"/>
           </a:xfrm>
           <a:prstGeom prst="rect">
@@ -7663,13 +8451,13 @@
       </p:sp>
       <p:sp>
         <p:nvSpPr>
-          <p:cNvPr id="9" name="num-2"/>
+          <p:cNvPr id="13" name="num-2"/>
           <p:cNvSpPr/>
           <p:nvPr/>
         </p:nvSpPr>
         <p:spPr>
           <a:xfrm>
-            <a:off x="11219688" y="2459736"/>
+            <a:off x="11219688" y="3008376"/>
             <a:ext cx="420624" cy="420624"/>
           </a:xfrm>
           <a:prstGeom prst="ellipse">
@@ -7688,13 +8476,13 @@
       </p:sp>
       <p:sp>
         <p:nvSpPr>
-          <p:cNvPr id="10" name="Text 7"/>
-          <p:cNvSpPr txBox="1"/>
-          <p:nvPr/>
-        </p:nvSpPr>
-        <p:spPr>
-          <a:xfrm>
-            <a:off x="11219688" y="2459736"/>
+          <p:cNvPr id="14" name="Text 11"/>
+          <p:cNvSpPr txBox="1"/>
+          <p:nvPr/>
+        </p:nvSpPr>
+        <p:spPr>
+          <a:xfrm>
+            <a:off x="11219688" y="3008376"/>
             <a:ext cx="420624" cy="420624"/>
           </a:xfrm>
           <a:prstGeom prst="rect">
@@ -7727,13 +8515,13 @@
       </p:sp>
       <p:sp>
         <p:nvSpPr>
-          <p:cNvPr id="11" name="Text 8"/>
-          <p:cNvSpPr txBox="1"/>
-          <p:nvPr/>
-        </p:nvSpPr>
-        <p:spPr>
-          <a:xfrm>
-            <a:off x="8183880" y="2441448"/>
+          <p:cNvPr id="15" name="Text 12"/>
+          <p:cNvSpPr txBox="1"/>
+          <p:nvPr/>
+        </p:nvSpPr>
+        <p:spPr>
+          <a:xfrm>
+            <a:off x="8183880" y="2990088"/>
             <a:ext cx="2889504" cy="384048"/>
           </a:xfrm>
           <a:prstGeom prst="rect">
@@ -7775,13 +8563,13 @@
       </p:sp>
       <p:sp>
         <p:nvSpPr>
-          <p:cNvPr id="12" name="Text 9"/>
-          <p:cNvSpPr txBox="1"/>
-          <p:nvPr/>
-        </p:nvSpPr>
-        <p:spPr>
-          <a:xfrm>
-            <a:off x="8183880" y="2825496"/>
+          <p:cNvPr id="16" name="Text 13"/>
+          <p:cNvSpPr txBox="1"/>
+          <p:nvPr/>
+        </p:nvSpPr>
+        <p:spPr>
+          <a:xfrm>
+            <a:off x="8183880" y="3374136"/>
             <a:ext cx="2889504" cy="758952"/>
           </a:xfrm>
           <a:prstGeom prst="rect">
@@ -7833,13 +8621,13 @@
       </p:sp>
       <p:sp>
         <p:nvSpPr>
-          <p:cNvPr id="13" name="num-3"/>
+          <p:cNvPr id="17" name="num-3"/>
           <p:cNvSpPr/>
           <p:nvPr/>
         </p:nvSpPr>
         <p:spPr>
           <a:xfrm>
-            <a:off x="11219688" y="3602736"/>
+            <a:off x="11219688" y="4151376"/>
             <a:ext cx="420624" cy="420624"/>
           </a:xfrm>
           <a:prstGeom prst="ellipse">
@@ -7858,13 +8646,13 @@
       </p:sp>
       <p:sp>
         <p:nvSpPr>
-          <p:cNvPr id="14" name="Text 11"/>
-          <p:cNvSpPr txBox="1"/>
-          <p:nvPr/>
-        </p:nvSpPr>
-        <p:spPr>
-          <a:xfrm>
-            <a:off x="11219688" y="3602736"/>
+          <p:cNvPr id="18" name="Text 15"/>
+          <p:cNvSpPr txBox="1"/>
+          <p:nvPr/>
+        </p:nvSpPr>
+        <p:spPr>
+          <a:xfrm>
+            <a:off x="11219688" y="4151376"/>
             <a:ext cx="420624" cy="420624"/>
           </a:xfrm>
           <a:prstGeom prst="rect">
@@ -7897,13 +8685,13 @@
       </p:sp>
       <p:sp>
         <p:nvSpPr>
-          <p:cNvPr id="15" name="Text 12"/>
-          <p:cNvSpPr txBox="1"/>
-          <p:nvPr/>
-        </p:nvSpPr>
-        <p:spPr>
-          <a:xfrm>
-            <a:off x="8183880" y="3584448"/>
+          <p:cNvPr id="19" name="Text 16"/>
+          <p:cNvSpPr txBox="1"/>
+          <p:nvPr/>
+        </p:nvSpPr>
+        <p:spPr>
+          <a:xfrm>
+            <a:off x="8183880" y="4133088"/>
             <a:ext cx="2889504" cy="384048"/>
           </a:xfrm>
           <a:prstGeom prst="rect">
@@ -7935,13 +8723,13 @@
       </p:sp>
       <p:sp>
         <p:nvSpPr>
-          <p:cNvPr id="16" name="Text 13"/>
-          <p:cNvSpPr txBox="1"/>
-          <p:nvPr/>
-        </p:nvSpPr>
-        <p:spPr>
-          <a:xfrm>
-            <a:off x="8183880" y="3968496"/>
+          <p:cNvPr id="20" name="Text 17"/>
+          <p:cNvSpPr txBox="1"/>
+          <p:nvPr/>
+        </p:nvSpPr>
+        <p:spPr>
+          <a:xfrm>
+            <a:off x="8183880" y="4517136"/>
             <a:ext cx="2889504" cy="758952"/>
           </a:xfrm>
           <a:prstGeom prst="rect">
@@ -8089,18 +8877,146 @@
       </p:sp>
       <p:sp>
         <p:nvSpPr>
-          <p:cNvPr id="3" name="screen-frame"/>
+          <p:cNvPr id="3" name="role-band"/>
           <p:cNvSpPr/>
           <p:nvPr/>
         </p:nvSpPr>
         <p:spPr>
           <a:xfrm>
-            <a:off x="493776" y="1271016"/>
-            <a:ext cx="7424928" cy="4224528"/>
+            <a:off x="548640" y="1161288"/>
+            <a:ext cx="11091672" cy="530352"/>
           </a:xfrm>
           <a:prstGeom prst="roundRect">
             <a:avLst>
-              <a:gd name="adj" fmla="val 1732"/>
+              <a:gd name="adj" fmla="val 13793"/>
+            </a:avLst>
+          </a:prstGeom>
+          <a:solidFill>
+            <a:srgbClr val="EAF2FA"/>
+          </a:solidFill>
+          <a:ln w="12700">
+            <a:solidFill>
+              <a:srgbClr val="EAF2FA"/>
+            </a:solidFill>
+            <a:prstDash val="solid"/>
+          </a:ln>
+        </p:spPr>
+      </p:sp>
+      <p:sp>
+        <p:nvSpPr>
+          <p:cNvPr id="4" name="Shape 2"/>
+          <p:cNvSpPr/>
+          <p:nvPr/>
+        </p:nvSpPr>
+        <p:spPr>
+          <a:xfrm>
+            <a:off x="11548872" y="1161288"/>
+            <a:ext cx="91440" cy="530352"/>
+          </a:xfrm>
+          <a:prstGeom prst="rect">
+            <a:avLst/>
+          </a:prstGeom>
+          <a:solidFill>
+            <a:srgbClr val="B8860B"/>
+          </a:solidFill>
+          <a:ln w="12700">
+            <a:solidFill>
+              <a:srgbClr val="B8860B"/>
+            </a:solidFill>
+            <a:prstDash val="solid"/>
+          </a:ln>
+        </p:spPr>
+      </p:sp>
+      <p:sp>
+        <p:nvSpPr>
+          <p:cNvPr id="5" name="Text 3"/>
+          <p:cNvSpPr txBox="1"/>
+          <p:nvPr/>
+        </p:nvSpPr>
+        <p:spPr>
+          <a:xfrm>
+            <a:off x="10515600" y="1161288"/>
+            <a:ext cx="914400" cy="530352"/>
+          </a:xfrm>
+          <a:prstGeom prst="rect">
+            <a:avLst/>
+          </a:prstGeom>
+          <a:noFill/>
+          <a:ln/>
+        </p:spPr>
+        <p:txBody>
+          <a:bodyPr wrap="square" lIns="0" tIns="0" rIns="0" bIns="0" rtlCol="0" anchor="ctr"/>
+          <a:lstStyle/>
+          <a:p>
+            <a:pPr rtl="1" algn="r" indent="0" marL="0">
+              <a:buNone/>
+            </a:pPr>
+            <a:r>
+              <a:rPr lang="ar-AE" altLang="en-US" sz="1500" b="1" dirty="0">
+                <a:solidFill>
+                  <a:srgbClr val="B8860B"/>
+                </a:solidFill>
+                <a:latin typeface="Noto Naskh Arabic"/>
+                <a:cs typeface="adwa-assalaf"/>
+              </a:rPr>
+              <a:t>دور الشاشة:</a:t>
+            </a:r>
+            <a:endParaRPr lang="ar-AE" sz="1500" dirty="0"/>
+          </a:p>
+        </p:txBody>
+      </p:sp>
+      <p:sp>
+        <p:nvSpPr>
+          <p:cNvPr id="6" name="Text 4"/>
+          <p:cNvSpPr txBox="1"/>
+          <p:nvPr/>
+        </p:nvSpPr>
+        <p:spPr>
+          <a:xfrm>
+            <a:off x="731520" y="1161288"/>
+            <a:ext cx="9857232" cy="530352"/>
+          </a:xfrm>
+          <a:prstGeom prst="rect">
+            <a:avLst/>
+          </a:prstGeom>
+          <a:noFill/>
+          <a:ln/>
+        </p:spPr>
+        <p:txBody>
+          <a:bodyPr wrap="square" lIns="0" tIns="0" rIns="0" bIns="0" rtlCol="0" anchor="ctr"/>
+          <a:lstStyle/>
+          <a:p>
+            <a:pPr rtl="1" algn="r" indent="0" marL="0">
+              <a:buNone/>
+            </a:pPr>
+            <a:r>
+              <a:rPr lang="ar-AE" altLang="en-US" sz="1500" dirty="0">
+                <a:solidFill>
+                  <a:srgbClr val="12263F"/>
+                </a:solidFill>
+                <a:latin typeface="Noto Naskh Arabic"/>
+                <a:cs typeface="adwa-assalaf"/>
+              </a:rPr>
+              <a:t>لوحة العمل: بطاقته ثم مخططه وحدة وحدة، ولا تبدأ الكتابة قبل اعتماده</a:t>
+            </a:r>
+            <a:endParaRPr lang="ar-AE" sz="1500" dirty="0"/>
+          </a:p>
+        </p:txBody>
+      </p:sp>
+      <p:sp>
+        <p:nvSpPr>
+          <p:cNvPr id="7" name="screen-frame"/>
+          <p:cNvSpPr/>
+          <p:nvPr/>
+        </p:nvSpPr>
+        <p:spPr>
+          <a:xfrm>
+            <a:off x="1133856" y="1819656"/>
+            <a:ext cx="6784848" cy="3864483"/>
+          </a:xfrm>
+          <a:prstGeom prst="roundRect">
+            <a:avLst>
+              <a:gd name="adj" fmla="val 1893"/>
             </a:avLst>
           </a:prstGeom>
           <a:solidFill>
@@ -8123,7 +9039,7 @@
       </p:sp>
       <p:pic>
         <p:nvPicPr>
-          <p:cNvPr id="4" name="screenshot" descr="/tmp/claude-0/-home-user/11b98046-3116-585b-b221-e5c2e170e62a/scratchpad/deck/bshots/05_book.jpg">    </p:cNvPr>
+          <p:cNvPr id="8" name="screenshot" descr="/tmp/claude-0/-home-user/11b98046-3116-585b-b221-e5c2e170e62a/scratchpad/deck/bshots/05_book.jpg">    </p:cNvPr>
           <p:cNvPicPr>
             <a:picLocks noChangeAspect="1"/>
           </p:cNvPicPr>
@@ -8137,8 +9053,8 @@
         </p:blipFill>
         <p:spPr>
           <a:xfrm>
-            <a:off x="548640" y="1325880"/>
-            <a:ext cx="7315200" cy="4114800"/>
+            <a:off x="1188720" y="1874520"/>
+            <a:ext cx="6675120" cy="3754755"/>
           </a:xfrm>
           <a:prstGeom prst="rect">
             <a:avLst/>
@@ -8147,13 +9063,13 @@
       </p:pic>
       <p:sp>
         <p:nvSpPr>
-          <p:cNvPr id="5" name="num-1"/>
+          <p:cNvPr id="9" name="num-1"/>
           <p:cNvSpPr/>
           <p:nvPr/>
         </p:nvSpPr>
         <p:spPr>
           <a:xfrm>
-            <a:off x="11219688" y="1316736"/>
+            <a:off x="11219688" y="1865376"/>
             <a:ext cx="420624" cy="420624"/>
           </a:xfrm>
           <a:prstGeom prst="ellipse">
@@ -8172,13 +9088,13 @@
       </p:sp>
       <p:sp>
         <p:nvSpPr>
-          <p:cNvPr id="6" name="Text 3"/>
-          <p:cNvSpPr txBox="1"/>
-          <p:nvPr/>
-        </p:nvSpPr>
-        <p:spPr>
-          <a:xfrm>
-            <a:off x="11219688" y="1316736"/>
+          <p:cNvPr id="10" name="Text 7"/>
+          <p:cNvSpPr txBox="1"/>
+          <p:nvPr/>
+        </p:nvSpPr>
+        <p:spPr>
+          <a:xfrm>
+            <a:off x="11219688" y="1865376"/>
             <a:ext cx="420624" cy="420624"/>
           </a:xfrm>
           <a:prstGeom prst="rect">
@@ -8211,13 +9127,13 @@
       </p:sp>
       <p:sp>
         <p:nvSpPr>
-          <p:cNvPr id="7" name="Text 4"/>
-          <p:cNvSpPr txBox="1"/>
-          <p:nvPr/>
-        </p:nvSpPr>
-        <p:spPr>
-          <a:xfrm>
-            <a:off x="8183880" y="1298448"/>
+          <p:cNvPr id="11" name="Text 8"/>
+          <p:cNvSpPr txBox="1"/>
+          <p:nvPr/>
+        </p:nvSpPr>
+        <p:spPr>
+          <a:xfrm>
+            <a:off x="8183880" y="1847088"/>
             <a:ext cx="2889504" cy="384048"/>
           </a:xfrm>
           <a:prstGeom prst="rect">
@@ -8249,13 +9165,13 @@
       </p:sp>
       <p:sp>
         <p:nvSpPr>
-          <p:cNvPr id="8" name="Text 5"/>
-          <p:cNvSpPr txBox="1"/>
-          <p:nvPr/>
-        </p:nvSpPr>
-        <p:spPr>
-          <a:xfrm>
-            <a:off x="8183880" y="1682496"/>
+          <p:cNvPr id="12" name="Text 9"/>
+          <p:cNvSpPr txBox="1"/>
+          <p:nvPr/>
+        </p:nvSpPr>
+        <p:spPr>
+          <a:xfrm>
+            <a:off x="8183880" y="2231136"/>
             <a:ext cx="2889504" cy="758952"/>
           </a:xfrm>
           <a:prstGeom prst="rect">
@@ -8287,13 +9203,13 @@
       </p:sp>
       <p:sp>
         <p:nvSpPr>
-          <p:cNvPr id="9" name="num-2"/>
+          <p:cNvPr id="13" name="num-2"/>
           <p:cNvSpPr/>
           <p:nvPr/>
         </p:nvSpPr>
         <p:spPr>
           <a:xfrm>
-            <a:off x="11219688" y="2459736"/>
+            <a:off x="11219688" y="3008376"/>
             <a:ext cx="420624" cy="420624"/>
           </a:xfrm>
           <a:prstGeom prst="ellipse">
@@ -8312,13 +9228,13 @@
       </p:sp>
       <p:sp>
         <p:nvSpPr>
-          <p:cNvPr id="10" name="Text 7"/>
-          <p:cNvSpPr txBox="1"/>
-          <p:nvPr/>
-        </p:nvSpPr>
-        <p:spPr>
-          <a:xfrm>
-            <a:off x="11219688" y="2459736"/>
+          <p:cNvPr id="14" name="Text 11"/>
+          <p:cNvSpPr txBox="1"/>
+          <p:nvPr/>
+        </p:nvSpPr>
+        <p:spPr>
+          <a:xfrm>
+            <a:off x="11219688" y="3008376"/>
             <a:ext cx="420624" cy="420624"/>
           </a:xfrm>
           <a:prstGeom prst="rect">
@@ -8351,13 +9267,13 @@
       </p:sp>
       <p:sp>
         <p:nvSpPr>
-          <p:cNvPr id="11" name="Text 8"/>
-          <p:cNvSpPr txBox="1"/>
-          <p:nvPr/>
-        </p:nvSpPr>
-        <p:spPr>
-          <a:xfrm>
-            <a:off x="8183880" y="2441448"/>
+          <p:cNvPr id="15" name="Text 12"/>
+          <p:cNvSpPr txBox="1"/>
+          <p:nvPr/>
+        </p:nvSpPr>
+        <p:spPr>
+          <a:xfrm>
+            <a:off x="8183880" y="2990088"/>
             <a:ext cx="2889504" cy="384048"/>
           </a:xfrm>
           <a:prstGeom prst="rect">
@@ -8389,13 +9305,13 @@
       </p:sp>
       <p:sp>
         <p:nvSpPr>
-          <p:cNvPr id="12" name="Text 9"/>
-          <p:cNvSpPr txBox="1"/>
-          <p:nvPr/>
-        </p:nvSpPr>
-        <p:spPr>
-          <a:xfrm>
-            <a:off x="8183880" y="2825496"/>
+          <p:cNvPr id="16" name="Text 13"/>
+          <p:cNvSpPr txBox="1"/>
+          <p:nvPr/>
+        </p:nvSpPr>
+        <p:spPr>
+          <a:xfrm>
+            <a:off x="8183880" y="3374136"/>
             <a:ext cx="2889504" cy="758952"/>
           </a:xfrm>
           <a:prstGeom prst="rect">
@@ -8427,13 +9343,13 @@
       </p:sp>
       <p:sp>
         <p:nvSpPr>
-          <p:cNvPr id="13" name="num-3"/>
+          <p:cNvPr id="17" name="num-3"/>
           <p:cNvSpPr/>
           <p:nvPr/>
         </p:nvSpPr>
         <p:spPr>
           <a:xfrm>
-            <a:off x="11219688" y="3602736"/>
+            <a:off x="11219688" y="4151376"/>
             <a:ext cx="420624" cy="420624"/>
           </a:xfrm>
           <a:prstGeom prst="ellipse">
@@ -8452,13 +9368,13 @@
       </p:sp>
       <p:sp>
         <p:nvSpPr>
-          <p:cNvPr id="14" name="Text 11"/>
-          <p:cNvSpPr txBox="1"/>
-          <p:nvPr/>
-        </p:nvSpPr>
-        <p:spPr>
-          <a:xfrm>
-            <a:off x="11219688" y="3602736"/>
+          <p:cNvPr id="18" name="Text 15"/>
+          <p:cNvSpPr txBox="1"/>
+          <p:nvPr/>
+        </p:nvSpPr>
+        <p:spPr>
+          <a:xfrm>
+            <a:off x="11219688" y="4151376"/>
             <a:ext cx="420624" cy="420624"/>
           </a:xfrm>
           <a:prstGeom prst="rect">
@@ -8491,13 +9407,13 @@
       </p:sp>
       <p:sp>
         <p:nvSpPr>
-          <p:cNvPr id="15" name="Text 12"/>
-          <p:cNvSpPr txBox="1"/>
-          <p:nvPr/>
-        </p:nvSpPr>
-        <p:spPr>
-          <a:xfrm>
-            <a:off x="8183880" y="3584448"/>
+          <p:cNvPr id="19" name="Text 16"/>
+          <p:cNvSpPr txBox="1"/>
+          <p:nvPr/>
+        </p:nvSpPr>
+        <p:spPr>
+          <a:xfrm>
+            <a:off x="8183880" y="4133088"/>
             <a:ext cx="2889504" cy="384048"/>
           </a:xfrm>
           <a:prstGeom prst="rect">
@@ -8529,13 +9445,13 @@
       </p:sp>
       <p:sp>
         <p:nvSpPr>
-          <p:cNvPr id="16" name="Text 13"/>
-          <p:cNvSpPr txBox="1"/>
-          <p:nvPr/>
-        </p:nvSpPr>
-        <p:spPr>
-          <a:xfrm>
-            <a:off x="8183880" y="3968496"/>
+          <p:cNvPr id="20" name="Text 17"/>
+          <p:cNvSpPr txBox="1"/>
+          <p:nvPr/>
+        </p:nvSpPr>
+        <p:spPr>
+          <a:xfrm>
+            <a:off x="8183880" y="4517136"/>
             <a:ext cx="2889504" cy="758952"/>
           </a:xfrm>
           <a:prstGeom prst="rect">
@@ -8683,18 +9599,146 @@
       </p:sp>
       <p:sp>
         <p:nvSpPr>
-          <p:cNvPr id="3" name="screen-frame"/>
+          <p:cNvPr id="3" name="role-band"/>
           <p:cNvSpPr/>
           <p:nvPr/>
         </p:nvSpPr>
         <p:spPr>
           <a:xfrm>
-            <a:off x="493776" y="1271016"/>
-            <a:ext cx="7424928" cy="4224528"/>
+            <a:off x="548640" y="1161288"/>
+            <a:ext cx="11091672" cy="530352"/>
           </a:xfrm>
           <a:prstGeom prst="roundRect">
             <a:avLst>
-              <a:gd name="adj" fmla="val 1732"/>
+              <a:gd name="adj" fmla="val 13793"/>
+            </a:avLst>
+          </a:prstGeom>
+          <a:solidFill>
+            <a:srgbClr val="EAF2FA"/>
+          </a:solidFill>
+          <a:ln w="12700">
+            <a:solidFill>
+              <a:srgbClr val="EAF2FA"/>
+            </a:solidFill>
+            <a:prstDash val="solid"/>
+          </a:ln>
+        </p:spPr>
+      </p:sp>
+      <p:sp>
+        <p:nvSpPr>
+          <p:cNvPr id="4" name="Shape 2"/>
+          <p:cNvSpPr/>
+          <p:nvPr/>
+        </p:nvSpPr>
+        <p:spPr>
+          <a:xfrm>
+            <a:off x="11548872" y="1161288"/>
+            <a:ext cx="91440" cy="530352"/>
+          </a:xfrm>
+          <a:prstGeom prst="rect">
+            <a:avLst/>
+          </a:prstGeom>
+          <a:solidFill>
+            <a:srgbClr val="B8860B"/>
+          </a:solidFill>
+          <a:ln w="12700">
+            <a:solidFill>
+              <a:srgbClr val="B8860B"/>
+            </a:solidFill>
+            <a:prstDash val="solid"/>
+          </a:ln>
+        </p:spPr>
+      </p:sp>
+      <p:sp>
+        <p:nvSpPr>
+          <p:cNvPr id="5" name="Text 3"/>
+          <p:cNvSpPr txBox="1"/>
+          <p:nvPr/>
+        </p:nvSpPr>
+        <p:spPr>
+          <a:xfrm>
+            <a:off x="10515600" y="1161288"/>
+            <a:ext cx="914400" cy="530352"/>
+          </a:xfrm>
+          <a:prstGeom prst="rect">
+            <a:avLst/>
+          </a:prstGeom>
+          <a:noFill/>
+          <a:ln/>
+        </p:spPr>
+        <p:txBody>
+          <a:bodyPr wrap="square" lIns="0" tIns="0" rIns="0" bIns="0" rtlCol="0" anchor="ctr"/>
+          <a:lstStyle/>
+          <a:p>
+            <a:pPr rtl="1" algn="r" indent="0" marL="0">
+              <a:buNone/>
+            </a:pPr>
+            <a:r>
+              <a:rPr lang="ar-AE" altLang="en-US" sz="1500" b="1" dirty="0">
+                <a:solidFill>
+                  <a:srgbClr val="B8860B"/>
+                </a:solidFill>
+                <a:latin typeface="Noto Naskh Arabic"/>
+                <a:cs typeface="adwa-assalaf"/>
+              </a:rPr>
+              <a:t>دور الشاشة:</a:t>
+            </a:r>
+            <a:endParaRPr lang="ar-AE" sz="1500" dirty="0"/>
+          </a:p>
+        </p:txBody>
+      </p:sp>
+      <p:sp>
+        <p:nvSpPr>
+          <p:cNvPr id="6" name="Text 4"/>
+          <p:cNvSpPr txBox="1"/>
+          <p:nvPr/>
+        </p:nvSpPr>
+        <p:spPr>
+          <a:xfrm>
+            <a:off x="731520" y="1161288"/>
+            <a:ext cx="9857232" cy="530352"/>
+          </a:xfrm>
+          <a:prstGeom prst="rect">
+            <a:avLst/>
+          </a:prstGeom>
+          <a:noFill/>
+          <a:ln/>
+        </p:spPr>
+        <p:txBody>
+          <a:bodyPr wrap="square" lIns="0" tIns="0" rIns="0" bIns="0" rtlCol="0" anchor="ctr"/>
+          <a:lstStyle/>
+          <a:p>
+            <a:pPr rtl="1" algn="r" indent="0" marL="0">
+              <a:buNone/>
+            </a:pPr>
+            <a:r>
+              <a:rPr lang="ar-AE" altLang="en-US" sz="1500" dirty="0">
+                <a:solidFill>
+                  <a:srgbClr val="12263F"/>
+                </a:solidFill>
+                <a:latin typeface="Noto Naskh Arabic"/>
+                <a:cs typeface="adwa-assalaf"/>
+              </a:rPr>
+              <a:t>تحرير المخطط: عنوان وموجز وطول لكل وحدة، والاعتماد في آخره</a:t>
+            </a:r>
+            <a:endParaRPr lang="ar-AE" sz="1500" dirty="0"/>
+          </a:p>
+        </p:txBody>
+      </p:sp>
+      <p:sp>
+        <p:nvSpPr>
+          <p:cNvPr id="7" name="screen-frame"/>
+          <p:cNvSpPr/>
+          <p:nvPr/>
+        </p:nvSpPr>
+        <p:spPr>
+          <a:xfrm>
+            <a:off x="1133856" y="1819656"/>
+            <a:ext cx="6784848" cy="3864483"/>
+          </a:xfrm>
+          <a:prstGeom prst="roundRect">
+            <a:avLst>
+              <a:gd name="adj" fmla="val 1893"/>
             </a:avLst>
           </a:prstGeom>
           <a:solidFill>
@@ -8717,7 +9761,7 @@
       </p:sp>
       <p:pic>
         <p:nvPicPr>
-          <p:cNvPr id="4" name="screenshot" descr="/tmp/claude-0/-home-user/11b98046-3116-585b-b221-e5c2e170e62a/scratchpad/deck/bshots/05b_outline.jpg">    </p:cNvPr>
+          <p:cNvPr id="8" name="screenshot" descr="/tmp/claude-0/-home-user/11b98046-3116-585b-b221-e5c2e170e62a/scratchpad/deck/bshots/05b_outline.jpg">    </p:cNvPr>
           <p:cNvPicPr>
             <a:picLocks noChangeAspect="1"/>
           </p:cNvPicPr>
@@ -8731,8 +9775,8 @@
         </p:blipFill>
         <p:spPr>
           <a:xfrm>
-            <a:off x="548640" y="1325880"/>
-            <a:ext cx="7315200" cy="4114800"/>
+            <a:off x="1188720" y="1874520"/>
+            <a:ext cx="6675120" cy="3754755"/>
           </a:xfrm>
           <a:prstGeom prst="rect">
             <a:avLst/>
@@ -8741,13 +9785,13 @@
       </p:pic>
       <p:sp>
         <p:nvSpPr>
-          <p:cNvPr id="5" name="num-1"/>
+          <p:cNvPr id="9" name="num-1"/>
           <p:cNvSpPr/>
           <p:nvPr/>
         </p:nvSpPr>
         <p:spPr>
           <a:xfrm>
-            <a:off x="11219688" y="1316736"/>
+            <a:off x="11219688" y="1865376"/>
             <a:ext cx="420624" cy="420624"/>
           </a:xfrm>
           <a:prstGeom prst="ellipse">
@@ -8766,13 +9810,13 @@
       </p:sp>
       <p:sp>
         <p:nvSpPr>
-          <p:cNvPr id="6" name="Text 3"/>
-          <p:cNvSpPr txBox="1"/>
-          <p:nvPr/>
-        </p:nvSpPr>
-        <p:spPr>
-          <a:xfrm>
-            <a:off x="11219688" y="1316736"/>
+          <p:cNvPr id="10" name="Text 7"/>
+          <p:cNvSpPr txBox="1"/>
+          <p:nvPr/>
+        </p:nvSpPr>
+        <p:spPr>
+          <a:xfrm>
+            <a:off x="11219688" y="1865376"/>
             <a:ext cx="420624" cy="420624"/>
           </a:xfrm>
           <a:prstGeom prst="rect">
@@ -8805,13 +9849,13 @@
       </p:sp>
       <p:sp>
         <p:nvSpPr>
-          <p:cNvPr id="7" name="Text 4"/>
-          <p:cNvSpPr txBox="1"/>
-          <p:nvPr/>
-        </p:nvSpPr>
-        <p:spPr>
-          <a:xfrm>
-            <a:off x="8183880" y="1298448"/>
+          <p:cNvPr id="11" name="Text 8"/>
+          <p:cNvSpPr txBox="1"/>
+          <p:nvPr/>
+        </p:nvSpPr>
+        <p:spPr>
+          <a:xfrm>
+            <a:off x="8183880" y="1847088"/>
             <a:ext cx="2889504" cy="384048"/>
           </a:xfrm>
           <a:prstGeom prst="rect">
@@ -8843,13 +9887,13 @@
       </p:sp>
       <p:sp>
         <p:nvSpPr>
-          <p:cNvPr id="8" name="Text 5"/>
-          <p:cNvSpPr txBox="1"/>
-          <p:nvPr/>
-        </p:nvSpPr>
-        <p:spPr>
-          <a:xfrm>
-            <a:off x="8183880" y="1682496"/>
+          <p:cNvPr id="12" name="Text 9"/>
+          <p:cNvSpPr txBox="1"/>
+          <p:nvPr/>
+        </p:nvSpPr>
+        <p:spPr>
+          <a:xfrm>
+            <a:off x="8183880" y="2231136"/>
             <a:ext cx="2889504" cy="758952"/>
           </a:xfrm>
           <a:prstGeom prst="rect">
@@ -8881,13 +9925,13 @@
       </p:sp>
       <p:sp>
         <p:nvSpPr>
-          <p:cNvPr id="9" name="num-2"/>
+          <p:cNvPr id="13" name="num-2"/>
           <p:cNvSpPr/>
           <p:nvPr/>
         </p:nvSpPr>
         <p:spPr>
           <a:xfrm>
-            <a:off x="11219688" y="2459736"/>
+            <a:off x="11219688" y="3008376"/>
             <a:ext cx="420624" cy="420624"/>
           </a:xfrm>
           <a:prstGeom prst="ellipse">
@@ -8906,13 +9950,13 @@
       </p:sp>
       <p:sp>
         <p:nvSpPr>
-          <p:cNvPr id="10" name="Text 7"/>
-          <p:cNvSpPr txBox="1"/>
-          <p:nvPr/>
-        </p:nvSpPr>
-        <p:spPr>
-          <a:xfrm>
-            <a:off x="11219688" y="2459736"/>
+          <p:cNvPr id="14" name="Text 11"/>
+          <p:cNvSpPr txBox="1"/>
+          <p:nvPr/>
+        </p:nvSpPr>
+        <p:spPr>
+          <a:xfrm>
+            <a:off x="11219688" y="3008376"/>
             <a:ext cx="420624" cy="420624"/>
           </a:xfrm>
           <a:prstGeom prst="rect">
@@ -8945,13 +9989,13 @@
       </p:sp>
       <p:sp>
         <p:nvSpPr>
-          <p:cNvPr id="11" name="Text 8"/>
-          <p:cNvSpPr txBox="1"/>
-          <p:nvPr/>
-        </p:nvSpPr>
-        <p:spPr>
-          <a:xfrm>
-            <a:off x="8183880" y="2441448"/>
+          <p:cNvPr id="15" name="Text 12"/>
+          <p:cNvSpPr txBox="1"/>
+          <p:nvPr/>
+        </p:nvSpPr>
+        <p:spPr>
+          <a:xfrm>
+            <a:off x="8183880" y="2990088"/>
             <a:ext cx="2889504" cy="384048"/>
           </a:xfrm>
           <a:prstGeom prst="rect">
@@ -8983,13 +10027,13 @@
       </p:sp>
       <p:sp>
         <p:nvSpPr>
-          <p:cNvPr id="12" name="Text 9"/>
-          <p:cNvSpPr txBox="1"/>
-          <p:nvPr/>
-        </p:nvSpPr>
-        <p:spPr>
-          <a:xfrm>
-            <a:off x="8183880" y="2825496"/>
+          <p:cNvPr id="16" name="Text 13"/>
+          <p:cNvSpPr txBox="1"/>
+          <p:nvPr/>
+        </p:nvSpPr>
+        <p:spPr>
+          <a:xfrm>
+            <a:off x="8183880" y="3374136"/>
             <a:ext cx="2889504" cy="758952"/>
           </a:xfrm>
           <a:prstGeom prst="rect">
@@ -9021,13 +10065,13 @@
       </p:sp>
       <p:sp>
         <p:nvSpPr>
-          <p:cNvPr id="13" name="num-3"/>
+          <p:cNvPr id="17" name="num-3"/>
           <p:cNvSpPr/>
           <p:nvPr/>
         </p:nvSpPr>
         <p:spPr>
           <a:xfrm>
-            <a:off x="11219688" y="3602736"/>
+            <a:off x="11219688" y="4151376"/>
             <a:ext cx="420624" cy="420624"/>
           </a:xfrm>
           <a:prstGeom prst="ellipse">
@@ -9046,13 +10090,13 @@
       </p:sp>
       <p:sp>
         <p:nvSpPr>
-          <p:cNvPr id="14" name="Text 11"/>
-          <p:cNvSpPr txBox="1"/>
-          <p:nvPr/>
-        </p:nvSpPr>
-        <p:spPr>
-          <a:xfrm>
-            <a:off x="11219688" y="3602736"/>
+          <p:cNvPr id="18" name="Text 15"/>
+          <p:cNvSpPr txBox="1"/>
+          <p:nvPr/>
+        </p:nvSpPr>
+        <p:spPr>
+          <a:xfrm>
+            <a:off x="11219688" y="4151376"/>
             <a:ext cx="420624" cy="420624"/>
           </a:xfrm>
           <a:prstGeom prst="rect">
@@ -9085,13 +10129,13 @@
       </p:sp>
       <p:sp>
         <p:nvSpPr>
-          <p:cNvPr id="15" name="Text 12"/>
-          <p:cNvSpPr txBox="1"/>
-          <p:nvPr/>
-        </p:nvSpPr>
-        <p:spPr>
-          <a:xfrm>
-            <a:off x="8183880" y="3584448"/>
+          <p:cNvPr id="19" name="Text 16"/>
+          <p:cNvSpPr txBox="1"/>
+          <p:nvPr/>
+        </p:nvSpPr>
+        <p:spPr>
+          <a:xfrm>
+            <a:off x="8183880" y="4133088"/>
             <a:ext cx="2889504" cy="384048"/>
           </a:xfrm>
           <a:prstGeom prst="rect">
@@ -9123,13 +10167,13 @@
       </p:sp>
       <p:sp>
         <p:nvSpPr>
-          <p:cNvPr id="16" name="Text 13"/>
-          <p:cNvSpPr txBox="1"/>
-          <p:nvPr/>
-        </p:nvSpPr>
-        <p:spPr>
-          <a:xfrm>
-            <a:off x="8183880" y="3968496"/>
+          <p:cNvPr id="20" name="Text 17"/>
+          <p:cNvSpPr txBox="1"/>
+          <p:nvPr/>
+        </p:nvSpPr>
+        <p:spPr>
+          <a:xfrm>
+            <a:off x="8183880" y="4517136"/>
             <a:ext cx="2889504" cy="758952"/>
           </a:xfrm>
           <a:prstGeom prst="rect">
@@ -9277,18 +10321,146 @@
       </p:sp>
       <p:sp>
         <p:nvSpPr>
-          <p:cNvPr id="3" name="screen-frame"/>
+          <p:cNvPr id="3" name="role-band"/>
           <p:cNvSpPr/>
           <p:nvPr/>
         </p:nvSpPr>
         <p:spPr>
           <a:xfrm>
-            <a:off x="493776" y="1271016"/>
-            <a:ext cx="7424928" cy="4224528"/>
+            <a:off x="548640" y="1161288"/>
+            <a:ext cx="11091672" cy="530352"/>
           </a:xfrm>
           <a:prstGeom prst="roundRect">
             <a:avLst>
-              <a:gd name="adj" fmla="val 1732"/>
+              <a:gd name="adj" fmla="val 13793"/>
+            </a:avLst>
+          </a:prstGeom>
+          <a:solidFill>
+            <a:srgbClr val="EAF2FA"/>
+          </a:solidFill>
+          <a:ln w="12700">
+            <a:solidFill>
+              <a:srgbClr val="EAF2FA"/>
+            </a:solidFill>
+            <a:prstDash val="solid"/>
+          </a:ln>
+        </p:spPr>
+      </p:sp>
+      <p:sp>
+        <p:nvSpPr>
+          <p:cNvPr id="4" name="Shape 2"/>
+          <p:cNvSpPr/>
+          <p:nvPr/>
+        </p:nvSpPr>
+        <p:spPr>
+          <a:xfrm>
+            <a:off x="11548872" y="1161288"/>
+            <a:ext cx="91440" cy="530352"/>
+          </a:xfrm>
+          <a:prstGeom prst="rect">
+            <a:avLst/>
+          </a:prstGeom>
+          <a:solidFill>
+            <a:srgbClr val="B8860B"/>
+          </a:solidFill>
+          <a:ln w="12700">
+            <a:solidFill>
+              <a:srgbClr val="B8860B"/>
+            </a:solidFill>
+            <a:prstDash val="solid"/>
+          </a:ln>
+        </p:spPr>
+      </p:sp>
+      <p:sp>
+        <p:nvSpPr>
+          <p:cNvPr id="5" name="Text 3"/>
+          <p:cNvSpPr txBox="1"/>
+          <p:nvPr/>
+        </p:nvSpPr>
+        <p:spPr>
+          <a:xfrm>
+            <a:off x="10515600" y="1161288"/>
+            <a:ext cx="914400" cy="530352"/>
+          </a:xfrm>
+          <a:prstGeom prst="rect">
+            <a:avLst/>
+          </a:prstGeom>
+          <a:noFill/>
+          <a:ln/>
+        </p:spPr>
+        <p:txBody>
+          <a:bodyPr wrap="square" lIns="0" tIns="0" rIns="0" bIns="0" rtlCol="0" anchor="ctr"/>
+          <a:lstStyle/>
+          <a:p>
+            <a:pPr rtl="1" algn="r" indent="0" marL="0">
+              <a:buNone/>
+            </a:pPr>
+            <a:r>
+              <a:rPr lang="ar-AE" altLang="en-US" sz="1500" b="1" dirty="0">
+                <a:solidFill>
+                  <a:srgbClr val="B8860B"/>
+                </a:solidFill>
+                <a:latin typeface="Noto Naskh Arabic"/>
+                <a:cs typeface="adwa-assalaf"/>
+              </a:rPr>
+              <a:t>دور الشاشة:</a:t>
+            </a:r>
+            <a:endParaRPr lang="ar-AE" sz="1500" dirty="0"/>
+          </a:p>
+        </p:txBody>
+      </p:sp>
+      <p:sp>
+        <p:nvSpPr>
+          <p:cNvPr id="6" name="Text 4"/>
+          <p:cNvSpPr txBox="1"/>
+          <p:nvPr/>
+        </p:nvSpPr>
+        <p:spPr>
+          <a:xfrm>
+            <a:off x="731520" y="1161288"/>
+            <a:ext cx="9857232" cy="530352"/>
+          </a:xfrm>
+          <a:prstGeom prst="rect">
+            <a:avLst/>
+          </a:prstGeom>
+          <a:noFill/>
+          <a:ln/>
+        </p:spPr>
+        <p:txBody>
+          <a:bodyPr wrap="square" lIns="0" tIns="0" rIns="0" bIns="0" rtlCol="0" anchor="ctr"/>
+          <a:lstStyle/>
+          <a:p>
+            <a:pPr rtl="1" algn="r" indent="0" marL="0">
+              <a:buNone/>
+            </a:pPr>
+            <a:r>
+              <a:rPr lang="ar-AE" altLang="en-US" sz="1500" dirty="0">
+                <a:solidFill>
+                  <a:srgbClr val="12263F"/>
+                </a:solidFill>
+                <a:latin typeface="Noto Naskh Arabic"/>
+                <a:cs typeface="adwa-assalaf"/>
+              </a:rPr>
+              <a:t>دليل الوكلاء التسعة والثلاثين: لكل وكيل بطاقة، ومنها يُفتح ويُكلَّف</a:t>
+            </a:r>
+            <a:endParaRPr lang="ar-AE" sz="1500" dirty="0"/>
+          </a:p>
+        </p:txBody>
+      </p:sp>
+      <p:sp>
+        <p:nvSpPr>
+          <p:cNvPr id="7" name="screen-frame"/>
+          <p:cNvSpPr/>
+          <p:nvPr/>
+        </p:nvSpPr>
+        <p:spPr>
+          <a:xfrm>
+            <a:off x="1133856" y="1819656"/>
+            <a:ext cx="6784848" cy="3864483"/>
+          </a:xfrm>
+          <a:prstGeom prst="roundRect">
+            <a:avLst>
+              <a:gd name="adj" fmla="val 1893"/>
             </a:avLst>
           </a:prstGeom>
           <a:solidFill>
@@ -9311,7 +10483,7 @@
       </p:sp>
       <p:pic>
         <p:nvPicPr>
-          <p:cNvPr id="4" name="screenshot" descr="/tmp/claude-0/-home-user/11b98046-3116-585b-b221-e5c2e170e62a/scratchpad/deck/bshots/07_agents.jpg">    </p:cNvPr>
+          <p:cNvPr id="8" name="screenshot" descr="/tmp/claude-0/-home-user/11b98046-3116-585b-b221-e5c2e170e62a/scratchpad/deck/bshots/07_agents.jpg">    </p:cNvPr>
           <p:cNvPicPr>
             <a:picLocks noChangeAspect="1"/>
           </p:cNvPicPr>
@@ -9325,8 +10497,8 @@
         </p:blipFill>
         <p:spPr>
           <a:xfrm>
-            <a:off x="548640" y="1325880"/>
-            <a:ext cx="7315200" cy="4114800"/>
+            <a:off x="1188720" y="1874520"/>
+            <a:ext cx="6675120" cy="3754755"/>
           </a:xfrm>
           <a:prstGeom prst="rect">
             <a:avLst/>
@@ -9335,13 +10507,13 @@
       </p:pic>
       <p:sp>
         <p:nvSpPr>
-          <p:cNvPr id="5" name="num-1"/>
+          <p:cNvPr id="9" name="num-1"/>
           <p:cNvSpPr/>
           <p:nvPr/>
         </p:nvSpPr>
         <p:spPr>
           <a:xfrm>
-            <a:off x="11219688" y="1316736"/>
+            <a:off x="11219688" y="1865376"/>
             <a:ext cx="420624" cy="420624"/>
           </a:xfrm>
           <a:prstGeom prst="ellipse">
@@ -9360,13 +10532,13 @@
       </p:sp>
       <p:sp>
         <p:nvSpPr>
-          <p:cNvPr id="6" name="Text 3"/>
-          <p:cNvSpPr txBox="1"/>
-          <p:nvPr/>
-        </p:nvSpPr>
-        <p:spPr>
-          <a:xfrm>
-            <a:off x="11219688" y="1316736"/>
+          <p:cNvPr id="10" name="Text 7"/>
+          <p:cNvSpPr txBox="1"/>
+          <p:nvPr/>
+        </p:nvSpPr>
+        <p:spPr>
+          <a:xfrm>
+            <a:off x="11219688" y="1865376"/>
             <a:ext cx="420624" cy="420624"/>
           </a:xfrm>
           <a:prstGeom prst="rect">
@@ -9399,13 +10571,13 @@
       </p:sp>
       <p:sp>
         <p:nvSpPr>
-          <p:cNvPr id="7" name="Text 4"/>
-          <p:cNvSpPr txBox="1"/>
-          <p:nvPr/>
-        </p:nvSpPr>
-        <p:spPr>
-          <a:xfrm>
-            <a:off x="8183880" y="1298448"/>
+          <p:cNvPr id="11" name="Text 8"/>
+          <p:cNvSpPr txBox="1"/>
+          <p:nvPr/>
+        </p:nvSpPr>
+        <p:spPr>
+          <a:xfrm>
+            <a:off x="8183880" y="1847088"/>
             <a:ext cx="2889504" cy="384048"/>
           </a:xfrm>
           <a:prstGeom prst="rect">
@@ -9447,13 +10619,13 @@
       </p:sp>
       <p:sp>
         <p:nvSpPr>
-          <p:cNvPr id="8" name="Text 5"/>
-          <p:cNvSpPr txBox="1"/>
-          <p:nvPr/>
-        </p:nvSpPr>
-        <p:spPr>
-          <a:xfrm>
-            <a:off x="8183880" y="1682496"/>
+          <p:cNvPr id="12" name="Text 9"/>
+          <p:cNvSpPr txBox="1"/>
+          <p:nvPr/>
+        </p:nvSpPr>
+        <p:spPr>
+          <a:xfrm>
+            <a:off x="8183880" y="2231136"/>
             <a:ext cx="2889504" cy="758952"/>
           </a:xfrm>
           <a:prstGeom prst="rect">
@@ -9485,13 +10657,13 @@
       </p:sp>
       <p:sp>
         <p:nvSpPr>
-          <p:cNvPr id="9" name="num-2"/>
+          <p:cNvPr id="13" name="num-2"/>
           <p:cNvSpPr/>
           <p:nvPr/>
         </p:nvSpPr>
         <p:spPr>
           <a:xfrm>
-            <a:off x="11219688" y="2459736"/>
+            <a:off x="11219688" y="3008376"/>
             <a:ext cx="420624" cy="420624"/>
           </a:xfrm>
           <a:prstGeom prst="ellipse">
@@ -9510,13 +10682,13 @@
       </p:sp>
       <p:sp>
         <p:nvSpPr>
-          <p:cNvPr id="10" name="Text 7"/>
-          <p:cNvSpPr txBox="1"/>
-          <p:nvPr/>
-        </p:nvSpPr>
-        <p:spPr>
-          <a:xfrm>
-            <a:off x="11219688" y="2459736"/>
+          <p:cNvPr id="14" name="Text 11"/>
+          <p:cNvSpPr txBox="1"/>
+          <p:nvPr/>
+        </p:nvSpPr>
+        <p:spPr>
+          <a:xfrm>
+            <a:off x="11219688" y="3008376"/>
             <a:ext cx="420624" cy="420624"/>
           </a:xfrm>
           <a:prstGeom prst="rect">
@@ -9549,13 +10721,13 @@
       </p:sp>
       <p:sp>
         <p:nvSpPr>
-          <p:cNvPr id="11" name="Text 8"/>
-          <p:cNvSpPr txBox="1"/>
-          <p:nvPr/>
-        </p:nvSpPr>
-        <p:spPr>
-          <a:xfrm>
-            <a:off x="8183880" y="2441448"/>
+          <p:cNvPr id="15" name="Text 12"/>
+          <p:cNvSpPr txBox="1"/>
+          <p:nvPr/>
+        </p:nvSpPr>
+        <p:spPr>
+          <a:xfrm>
+            <a:off x="8183880" y="2990088"/>
             <a:ext cx="2889504" cy="384048"/>
           </a:xfrm>
           <a:prstGeom prst="rect">
@@ -9587,13 +10759,13 @@
       </p:sp>
       <p:sp>
         <p:nvSpPr>
-          <p:cNvPr id="12" name="Text 9"/>
-          <p:cNvSpPr txBox="1"/>
-          <p:nvPr/>
-        </p:nvSpPr>
-        <p:spPr>
-          <a:xfrm>
-            <a:off x="8183880" y="2825496"/>
+          <p:cNvPr id="16" name="Text 13"/>
+          <p:cNvSpPr txBox="1"/>
+          <p:nvPr/>
+        </p:nvSpPr>
+        <p:spPr>
+          <a:xfrm>
+            <a:off x="8183880" y="3374136"/>
             <a:ext cx="2889504" cy="758952"/>
           </a:xfrm>
           <a:prstGeom prst="rect">
@@ -9645,13 +10817,13 @@
       </p:sp>
       <p:sp>
         <p:nvSpPr>
-          <p:cNvPr id="13" name="num-3"/>
+          <p:cNvPr id="17" name="num-3"/>
           <p:cNvSpPr/>
           <p:nvPr/>
         </p:nvSpPr>
         <p:spPr>
           <a:xfrm>
-            <a:off x="11219688" y="3602736"/>
+            <a:off x="11219688" y="4151376"/>
             <a:ext cx="420624" cy="420624"/>
           </a:xfrm>
           <a:prstGeom prst="ellipse">
@@ -9670,13 +10842,13 @@
       </p:sp>
       <p:sp>
         <p:nvSpPr>
-          <p:cNvPr id="14" name="Text 11"/>
-          <p:cNvSpPr txBox="1"/>
-          <p:nvPr/>
-        </p:nvSpPr>
-        <p:spPr>
-          <a:xfrm>
-            <a:off x="11219688" y="3602736"/>
+          <p:cNvPr id="18" name="Text 15"/>
+          <p:cNvSpPr txBox="1"/>
+          <p:nvPr/>
+        </p:nvSpPr>
+        <p:spPr>
+          <a:xfrm>
+            <a:off x="11219688" y="4151376"/>
             <a:ext cx="420624" cy="420624"/>
           </a:xfrm>
           <a:prstGeom prst="rect">
@@ -9709,13 +10881,13 @@
       </p:sp>
       <p:sp>
         <p:nvSpPr>
-          <p:cNvPr id="15" name="Text 12"/>
-          <p:cNvSpPr txBox="1"/>
-          <p:nvPr/>
-        </p:nvSpPr>
-        <p:spPr>
-          <a:xfrm>
-            <a:off x="8183880" y="3584448"/>
+          <p:cNvPr id="19" name="Text 16"/>
+          <p:cNvSpPr txBox="1"/>
+          <p:nvPr/>
+        </p:nvSpPr>
+        <p:spPr>
+          <a:xfrm>
+            <a:off x="8183880" y="4133088"/>
             <a:ext cx="2889504" cy="384048"/>
           </a:xfrm>
           <a:prstGeom prst="rect">
@@ -9747,13 +10919,13 @@
       </p:sp>
       <p:sp>
         <p:nvSpPr>
-          <p:cNvPr id="16" name="Text 13"/>
-          <p:cNvSpPr txBox="1"/>
-          <p:nvPr/>
-        </p:nvSpPr>
-        <p:spPr>
-          <a:xfrm>
-            <a:off x="8183880" y="3968496"/>
+          <p:cNvPr id="20" name="Text 17"/>
+          <p:cNvSpPr txBox="1"/>
+          <p:nvPr/>
+        </p:nvSpPr>
+        <p:spPr>
+          <a:xfrm>
+            <a:off x="8183880" y="4517136"/>
             <a:ext cx="2889504" cy="758952"/>
           </a:xfrm>
           <a:prstGeom prst="rect">
@@ -9901,18 +11073,146 @@
       </p:sp>
       <p:sp>
         <p:nvSpPr>
-          <p:cNvPr id="3" name="screen-frame"/>
+          <p:cNvPr id="3" name="role-band"/>
           <p:cNvSpPr/>
           <p:nvPr/>
         </p:nvSpPr>
         <p:spPr>
           <a:xfrm>
-            <a:off x="493776" y="1271016"/>
-            <a:ext cx="7424928" cy="4224528"/>
+            <a:off x="548640" y="1161288"/>
+            <a:ext cx="11091672" cy="530352"/>
           </a:xfrm>
           <a:prstGeom prst="roundRect">
             <a:avLst>
-              <a:gd name="adj" fmla="val 1732"/>
+              <a:gd name="adj" fmla="val 13793"/>
+            </a:avLst>
+          </a:prstGeom>
+          <a:solidFill>
+            <a:srgbClr val="EAF2FA"/>
+          </a:solidFill>
+          <a:ln w="12700">
+            <a:solidFill>
+              <a:srgbClr val="EAF2FA"/>
+            </a:solidFill>
+            <a:prstDash val="solid"/>
+          </a:ln>
+        </p:spPr>
+      </p:sp>
+      <p:sp>
+        <p:nvSpPr>
+          <p:cNvPr id="4" name="Shape 2"/>
+          <p:cNvSpPr/>
+          <p:nvPr/>
+        </p:nvSpPr>
+        <p:spPr>
+          <a:xfrm>
+            <a:off x="11548872" y="1161288"/>
+            <a:ext cx="91440" cy="530352"/>
+          </a:xfrm>
+          <a:prstGeom prst="rect">
+            <a:avLst/>
+          </a:prstGeom>
+          <a:solidFill>
+            <a:srgbClr val="B8860B"/>
+          </a:solidFill>
+          <a:ln w="12700">
+            <a:solidFill>
+              <a:srgbClr val="B8860B"/>
+            </a:solidFill>
+            <a:prstDash val="solid"/>
+          </a:ln>
+        </p:spPr>
+      </p:sp>
+      <p:sp>
+        <p:nvSpPr>
+          <p:cNvPr id="5" name="Text 3"/>
+          <p:cNvSpPr txBox="1"/>
+          <p:nvPr/>
+        </p:nvSpPr>
+        <p:spPr>
+          <a:xfrm>
+            <a:off x="10515600" y="1161288"/>
+            <a:ext cx="914400" cy="530352"/>
+          </a:xfrm>
+          <a:prstGeom prst="rect">
+            <a:avLst/>
+          </a:prstGeom>
+          <a:noFill/>
+          <a:ln/>
+        </p:spPr>
+        <p:txBody>
+          <a:bodyPr wrap="square" lIns="0" tIns="0" rIns="0" bIns="0" rtlCol="0" anchor="ctr"/>
+          <a:lstStyle/>
+          <a:p>
+            <a:pPr rtl="1" algn="r" indent="0" marL="0">
+              <a:buNone/>
+            </a:pPr>
+            <a:r>
+              <a:rPr lang="ar-AE" altLang="en-US" sz="1500" b="1" dirty="0">
+                <a:solidFill>
+                  <a:srgbClr val="B8860B"/>
+                </a:solidFill>
+                <a:latin typeface="Noto Naskh Arabic"/>
+                <a:cs typeface="adwa-assalaf"/>
+              </a:rPr>
+              <a:t>دور الشاشة:</a:t>
+            </a:r>
+            <a:endParaRPr lang="ar-AE" sz="1500" dirty="0"/>
+          </a:p>
+        </p:txBody>
+      </p:sp>
+      <p:sp>
+        <p:nvSpPr>
+          <p:cNvPr id="6" name="Text 4"/>
+          <p:cNvSpPr txBox="1"/>
+          <p:nvPr/>
+        </p:nvSpPr>
+        <p:spPr>
+          <a:xfrm>
+            <a:off x="731520" y="1161288"/>
+            <a:ext cx="9857232" cy="530352"/>
+          </a:xfrm>
+          <a:prstGeom prst="rect">
+            <a:avLst/>
+          </a:prstGeom>
+          <a:noFill/>
+          <a:ln/>
+        </p:spPr>
+        <p:txBody>
+          <a:bodyPr wrap="square" lIns="0" tIns="0" rIns="0" bIns="0" rtlCol="0" anchor="ctr"/>
+          <a:lstStyle/>
+          <a:p>
+            <a:pPr rtl="1" algn="r" indent="0" marL="0">
+              <a:buNone/>
+            </a:pPr>
+            <a:r>
+              <a:rPr lang="ar-AE" altLang="en-US" sz="1500" dirty="0">
+                <a:solidFill>
+                  <a:srgbClr val="12263F"/>
+                </a:solidFill>
+                <a:latin typeface="Noto Naskh Arabic"/>
+                <a:cs typeface="adwa-assalaf"/>
+              </a:rPr>
+              <a:t>كل ما يُعرف عن الوكيل، ونموذج لتكليفه مباشرة بالمحرك المختار</a:t>
+            </a:r>
+            <a:endParaRPr lang="ar-AE" sz="1500" dirty="0"/>
+          </a:p>
+        </p:txBody>
+      </p:sp>
+      <p:sp>
+        <p:nvSpPr>
+          <p:cNvPr id="7" name="screen-frame"/>
+          <p:cNvSpPr/>
+          <p:nvPr/>
+        </p:nvSpPr>
+        <p:spPr>
+          <a:xfrm>
+            <a:off x="1133856" y="1819656"/>
+            <a:ext cx="6784848" cy="3864483"/>
+          </a:xfrm>
+          <a:prstGeom prst="roundRect">
+            <a:avLst>
+              <a:gd name="adj" fmla="val 1893"/>
             </a:avLst>
           </a:prstGeom>
           <a:solidFill>
@@ -9935,7 +11235,7 @@
       </p:sp>
       <p:pic>
         <p:nvPicPr>
-          <p:cNvPr id="4" name="screenshot" descr="/tmp/claude-0/-home-user/11b98046-3116-585b-b221-e5c2e170e62a/scratchpad/deck/bshots/08_agent.jpg">    </p:cNvPr>
+          <p:cNvPr id="8" name="screenshot" descr="/tmp/claude-0/-home-user/11b98046-3116-585b-b221-e5c2e170e62a/scratchpad/deck/bshots/08_agent.jpg">    </p:cNvPr>
           <p:cNvPicPr>
             <a:picLocks noChangeAspect="1"/>
           </p:cNvPicPr>
@@ -9949,8 +11249,8 @@
         </p:blipFill>
         <p:spPr>
           <a:xfrm>
-            <a:off x="548640" y="1325880"/>
-            <a:ext cx="7315200" cy="4114800"/>
+            <a:off x="1188720" y="1874520"/>
+            <a:ext cx="6675120" cy="3754755"/>
           </a:xfrm>
           <a:prstGeom prst="rect">
             <a:avLst/>
@@ -9959,13 +11259,13 @@
       </p:pic>
       <p:sp>
         <p:nvSpPr>
-          <p:cNvPr id="5" name="num-1"/>
+          <p:cNvPr id="9" name="num-1"/>
           <p:cNvSpPr/>
           <p:nvPr/>
         </p:nvSpPr>
         <p:spPr>
           <a:xfrm>
-            <a:off x="11219688" y="1316736"/>
+            <a:off x="11219688" y="1865376"/>
             <a:ext cx="420624" cy="420624"/>
           </a:xfrm>
           <a:prstGeom prst="ellipse">
@@ -9984,13 +11284,13 @@
       </p:sp>
       <p:sp>
         <p:nvSpPr>
-          <p:cNvPr id="6" name="Text 3"/>
-          <p:cNvSpPr txBox="1"/>
-          <p:nvPr/>
-        </p:nvSpPr>
-        <p:spPr>
-          <a:xfrm>
-            <a:off x="11219688" y="1316736"/>
+          <p:cNvPr id="10" name="Text 7"/>
+          <p:cNvSpPr txBox="1"/>
+          <p:nvPr/>
+        </p:nvSpPr>
+        <p:spPr>
+          <a:xfrm>
+            <a:off x="11219688" y="1865376"/>
             <a:ext cx="420624" cy="420624"/>
           </a:xfrm>
           <a:prstGeom prst="rect">
@@ -10023,13 +11323,13 @@
       </p:sp>
       <p:sp>
         <p:nvSpPr>
-          <p:cNvPr id="7" name="Text 4"/>
-          <p:cNvSpPr txBox="1"/>
-          <p:nvPr/>
-        </p:nvSpPr>
-        <p:spPr>
-          <a:xfrm>
-            <a:off x="8183880" y="1298448"/>
+          <p:cNvPr id="11" name="Text 8"/>
+          <p:cNvSpPr txBox="1"/>
+          <p:nvPr/>
+        </p:nvSpPr>
+        <p:spPr>
+          <a:xfrm>
+            <a:off x="8183880" y="1847088"/>
             <a:ext cx="2889504" cy="384048"/>
           </a:xfrm>
           <a:prstGeom prst="rect">
@@ -10061,13 +11361,13 @@
       </p:sp>
       <p:sp>
         <p:nvSpPr>
-          <p:cNvPr id="8" name="Text 5"/>
-          <p:cNvSpPr txBox="1"/>
-          <p:nvPr/>
-        </p:nvSpPr>
-        <p:spPr>
-          <a:xfrm>
-            <a:off x="8183880" y="1682496"/>
+          <p:cNvPr id="12" name="Text 9"/>
+          <p:cNvSpPr txBox="1"/>
+          <p:nvPr/>
+        </p:nvSpPr>
+        <p:spPr>
+          <a:xfrm>
+            <a:off x="8183880" y="2231136"/>
             <a:ext cx="2889504" cy="758952"/>
           </a:xfrm>
           <a:prstGeom prst="rect">
@@ -10099,13 +11399,13 @@
       </p:sp>
       <p:sp>
         <p:nvSpPr>
-          <p:cNvPr id="9" name="num-2"/>
+          <p:cNvPr id="13" name="num-2"/>
           <p:cNvSpPr/>
           <p:nvPr/>
         </p:nvSpPr>
         <p:spPr>
           <a:xfrm>
-            <a:off x="11219688" y="2459736"/>
+            <a:off x="11219688" y="3008376"/>
             <a:ext cx="420624" cy="420624"/>
           </a:xfrm>
           <a:prstGeom prst="ellipse">
@@ -10124,13 +11424,13 @@
       </p:sp>
       <p:sp>
         <p:nvSpPr>
-          <p:cNvPr id="10" name="Text 7"/>
-          <p:cNvSpPr txBox="1"/>
-          <p:nvPr/>
-        </p:nvSpPr>
-        <p:spPr>
-          <a:xfrm>
-            <a:off x="11219688" y="2459736"/>
+          <p:cNvPr id="14" name="Text 11"/>
+          <p:cNvSpPr txBox="1"/>
+          <p:nvPr/>
+        </p:nvSpPr>
+        <p:spPr>
+          <a:xfrm>
+            <a:off x="11219688" y="3008376"/>
             <a:ext cx="420624" cy="420624"/>
           </a:xfrm>
           <a:prstGeom prst="rect">
@@ -10163,13 +11463,13 @@
       </p:sp>
       <p:sp>
         <p:nvSpPr>
-          <p:cNvPr id="11" name="Text 8"/>
-          <p:cNvSpPr txBox="1"/>
-          <p:nvPr/>
-        </p:nvSpPr>
-        <p:spPr>
-          <a:xfrm>
-            <a:off x="8183880" y="2441448"/>
+          <p:cNvPr id="15" name="Text 12"/>
+          <p:cNvSpPr txBox="1"/>
+          <p:nvPr/>
+        </p:nvSpPr>
+        <p:spPr>
+          <a:xfrm>
+            <a:off x="8183880" y="2990088"/>
             <a:ext cx="2889504" cy="384048"/>
           </a:xfrm>
           <a:prstGeom prst="rect">
@@ -10201,13 +11501,13 @@
       </p:sp>
       <p:sp>
         <p:nvSpPr>
-          <p:cNvPr id="12" name="Text 9"/>
-          <p:cNvSpPr txBox="1"/>
-          <p:nvPr/>
-        </p:nvSpPr>
-        <p:spPr>
-          <a:xfrm>
-            <a:off x="8183880" y="2825496"/>
+          <p:cNvPr id="16" name="Text 13"/>
+          <p:cNvSpPr txBox="1"/>
+          <p:nvPr/>
+        </p:nvSpPr>
+        <p:spPr>
+          <a:xfrm>
+            <a:off x="8183880" y="3374136"/>
             <a:ext cx="2889504" cy="758952"/>
           </a:xfrm>
           <a:prstGeom prst="rect">
@@ -10239,13 +11539,13 @@
       </p:sp>
       <p:sp>
         <p:nvSpPr>
-          <p:cNvPr id="13" name="num-3"/>
+          <p:cNvPr id="17" name="num-3"/>
           <p:cNvSpPr/>
           <p:nvPr/>
         </p:nvSpPr>
         <p:spPr>
           <a:xfrm>
-            <a:off x="11219688" y="3602736"/>
+            <a:off x="11219688" y="4151376"/>
             <a:ext cx="420624" cy="420624"/>
           </a:xfrm>
           <a:prstGeom prst="ellipse">
@@ -10264,13 +11564,13 @@
       </p:sp>
       <p:sp>
         <p:nvSpPr>
-          <p:cNvPr id="14" name="Text 11"/>
-          <p:cNvSpPr txBox="1"/>
-          <p:nvPr/>
-        </p:nvSpPr>
-        <p:spPr>
-          <a:xfrm>
-            <a:off x="11219688" y="3602736"/>
+          <p:cNvPr id="18" name="Text 15"/>
+          <p:cNvSpPr txBox="1"/>
+          <p:nvPr/>
+        </p:nvSpPr>
+        <p:spPr>
+          <a:xfrm>
+            <a:off x="11219688" y="4151376"/>
             <a:ext cx="420624" cy="420624"/>
           </a:xfrm>
           <a:prstGeom prst="rect">
@@ -10303,13 +11603,13 @@
       </p:sp>
       <p:sp>
         <p:nvSpPr>
-          <p:cNvPr id="15" name="Text 12"/>
-          <p:cNvSpPr txBox="1"/>
-          <p:nvPr/>
-        </p:nvSpPr>
-        <p:spPr>
-          <a:xfrm>
-            <a:off x="8183880" y="3584448"/>
+          <p:cNvPr id="19" name="Text 16"/>
+          <p:cNvSpPr txBox="1"/>
+          <p:nvPr/>
+        </p:nvSpPr>
+        <p:spPr>
+          <a:xfrm>
+            <a:off x="8183880" y="4133088"/>
             <a:ext cx="2889504" cy="384048"/>
           </a:xfrm>
           <a:prstGeom prst="rect">
@@ -10341,13 +11641,13 @@
       </p:sp>
       <p:sp>
         <p:nvSpPr>
-          <p:cNvPr id="16" name="Text 13"/>
-          <p:cNvSpPr txBox="1"/>
-          <p:nvPr/>
-        </p:nvSpPr>
-        <p:spPr>
-          <a:xfrm>
-            <a:off x="8183880" y="3968496"/>
+          <p:cNvPr id="20" name="Text 17"/>
+          <p:cNvSpPr txBox="1"/>
+          <p:nvPr/>
+        </p:nvSpPr>
+        <p:spPr>
+          <a:xfrm>
+            <a:off x="8183880" y="4517136"/>
             <a:ext cx="2889504" cy="758952"/>
           </a:xfrm>
           <a:prstGeom prst="rect">
@@ -11490,18 +12790,146 @@
       </p:sp>
       <p:sp>
         <p:nvSpPr>
-          <p:cNvPr id="3" name="screen-frame"/>
+          <p:cNvPr id="3" name="role-band"/>
           <p:cNvSpPr/>
           <p:nvPr/>
         </p:nvSpPr>
         <p:spPr>
           <a:xfrm>
-            <a:off x="493776" y="1271016"/>
-            <a:ext cx="7424928" cy="4224528"/>
+            <a:off x="548640" y="1161288"/>
+            <a:ext cx="11091672" cy="530352"/>
           </a:xfrm>
           <a:prstGeom prst="roundRect">
             <a:avLst>
-              <a:gd name="adj" fmla="val 1732"/>
+              <a:gd name="adj" fmla="val 13793"/>
+            </a:avLst>
+          </a:prstGeom>
+          <a:solidFill>
+            <a:srgbClr val="EAF2FA"/>
+          </a:solidFill>
+          <a:ln w="12700">
+            <a:solidFill>
+              <a:srgbClr val="EAF2FA"/>
+            </a:solidFill>
+            <a:prstDash val="solid"/>
+          </a:ln>
+        </p:spPr>
+      </p:sp>
+      <p:sp>
+        <p:nvSpPr>
+          <p:cNvPr id="4" name="Shape 2"/>
+          <p:cNvSpPr/>
+          <p:nvPr/>
+        </p:nvSpPr>
+        <p:spPr>
+          <a:xfrm>
+            <a:off x="11548872" y="1161288"/>
+            <a:ext cx="91440" cy="530352"/>
+          </a:xfrm>
+          <a:prstGeom prst="rect">
+            <a:avLst/>
+          </a:prstGeom>
+          <a:solidFill>
+            <a:srgbClr val="B8860B"/>
+          </a:solidFill>
+          <a:ln w="12700">
+            <a:solidFill>
+              <a:srgbClr val="B8860B"/>
+            </a:solidFill>
+            <a:prstDash val="solid"/>
+          </a:ln>
+        </p:spPr>
+      </p:sp>
+      <p:sp>
+        <p:nvSpPr>
+          <p:cNvPr id="5" name="Text 3"/>
+          <p:cNvSpPr txBox="1"/>
+          <p:nvPr/>
+        </p:nvSpPr>
+        <p:spPr>
+          <a:xfrm>
+            <a:off x="10515600" y="1161288"/>
+            <a:ext cx="914400" cy="530352"/>
+          </a:xfrm>
+          <a:prstGeom prst="rect">
+            <a:avLst/>
+          </a:prstGeom>
+          <a:noFill/>
+          <a:ln/>
+        </p:spPr>
+        <p:txBody>
+          <a:bodyPr wrap="square" lIns="0" tIns="0" rIns="0" bIns="0" rtlCol="0" anchor="ctr"/>
+          <a:lstStyle/>
+          <a:p>
+            <a:pPr rtl="1" algn="r" indent="0" marL="0">
+              <a:buNone/>
+            </a:pPr>
+            <a:r>
+              <a:rPr lang="ar-AE" altLang="en-US" sz="1500" b="1" dirty="0">
+                <a:solidFill>
+                  <a:srgbClr val="B8860B"/>
+                </a:solidFill>
+                <a:latin typeface="Noto Naskh Arabic"/>
+                <a:cs typeface="adwa-assalaf"/>
+              </a:rPr>
+              <a:t>دور الشاشة:</a:t>
+            </a:r>
+            <a:endParaRPr lang="ar-AE" sz="1500" dirty="0"/>
+          </a:p>
+        </p:txBody>
+      </p:sp>
+      <p:sp>
+        <p:nvSpPr>
+          <p:cNvPr id="6" name="Text 4"/>
+          <p:cNvSpPr txBox="1"/>
+          <p:nvPr/>
+        </p:nvSpPr>
+        <p:spPr>
+          <a:xfrm>
+            <a:off x="731520" y="1161288"/>
+            <a:ext cx="9857232" cy="530352"/>
+          </a:xfrm>
+          <a:prstGeom prst="rect">
+            <a:avLst/>
+          </a:prstGeom>
+          <a:noFill/>
+          <a:ln/>
+        </p:spPr>
+        <p:txBody>
+          <a:bodyPr wrap="square" lIns="0" tIns="0" rIns="0" bIns="0" rtlCol="0" anchor="ctr"/>
+          <a:lstStyle/>
+          <a:p>
+            <a:pPr rtl="1" algn="r" indent="0" marL="0">
+              <a:buNone/>
+            </a:pPr>
+            <a:r>
+              <a:rPr lang="ar-AE" altLang="en-US" sz="1500" dirty="0">
+                <a:solidFill>
+                  <a:srgbClr val="12263F"/>
+                </a:solidFill>
+                <a:latin typeface="Noto Naskh Arabic"/>
+                <a:cs typeface="adwa-assalaf"/>
+              </a:rPr>
+              <a:t>صفات كل جنس الفكرية والأسلوبية، تُحقن في تكليف الوكيل</a:t>
+            </a:r>
+            <a:endParaRPr lang="ar-AE" sz="1500" dirty="0"/>
+          </a:p>
+        </p:txBody>
+      </p:sp>
+      <p:sp>
+        <p:nvSpPr>
+          <p:cNvPr id="7" name="screen-frame"/>
+          <p:cNvSpPr/>
+          <p:nvPr/>
+        </p:nvSpPr>
+        <p:spPr>
+          <a:xfrm>
+            <a:off x="1133856" y="1819656"/>
+            <a:ext cx="6784848" cy="3864483"/>
+          </a:xfrm>
+          <a:prstGeom prst="roundRect">
+            <a:avLst>
+              <a:gd name="adj" fmla="val 1893"/>
             </a:avLst>
           </a:prstGeom>
           <a:solidFill>
@@ -11524,7 +12952,7 @@
       </p:sp>
       <p:pic>
         <p:nvPicPr>
-          <p:cNvPr id="4" name="screenshot" descr="/tmp/claude-0/-home-user/11b98046-3116-585b-b221-e5c2e170e62a/scratchpad/deck/bshots/09_genres.jpg">    </p:cNvPr>
+          <p:cNvPr id="8" name="screenshot" descr="/tmp/claude-0/-home-user/11b98046-3116-585b-b221-e5c2e170e62a/scratchpad/deck/bshots/09_genres.jpg">    </p:cNvPr>
           <p:cNvPicPr>
             <a:picLocks noChangeAspect="1"/>
           </p:cNvPicPr>
@@ -11538,8 +12966,8 @@
         </p:blipFill>
         <p:spPr>
           <a:xfrm>
-            <a:off x="548640" y="1325880"/>
-            <a:ext cx="7315200" cy="4114800"/>
+            <a:off x="1188720" y="1874520"/>
+            <a:ext cx="6675120" cy="3754755"/>
           </a:xfrm>
           <a:prstGeom prst="rect">
             <a:avLst/>
@@ -11548,13 +12976,13 @@
       </p:pic>
       <p:sp>
         <p:nvSpPr>
-          <p:cNvPr id="5" name="num-1"/>
+          <p:cNvPr id="9" name="num-1"/>
           <p:cNvSpPr/>
           <p:nvPr/>
         </p:nvSpPr>
         <p:spPr>
           <a:xfrm>
-            <a:off x="11219688" y="1316736"/>
+            <a:off x="11219688" y="1865376"/>
             <a:ext cx="420624" cy="420624"/>
           </a:xfrm>
           <a:prstGeom prst="ellipse">
@@ -11573,13 +13001,13 @@
       </p:sp>
       <p:sp>
         <p:nvSpPr>
-          <p:cNvPr id="6" name="Text 3"/>
-          <p:cNvSpPr txBox="1"/>
-          <p:nvPr/>
-        </p:nvSpPr>
-        <p:spPr>
-          <a:xfrm>
-            <a:off x="11219688" y="1316736"/>
+          <p:cNvPr id="10" name="Text 7"/>
+          <p:cNvSpPr txBox="1"/>
+          <p:nvPr/>
+        </p:nvSpPr>
+        <p:spPr>
+          <a:xfrm>
+            <a:off x="11219688" y="1865376"/>
             <a:ext cx="420624" cy="420624"/>
           </a:xfrm>
           <a:prstGeom prst="rect">
@@ -11612,13 +13040,13 @@
       </p:sp>
       <p:sp>
         <p:nvSpPr>
-          <p:cNvPr id="7" name="Text 4"/>
-          <p:cNvSpPr txBox="1"/>
-          <p:nvPr/>
-        </p:nvSpPr>
-        <p:spPr>
-          <a:xfrm>
-            <a:off x="8183880" y="1298448"/>
+          <p:cNvPr id="11" name="Text 8"/>
+          <p:cNvSpPr txBox="1"/>
+          <p:nvPr/>
+        </p:nvSpPr>
+        <p:spPr>
+          <a:xfrm>
+            <a:off x="8183880" y="1847088"/>
             <a:ext cx="2889504" cy="384048"/>
           </a:xfrm>
           <a:prstGeom prst="rect">
@@ -11650,13 +13078,13 @@
       </p:sp>
       <p:sp>
         <p:nvSpPr>
-          <p:cNvPr id="8" name="Text 5"/>
-          <p:cNvSpPr txBox="1"/>
-          <p:nvPr/>
-        </p:nvSpPr>
-        <p:spPr>
-          <a:xfrm>
-            <a:off x="8183880" y="1682496"/>
+          <p:cNvPr id="12" name="Text 9"/>
+          <p:cNvSpPr txBox="1"/>
+          <p:nvPr/>
+        </p:nvSpPr>
+        <p:spPr>
+          <a:xfrm>
+            <a:off x="8183880" y="2231136"/>
             <a:ext cx="2889504" cy="758952"/>
           </a:xfrm>
           <a:prstGeom prst="rect">
@@ -11688,13 +13116,13 @@
       </p:sp>
       <p:sp>
         <p:nvSpPr>
-          <p:cNvPr id="9" name="num-2"/>
+          <p:cNvPr id="13" name="num-2"/>
           <p:cNvSpPr/>
           <p:nvPr/>
         </p:nvSpPr>
         <p:spPr>
           <a:xfrm>
-            <a:off x="11219688" y="2459736"/>
+            <a:off x="11219688" y="3008376"/>
             <a:ext cx="420624" cy="420624"/>
           </a:xfrm>
           <a:prstGeom prst="ellipse">
@@ -11713,13 +13141,13 @@
       </p:sp>
       <p:sp>
         <p:nvSpPr>
-          <p:cNvPr id="10" name="Text 7"/>
-          <p:cNvSpPr txBox="1"/>
-          <p:nvPr/>
-        </p:nvSpPr>
-        <p:spPr>
-          <a:xfrm>
-            <a:off x="11219688" y="2459736"/>
+          <p:cNvPr id="14" name="Text 11"/>
+          <p:cNvSpPr txBox="1"/>
+          <p:nvPr/>
+        </p:nvSpPr>
+        <p:spPr>
+          <a:xfrm>
+            <a:off x="11219688" y="3008376"/>
             <a:ext cx="420624" cy="420624"/>
           </a:xfrm>
           <a:prstGeom prst="rect">
@@ -11752,13 +13180,13 @@
       </p:sp>
       <p:sp>
         <p:nvSpPr>
-          <p:cNvPr id="11" name="Text 8"/>
-          <p:cNvSpPr txBox="1"/>
-          <p:nvPr/>
-        </p:nvSpPr>
-        <p:spPr>
-          <a:xfrm>
-            <a:off x="8183880" y="2441448"/>
+          <p:cNvPr id="15" name="Text 12"/>
+          <p:cNvSpPr txBox="1"/>
+          <p:nvPr/>
+        </p:nvSpPr>
+        <p:spPr>
+          <a:xfrm>
+            <a:off x="8183880" y="2990088"/>
             <a:ext cx="2889504" cy="384048"/>
           </a:xfrm>
           <a:prstGeom prst="rect">
@@ -11790,13 +13218,13 @@
       </p:sp>
       <p:sp>
         <p:nvSpPr>
-          <p:cNvPr id="12" name="Text 9"/>
-          <p:cNvSpPr txBox="1"/>
-          <p:nvPr/>
-        </p:nvSpPr>
-        <p:spPr>
-          <a:xfrm>
-            <a:off x="8183880" y="2825496"/>
+          <p:cNvPr id="16" name="Text 13"/>
+          <p:cNvSpPr txBox="1"/>
+          <p:nvPr/>
+        </p:nvSpPr>
+        <p:spPr>
+          <a:xfrm>
+            <a:off x="8183880" y="3374136"/>
             <a:ext cx="2889504" cy="758952"/>
           </a:xfrm>
           <a:prstGeom prst="rect">
@@ -11828,13 +13256,13 @@
       </p:sp>
       <p:sp>
         <p:nvSpPr>
-          <p:cNvPr id="13" name="num-3"/>
+          <p:cNvPr id="17" name="num-3"/>
           <p:cNvSpPr/>
           <p:nvPr/>
         </p:nvSpPr>
         <p:spPr>
           <a:xfrm>
-            <a:off x="11219688" y="3602736"/>
+            <a:off x="11219688" y="4151376"/>
             <a:ext cx="420624" cy="420624"/>
           </a:xfrm>
           <a:prstGeom prst="ellipse">
@@ -11853,13 +13281,13 @@
       </p:sp>
       <p:sp>
         <p:nvSpPr>
-          <p:cNvPr id="14" name="Text 11"/>
-          <p:cNvSpPr txBox="1"/>
-          <p:nvPr/>
-        </p:nvSpPr>
-        <p:spPr>
-          <a:xfrm>
-            <a:off x="11219688" y="3602736"/>
+          <p:cNvPr id="18" name="Text 15"/>
+          <p:cNvSpPr txBox="1"/>
+          <p:nvPr/>
+        </p:nvSpPr>
+        <p:spPr>
+          <a:xfrm>
+            <a:off x="11219688" y="4151376"/>
             <a:ext cx="420624" cy="420624"/>
           </a:xfrm>
           <a:prstGeom prst="rect">
@@ -11892,13 +13320,13 @@
       </p:sp>
       <p:sp>
         <p:nvSpPr>
-          <p:cNvPr id="15" name="Text 12"/>
-          <p:cNvSpPr txBox="1"/>
-          <p:nvPr/>
-        </p:nvSpPr>
-        <p:spPr>
-          <a:xfrm>
-            <a:off x="8183880" y="3584448"/>
+          <p:cNvPr id="19" name="Text 16"/>
+          <p:cNvSpPr txBox="1"/>
+          <p:nvPr/>
+        </p:nvSpPr>
+        <p:spPr>
+          <a:xfrm>
+            <a:off x="8183880" y="4133088"/>
             <a:ext cx="2889504" cy="384048"/>
           </a:xfrm>
           <a:prstGeom prst="rect">
@@ -11930,13 +13358,13 @@
       </p:sp>
       <p:sp>
         <p:nvSpPr>
-          <p:cNvPr id="16" name="Text 13"/>
-          <p:cNvSpPr txBox="1"/>
-          <p:nvPr/>
-        </p:nvSpPr>
-        <p:spPr>
-          <a:xfrm>
-            <a:off x="8183880" y="3968496"/>
+          <p:cNvPr id="20" name="Text 17"/>
+          <p:cNvSpPr txBox="1"/>
+          <p:nvPr/>
+        </p:nvSpPr>
+        <p:spPr>
+          <a:xfrm>
+            <a:off x="8183880" y="4517136"/>
             <a:ext cx="2889504" cy="758952"/>
           </a:xfrm>
           <a:prstGeom prst="rect">
@@ -12084,18 +13512,146 @@
       </p:sp>
       <p:sp>
         <p:nvSpPr>
-          <p:cNvPr id="3" name="screen-frame"/>
+          <p:cNvPr id="3" name="role-band"/>
           <p:cNvSpPr/>
           <p:nvPr/>
         </p:nvSpPr>
         <p:spPr>
           <a:xfrm>
-            <a:off x="493776" y="1271016"/>
-            <a:ext cx="7424928" cy="4224528"/>
+            <a:off x="548640" y="1161288"/>
+            <a:ext cx="11091672" cy="530352"/>
           </a:xfrm>
           <a:prstGeom prst="roundRect">
             <a:avLst>
-              <a:gd name="adj" fmla="val 1732"/>
+              <a:gd name="adj" fmla="val 13793"/>
+            </a:avLst>
+          </a:prstGeom>
+          <a:solidFill>
+            <a:srgbClr val="EAF2FA"/>
+          </a:solidFill>
+          <a:ln w="12700">
+            <a:solidFill>
+              <a:srgbClr val="EAF2FA"/>
+            </a:solidFill>
+            <a:prstDash val="solid"/>
+          </a:ln>
+        </p:spPr>
+      </p:sp>
+      <p:sp>
+        <p:nvSpPr>
+          <p:cNvPr id="4" name="Shape 2"/>
+          <p:cNvSpPr/>
+          <p:nvPr/>
+        </p:nvSpPr>
+        <p:spPr>
+          <a:xfrm>
+            <a:off x="11548872" y="1161288"/>
+            <a:ext cx="91440" cy="530352"/>
+          </a:xfrm>
+          <a:prstGeom prst="rect">
+            <a:avLst/>
+          </a:prstGeom>
+          <a:solidFill>
+            <a:srgbClr val="B8860B"/>
+          </a:solidFill>
+          <a:ln w="12700">
+            <a:solidFill>
+              <a:srgbClr val="B8860B"/>
+            </a:solidFill>
+            <a:prstDash val="solid"/>
+          </a:ln>
+        </p:spPr>
+      </p:sp>
+      <p:sp>
+        <p:nvSpPr>
+          <p:cNvPr id="5" name="Text 3"/>
+          <p:cNvSpPr txBox="1"/>
+          <p:nvPr/>
+        </p:nvSpPr>
+        <p:spPr>
+          <a:xfrm>
+            <a:off x="10515600" y="1161288"/>
+            <a:ext cx="914400" cy="530352"/>
+          </a:xfrm>
+          <a:prstGeom prst="rect">
+            <a:avLst/>
+          </a:prstGeom>
+          <a:noFill/>
+          <a:ln/>
+        </p:spPr>
+        <p:txBody>
+          <a:bodyPr wrap="square" lIns="0" tIns="0" rIns="0" bIns="0" rtlCol="0" anchor="ctr"/>
+          <a:lstStyle/>
+          <a:p>
+            <a:pPr rtl="1" algn="r" indent="0" marL="0">
+              <a:buNone/>
+            </a:pPr>
+            <a:r>
+              <a:rPr lang="ar-AE" altLang="en-US" sz="1500" b="1" dirty="0">
+                <a:solidFill>
+                  <a:srgbClr val="B8860B"/>
+                </a:solidFill>
+                <a:latin typeface="Noto Naskh Arabic"/>
+                <a:cs typeface="adwa-assalaf"/>
+              </a:rPr>
+              <a:t>دور الشاشة:</a:t>
+            </a:r>
+            <a:endParaRPr lang="ar-AE" sz="1500" dirty="0"/>
+          </a:p>
+        </p:txBody>
+      </p:sp>
+      <p:sp>
+        <p:nvSpPr>
+          <p:cNvPr id="6" name="Text 4"/>
+          <p:cNvSpPr txBox="1"/>
+          <p:nvPr/>
+        </p:nvSpPr>
+        <p:spPr>
+          <a:xfrm>
+            <a:off x="731520" y="1161288"/>
+            <a:ext cx="9857232" cy="530352"/>
+          </a:xfrm>
+          <a:prstGeom prst="rect">
+            <a:avLst/>
+          </a:prstGeom>
+          <a:noFill/>
+          <a:ln/>
+        </p:spPr>
+        <p:txBody>
+          <a:bodyPr wrap="square" lIns="0" tIns="0" rIns="0" bIns="0" rtlCol="0" anchor="ctr"/>
+          <a:lstStyle/>
+          <a:p>
+            <a:pPr rtl="1" algn="r" indent="0" marL="0">
+              <a:buNone/>
+            </a:pPr>
+            <a:r>
+              <a:rPr lang="ar-AE" altLang="en-US" sz="1500" dirty="0">
+                <a:solidFill>
+                  <a:srgbClr val="12263F"/>
+                </a:solidFill>
+                <a:latin typeface="Noto Naskh Arabic"/>
+                <a:cs typeface="adwa-assalaf"/>
+              </a:rPr>
+              <a:t>ثلاثة مستويات تحدد من يكتب ومتى تعتمدون</a:t>
+            </a:r>
+            <a:endParaRPr lang="ar-AE" sz="1500" dirty="0"/>
+          </a:p>
+        </p:txBody>
+      </p:sp>
+      <p:sp>
+        <p:nvSpPr>
+          <p:cNvPr id="7" name="screen-frame"/>
+          <p:cNvSpPr/>
+          <p:nvPr/>
+        </p:nvSpPr>
+        <p:spPr>
+          <a:xfrm>
+            <a:off x="1133856" y="1819656"/>
+            <a:ext cx="6784848" cy="3864483"/>
+          </a:xfrm>
+          <a:prstGeom prst="roundRect">
+            <a:avLst>
+              <a:gd name="adj" fmla="val 1893"/>
             </a:avLst>
           </a:prstGeom>
           <a:solidFill>
@@ -12118,7 +13674,7 @@
       </p:sp>
       <p:pic>
         <p:nvPicPr>
-          <p:cNvPr id="4" name="screenshot" descr="/tmp/claude-0/-home-user/11b98046-3116-585b-b221-e5c2e170e62a/scratchpad/deck/bshots/09b_levels.jpg">    </p:cNvPr>
+          <p:cNvPr id="8" name="screenshot" descr="/tmp/claude-0/-home-user/11b98046-3116-585b-b221-e5c2e170e62a/scratchpad/deck/bshots/09b_levels.jpg">    </p:cNvPr>
           <p:cNvPicPr>
             <a:picLocks noChangeAspect="1"/>
           </p:cNvPicPr>
@@ -12132,8 +13688,8 @@
         </p:blipFill>
         <p:spPr>
           <a:xfrm>
-            <a:off x="548640" y="1325880"/>
-            <a:ext cx="7315200" cy="4114800"/>
+            <a:off x="1188720" y="1874520"/>
+            <a:ext cx="6675120" cy="3754755"/>
           </a:xfrm>
           <a:prstGeom prst="rect">
             <a:avLst/>
@@ -12142,13 +13698,13 @@
       </p:pic>
       <p:sp>
         <p:nvSpPr>
-          <p:cNvPr id="5" name="num-1"/>
+          <p:cNvPr id="9" name="num-1"/>
           <p:cNvSpPr/>
           <p:nvPr/>
         </p:nvSpPr>
         <p:spPr>
           <a:xfrm>
-            <a:off x="11219688" y="1316736"/>
+            <a:off x="11219688" y="1865376"/>
             <a:ext cx="420624" cy="420624"/>
           </a:xfrm>
           <a:prstGeom prst="ellipse">
@@ -12167,13 +13723,13 @@
       </p:sp>
       <p:sp>
         <p:nvSpPr>
-          <p:cNvPr id="6" name="Text 3"/>
-          <p:cNvSpPr txBox="1"/>
-          <p:nvPr/>
-        </p:nvSpPr>
-        <p:spPr>
-          <a:xfrm>
-            <a:off x="11219688" y="1316736"/>
+          <p:cNvPr id="10" name="Text 7"/>
+          <p:cNvSpPr txBox="1"/>
+          <p:nvPr/>
+        </p:nvSpPr>
+        <p:spPr>
+          <a:xfrm>
+            <a:off x="11219688" y="1865376"/>
             <a:ext cx="420624" cy="420624"/>
           </a:xfrm>
           <a:prstGeom prst="rect">
@@ -12206,13 +13762,13 @@
       </p:sp>
       <p:sp>
         <p:nvSpPr>
-          <p:cNvPr id="7" name="Text 4"/>
-          <p:cNvSpPr txBox="1"/>
-          <p:nvPr/>
-        </p:nvSpPr>
-        <p:spPr>
-          <a:xfrm>
-            <a:off x="8183880" y="1298448"/>
+          <p:cNvPr id="11" name="Text 8"/>
+          <p:cNvSpPr txBox="1"/>
+          <p:nvPr/>
+        </p:nvSpPr>
+        <p:spPr>
+          <a:xfrm>
+            <a:off x="8183880" y="1847088"/>
             <a:ext cx="2889504" cy="384048"/>
           </a:xfrm>
           <a:prstGeom prst="rect">
@@ -12244,13 +13800,13 @@
       </p:sp>
       <p:sp>
         <p:nvSpPr>
-          <p:cNvPr id="8" name="Text 5"/>
-          <p:cNvSpPr txBox="1"/>
-          <p:nvPr/>
-        </p:nvSpPr>
-        <p:spPr>
-          <a:xfrm>
-            <a:off x="8183880" y="1682496"/>
+          <p:cNvPr id="12" name="Text 9"/>
+          <p:cNvSpPr txBox="1"/>
+          <p:nvPr/>
+        </p:nvSpPr>
+        <p:spPr>
+          <a:xfrm>
+            <a:off x="8183880" y="2231136"/>
             <a:ext cx="2889504" cy="758952"/>
           </a:xfrm>
           <a:prstGeom prst="rect">
@@ -12282,13 +13838,13 @@
       </p:sp>
       <p:sp>
         <p:nvSpPr>
-          <p:cNvPr id="9" name="num-2"/>
+          <p:cNvPr id="13" name="num-2"/>
           <p:cNvSpPr/>
           <p:nvPr/>
         </p:nvSpPr>
         <p:spPr>
           <a:xfrm>
-            <a:off x="11219688" y="2459736"/>
+            <a:off x="11219688" y="3008376"/>
             <a:ext cx="420624" cy="420624"/>
           </a:xfrm>
           <a:prstGeom prst="ellipse">
@@ -12307,13 +13863,13 @@
       </p:sp>
       <p:sp>
         <p:nvSpPr>
-          <p:cNvPr id="10" name="Text 7"/>
-          <p:cNvSpPr txBox="1"/>
-          <p:nvPr/>
-        </p:nvSpPr>
-        <p:spPr>
-          <a:xfrm>
-            <a:off x="11219688" y="2459736"/>
+          <p:cNvPr id="14" name="Text 11"/>
+          <p:cNvSpPr txBox="1"/>
+          <p:nvPr/>
+        </p:nvSpPr>
+        <p:spPr>
+          <a:xfrm>
+            <a:off x="11219688" y="3008376"/>
             <a:ext cx="420624" cy="420624"/>
           </a:xfrm>
           <a:prstGeom prst="rect">
@@ -12346,13 +13902,13 @@
       </p:sp>
       <p:sp>
         <p:nvSpPr>
-          <p:cNvPr id="11" name="Text 8"/>
-          <p:cNvSpPr txBox="1"/>
-          <p:nvPr/>
-        </p:nvSpPr>
-        <p:spPr>
-          <a:xfrm>
-            <a:off x="8183880" y="2441448"/>
+          <p:cNvPr id="15" name="Text 12"/>
+          <p:cNvSpPr txBox="1"/>
+          <p:nvPr/>
+        </p:nvSpPr>
+        <p:spPr>
+          <a:xfrm>
+            <a:off x="8183880" y="2990088"/>
             <a:ext cx="2889504" cy="384048"/>
           </a:xfrm>
           <a:prstGeom prst="rect">
@@ -12384,13 +13940,13 @@
       </p:sp>
       <p:sp>
         <p:nvSpPr>
-          <p:cNvPr id="12" name="Text 9"/>
-          <p:cNvSpPr txBox="1"/>
-          <p:nvPr/>
-        </p:nvSpPr>
-        <p:spPr>
-          <a:xfrm>
-            <a:off x="8183880" y="2825496"/>
+          <p:cNvPr id="16" name="Text 13"/>
+          <p:cNvSpPr txBox="1"/>
+          <p:nvPr/>
+        </p:nvSpPr>
+        <p:spPr>
+          <a:xfrm>
+            <a:off x="8183880" y="3374136"/>
             <a:ext cx="2889504" cy="758952"/>
           </a:xfrm>
           <a:prstGeom prst="rect">
@@ -12422,13 +13978,13 @@
       </p:sp>
       <p:sp>
         <p:nvSpPr>
-          <p:cNvPr id="13" name="num-3"/>
+          <p:cNvPr id="17" name="num-3"/>
           <p:cNvSpPr/>
           <p:nvPr/>
         </p:nvSpPr>
         <p:spPr>
           <a:xfrm>
-            <a:off x="11219688" y="3602736"/>
+            <a:off x="11219688" y="4151376"/>
             <a:ext cx="420624" cy="420624"/>
           </a:xfrm>
           <a:prstGeom prst="ellipse">
@@ -12447,13 +14003,13 @@
       </p:sp>
       <p:sp>
         <p:nvSpPr>
-          <p:cNvPr id="14" name="Text 11"/>
-          <p:cNvSpPr txBox="1"/>
-          <p:nvPr/>
-        </p:nvSpPr>
-        <p:spPr>
-          <a:xfrm>
-            <a:off x="11219688" y="3602736"/>
+          <p:cNvPr id="18" name="Text 15"/>
+          <p:cNvSpPr txBox="1"/>
+          <p:nvPr/>
+        </p:nvSpPr>
+        <p:spPr>
+          <a:xfrm>
+            <a:off x="11219688" y="4151376"/>
             <a:ext cx="420624" cy="420624"/>
           </a:xfrm>
           <a:prstGeom prst="rect">
@@ -12486,13 +14042,13 @@
       </p:sp>
       <p:sp>
         <p:nvSpPr>
-          <p:cNvPr id="15" name="Text 12"/>
-          <p:cNvSpPr txBox="1"/>
-          <p:nvPr/>
-        </p:nvSpPr>
-        <p:spPr>
-          <a:xfrm>
-            <a:off x="8183880" y="3584448"/>
+          <p:cNvPr id="19" name="Text 16"/>
+          <p:cNvSpPr txBox="1"/>
+          <p:nvPr/>
+        </p:nvSpPr>
+        <p:spPr>
+          <a:xfrm>
+            <a:off x="8183880" y="4133088"/>
             <a:ext cx="2889504" cy="384048"/>
           </a:xfrm>
           <a:prstGeom prst="rect">
@@ -12524,13 +14080,13 @@
       </p:sp>
       <p:sp>
         <p:nvSpPr>
-          <p:cNvPr id="16" name="Text 13"/>
-          <p:cNvSpPr txBox="1"/>
-          <p:nvPr/>
-        </p:nvSpPr>
-        <p:spPr>
-          <a:xfrm>
-            <a:off x="8183880" y="3968496"/>
+          <p:cNvPr id="20" name="Text 17"/>
+          <p:cNvSpPr txBox="1"/>
+          <p:nvPr/>
+        </p:nvSpPr>
+        <p:spPr>
+          <a:xfrm>
+            <a:off x="8183880" y="4517136"/>
             <a:ext cx="2889504" cy="758952"/>
           </a:xfrm>
           <a:prstGeom prst="rect">
@@ -12678,18 +14234,146 @@
       </p:sp>
       <p:sp>
         <p:nvSpPr>
-          <p:cNvPr id="3" name="screen-frame"/>
+          <p:cNvPr id="3" name="role-band"/>
           <p:cNvSpPr/>
           <p:nvPr/>
         </p:nvSpPr>
         <p:spPr>
           <a:xfrm>
-            <a:off x="493776" y="1271016"/>
-            <a:ext cx="7424928" cy="4224528"/>
+            <a:off x="548640" y="1161288"/>
+            <a:ext cx="11091672" cy="530352"/>
           </a:xfrm>
           <a:prstGeom prst="roundRect">
             <a:avLst>
-              <a:gd name="adj" fmla="val 1732"/>
+              <a:gd name="adj" fmla="val 13793"/>
+            </a:avLst>
+          </a:prstGeom>
+          <a:solidFill>
+            <a:srgbClr val="EAF2FA"/>
+          </a:solidFill>
+          <a:ln w="12700">
+            <a:solidFill>
+              <a:srgbClr val="EAF2FA"/>
+            </a:solidFill>
+            <a:prstDash val="solid"/>
+          </a:ln>
+        </p:spPr>
+      </p:sp>
+      <p:sp>
+        <p:nvSpPr>
+          <p:cNvPr id="4" name="Shape 2"/>
+          <p:cNvSpPr/>
+          <p:nvPr/>
+        </p:nvSpPr>
+        <p:spPr>
+          <a:xfrm>
+            <a:off x="11548872" y="1161288"/>
+            <a:ext cx="91440" cy="530352"/>
+          </a:xfrm>
+          <a:prstGeom prst="rect">
+            <a:avLst/>
+          </a:prstGeom>
+          <a:solidFill>
+            <a:srgbClr val="B8860B"/>
+          </a:solidFill>
+          <a:ln w="12700">
+            <a:solidFill>
+              <a:srgbClr val="B8860B"/>
+            </a:solidFill>
+            <a:prstDash val="solid"/>
+          </a:ln>
+        </p:spPr>
+      </p:sp>
+      <p:sp>
+        <p:nvSpPr>
+          <p:cNvPr id="5" name="Text 3"/>
+          <p:cNvSpPr txBox="1"/>
+          <p:nvPr/>
+        </p:nvSpPr>
+        <p:spPr>
+          <a:xfrm>
+            <a:off x="10515600" y="1161288"/>
+            <a:ext cx="914400" cy="530352"/>
+          </a:xfrm>
+          <a:prstGeom prst="rect">
+            <a:avLst/>
+          </a:prstGeom>
+          <a:noFill/>
+          <a:ln/>
+        </p:spPr>
+        <p:txBody>
+          <a:bodyPr wrap="square" lIns="0" tIns="0" rIns="0" bIns="0" rtlCol="0" anchor="ctr"/>
+          <a:lstStyle/>
+          <a:p>
+            <a:pPr rtl="1" algn="r" indent="0" marL="0">
+              <a:buNone/>
+            </a:pPr>
+            <a:r>
+              <a:rPr lang="ar-AE" altLang="en-US" sz="1500" b="1" dirty="0">
+                <a:solidFill>
+                  <a:srgbClr val="B8860B"/>
+                </a:solidFill>
+                <a:latin typeface="Noto Naskh Arabic"/>
+                <a:cs typeface="adwa-assalaf"/>
+              </a:rPr>
+              <a:t>دور الشاشة:</a:t>
+            </a:r>
+            <a:endParaRPr lang="ar-AE" sz="1500" dirty="0"/>
+          </a:p>
+        </p:txBody>
+      </p:sp>
+      <p:sp>
+        <p:nvSpPr>
+          <p:cNvPr id="6" name="Text 4"/>
+          <p:cNvSpPr txBox="1"/>
+          <p:nvPr/>
+        </p:nvSpPr>
+        <p:spPr>
+          <a:xfrm>
+            <a:off x="731520" y="1161288"/>
+            <a:ext cx="9857232" cy="530352"/>
+          </a:xfrm>
+          <a:prstGeom prst="rect">
+            <a:avLst/>
+          </a:prstGeom>
+          <a:noFill/>
+          <a:ln/>
+        </p:spPr>
+        <p:txBody>
+          <a:bodyPr wrap="square" lIns="0" tIns="0" rIns="0" bIns="0" rtlCol="0" anchor="ctr"/>
+          <a:lstStyle/>
+          <a:p>
+            <a:pPr rtl="1" algn="r" indent="0" marL="0">
+              <a:buNone/>
+            </a:pPr>
+            <a:r>
+              <a:rPr lang="ar-AE" altLang="en-US" sz="1500" dirty="0">
+                <a:solidFill>
+                  <a:srgbClr val="12263F"/>
+                </a:solidFill>
+                <a:latin typeface="Noto Naskh Arabic"/>
+                <a:cs typeface="adwa-assalaf"/>
+              </a:rPr>
+              <a:t>واحد وعشرون سير عمل جاهزاً، لكل نوع عمل مراحله ووكلاؤه</a:t>
+            </a:r>
+            <a:endParaRPr lang="ar-AE" sz="1500" dirty="0"/>
+          </a:p>
+        </p:txBody>
+      </p:sp>
+      <p:sp>
+        <p:nvSpPr>
+          <p:cNvPr id="7" name="screen-frame"/>
+          <p:cNvSpPr/>
+          <p:nvPr/>
+        </p:nvSpPr>
+        <p:spPr>
+          <a:xfrm>
+            <a:off x="1133856" y="1819656"/>
+            <a:ext cx="6784848" cy="3864483"/>
+          </a:xfrm>
+          <a:prstGeom prst="roundRect">
+            <a:avLst>
+              <a:gd name="adj" fmla="val 1893"/>
             </a:avLst>
           </a:prstGeom>
           <a:solidFill>
@@ -12712,7 +14396,7 @@
       </p:sp>
       <p:pic>
         <p:nvPicPr>
-          <p:cNvPr id="4" name="screenshot" descr="/tmp/claude-0/-home-user/11b98046-3116-585b-b221-e5c2e170e62a/scratchpad/deck/bshots/10_workflows.jpg">    </p:cNvPr>
+          <p:cNvPr id="8" name="screenshot" descr="/tmp/claude-0/-home-user/11b98046-3116-585b-b221-e5c2e170e62a/scratchpad/deck/bshots/10_workflows.jpg">    </p:cNvPr>
           <p:cNvPicPr>
             <a:picLocks noChangeAspect="1"/>
           </p:cNvPicPr>
@@ -12726,8 +14410,8 @@
         </p:blipFill>
         <p:spPr>
           <a:xfrm>
-            <a:off x="548640" y="1325880"/>
-            <a:ext cx="7315200" cy="4114800"/>
+            <a:off x="1188720" y="1874520"/>
+            <a:ext cx="6675120" cy="3754755"/>
           </a:xfrm>
           <a:prstGeom prst="rect">
             <a:avLst/>
@@ -12736,13 +14420,13 @@
       </p:pic>
       <p:sp>
         <p:nvSpPr>
-          <p:cNvPr id="5" name="num-1"/>
+          <p:cNvPr id="9" name="num-1"/>
           <p:cNvSpPr/>
           <p:nvPr/>
         </p:nvSpPr>
         <p:spPr>
           <a:xfrm>
-            <a:off x="11219688" y="1316736"/>
+            <a:off x="11219688" y="1865376"/>
             <a:ext cx="420624" cy="420624"/>
           </a:xfrm>
           <a:prstGeom prst="ellipse">
@@ -12761,13 +14445,13 @@
       </p:sp>
       <p:sp>
         <p:nvSpPr>
-          <p:cNvPr id="6" name="Text 3"/>
-          <p:cNvSpPr txBox="1"/>
-          <p:nvPr/>
-        </p:nvSpPr>
-        <p:spPr>
-          <a:xfrm>
-            <a:off x="11219688" y="1316736"/>
+          <p:cNvPr id="10" name="Text 7"/>
+          <p:cNvSpPr txBox="1"/>
+          <p:nvPr/>
+        </p:nvSpPr>
+        <p:spPr>
+          <a:xfrm>
+            <a:off x="11219688" y="1865376"/>
             <a:ext cx="420624" cy="420624"/>
           </a:xfrm>
           <a:prstGeom prst="rect">
@@ -12800,13 +14484,13 @@
       </p:sp>
       <p:sp>
         <p:nvSpPr>
-          <p:cNvPr id="7" name="Text 4"/>
-          <p:cNvSpPr txBox="1"/>
-          <p:nvPr/>
-        </p:nvSpPr>
-        <p:spPr>
-          <a:xfrm>
-            <a:off x="8183880" y="1298448"/>
+          <p:cNvPr id="11" name="Text 8"/>
+          <p:cNvSpPr txBox="1"/>
+          <p:nvPr/>
+        </p:nvSpPr>
+        <p:spPr>
+          <a:xfrm>
+            <a:off x="8183880" y="1847088"/>
             <a:ext cx="2889504" cy="384048"/>
           </a:xfrm>
           <a:prstGeom prst="rect">
@@ -12848,13 +14532,13 @@
       </p:sp>
       <p:sp>
         <p:nvSpPr>
-          <p:cNvPr id="8" name="Text 5"/>
-          <p:cNvSpPr txBox="1"/>
-          <p:nvPr/>
-        </p:nvSpPr>
-        <p:spPr>
-          <a:xfrm>
-            <a:off x="8183880" y="1682496"/>
+          <p:cNvPr id="12" name="Text 9"/>
+          <p:cNvSpPr txBox="1"/>
+          <p:nvPr/>
+        </p:nvSpPr>
+        <p:spPr>
+          <a:xfrm>
+            <a:off x="8183880" y="2231136"/>
             <a:ext cx="2889504" cy="758952"/>
           </a:xfrm>
           <a:prstGeom prst="rect">
@@ -12886,13 +14570,13 @@
       </p:sp>
       <p:sp>
         <p:nvSpPr>
-          <p:cNvPr id="9" name="num-2"/>
+          <p:cNvPr id="13" name="num-2"/>
           <p:cNvSpPr/>
           <p:nvPr/>
         </p:nvSpPr>
         <p:spPr>
           <a:xfrm>
-            <a:off x="11219688" y="2459736"/>
+            <a:off x="11219688" y="3008376"/>
             <a:ext cx="420624" cy="420624"/>
           </a:xfrm>
           <a:prstGeom prst="ellipse">
@@ -12911,13 +14595,13 @@
       </p:sp>
       <p:sp>
         <p:nvSpPr>
-          <p:cNvPr id="10" name="Text 7"/>
-          <p:cNvSpPr txBox="1"/>
-          <p:nvPr/>
-        </p:nvSpPr>
-        <p:spPr>
-          <a:xfrm>
-            <a:off x="11219688" y="2459736"/>
+          <p:cNvPr id="14" name="Text 11"/>
+          <p:cNvSpPr txBox="1"/>
+          <p:nvPr/>
+        </p:nvSpPr>
+        <p:spPr>
+          <a:xfrm>
+            <a:off x="11219688" y="3008376"/>
             <a:ext cx="420624" cy="420624"/>
           </a:xfrm>
           <a:prstGeom prst="rect">
@@ -12950,13 +14634,13 @@
       </p:sp>
       <p:sp>
         <p:nvSpPr>
-          <p:cNvPr id="11" name="Text 8"/>
-          <p:cNvSpPr txBox="1"/>
-          <p:nvPr/>
-        </p:nvSpPr>
-        <p:spPr>
-          <a:xfrm>
-            <a:off x="8183880" y="2441448"/>
+          <p:cNvPr id="15" name="Text 12"/>
+          <p:cNvSpPr txBox="1"/>
+          <p:nvPr/>
+        </p:nvSpPr>
+        <p:spPr>
+          <a:xfrm>
+            <a:off x="8183880" y="2990088"/>
             <a:ext cx="2889504" cy="384048"/>
           </a:xfrm>
           <a:prstGeom prst="rect">
@@ -12988,13 +14672,13 @@
       </p:sp>
       <p:sp>
         <p:nvSpPr>
-          <p:cNvPr id="12" name="Text 9"/>
-          <p:cNvSpPr txBox="1"/>
-          <p:nvPr/>
-        </p:nvSpPr>
-        <p:spPr>
-          <a:xfrm>
-            <a:off x="8183880" y="2825496"/>
+          <p:cNvPr id="16" name="Text 13"/>
+          <p:cNvSpPr txBox="1"/>
+          <p:nvPr/>
+        </p:nvSpPr>
+        <p:spPr>
+          <a:xfrm>
+            <a:off x="8183880" y="3374136"/>
             <a:ext cx="2889504" cy="758952"/>
           </a:xfrm>
           <a:prstGeom prst="rect">
@@ -13026,13 +14710,13 @@
       </p:sp>
       <p:sp>
         <p:nvSpPr>
-          <p:cNvPr id="13" name="num-3"/>
+          <p:cNvPr id="17" name="num-3"/>
           <p:cNvSpPr/>
           <p:nvPr/>
         </p:nvSpPr>
         <p:spPr>
           <a:xfrm>
-            <a:off x="11219688" y="3602736"/>
+            <a:off x="11219688" y="4151376"/>
             <a:ext cx="420624" cy="420624"/>
           </a:xfrm>
           <a:prstGeom prst="ellipse">
@@ -13051,13 +14735,13 @@
       </p:sp>
       <p:sp>
         <p:nvSpPr>
-          <p:cNvPr id="14" name="Text 11"/>
-          <p:cNvSpPr txBox="1"/>
-          <p:nvPr/>
-        </p:nvSpPr>
-        <p:spPr>
-          <a:xfrm>
-            <a:off x="11219688" y="3602736"/>
+          <p:cNvPr id="18" name="Text 15"/>
+          <p:cNvSpPr txBox="1"/>
+          <p:nvPr/>
+        </p:nvSpPr>
+        <p:spPr>
+          <a:xfrm>
+            <a:off x="11219688" y="4151376"/>
             <a:ext cx="420624" cy="420624"/>
           </a:xfrm>
           <a:prstGeom prst="rect">
@@ -13090,13 +14774,13 @@
       </p:sp>
       <p:sp>
         <p:nvSpPr>
-          <p:cNvPr id="15" name="Text 12"/>
-          <p:cNvSpPr txBox="1"/>
-          <p:nvPr/>
-        </p:nvSpPr>
-        <p:spPr>
-          <a:xfrm>
-            <a:off x="8183880" y="3584448"/>
+          <p:cNvPr id="19" name="Text 16"/>
+          <p:cNvSpPr txBox="1"/>
+          <p:nvPr/>
+        </p:nvSpPr>
+        <p:spPr>
+          <a:xfrm>
+            <a:off x="8183880" y="4133088"/>
             <a:ext cx="2889504" cy="384048"/>
           </a:xfrm>
           <a:prstGeom prst="rect">
@@ -13128,13 +14812,13 @@
       </p:sp>
       <p:sp>
         <p:nvSpPr>
-          <p:cNvPr id="16" name="Text 13"/>
-          <p:cNvSpPr txBox="1"/>
-          <p:nvPr/>
-        </p:nvSpPr>
-        <p:spPr>
-          <a:xfrm>
-            <a:off x="8183880" y="3968496"/>
+          <p:cNvPr id="20" name="Text 17"/>
+          <p:cNvSpPr txBox="1"/>
+          <p:nvPr/>
+        </p:nvSpPr>
+        <p:spPr>
+          <a:xfrm>
+            <a:off x="8183880" y="4517136"/>
             <a:ext cx="2889504" cy="758952"/>
           </a:xfrm>
           <a:prstGeom prst="rect">
@@ -13282,18 +14966,146 @@
       </p:sp>
       <p:sp>
         <p:nvSpPr>
-          <p:cNvPr id="3" name="screen-frame"/>
+          <p:cNvPr id="3" name="role-band"/>
           <p:cNvSpPr/>
           <p:nvPr/>
         </p:nvSpPr>
         <p:spPr>
           <a:xfrm>
-            <a:off x="493776" y="1271016"/>
-            <a:ext cx="7424928" cy="4224528"/>
+            <a:off x="548640" y="1161288"/>
+            <a:ext cx="11091672" cy="530352"/>
           </a:xfrm>
           <a:prstGeom prst="roundRect">
             <a:avLst>
-              <a:gd name="adj" fmla="val 1732"/>
+              <a:gd name="adj" fmla="val 13793"/>
+            </a:avLst>
+          </a:prstGeom>
+          <a:solidFill>
+            <a:srgbClr val="EAF2FA"/>
+          </a:solidFill>
+          <a:ln w="12700">
+            <a:solidFill>
+              <a:srgbClr val="EAF2FA"/>
+            </a:solidFill>
+            <a:prstDash val="solid"/>
+          </a:ln>
+        </p:spPr>
+      </p:sp>
+      <p:sp>
+        <p:nvSpPr>
+          <p:cNvPr id="4" name="Shape 2"/>
+          <p:cNvSpPr/>
+          <p:nvPr/>
+        </p:nvSpPr>
+        <p:spPr>
+          <a:xfrm>
+            <a:off x="11548872" y="1161288"/>
+            <a:ext cx="91440" cy="530352"/>
+          </a:xfrm>
+          <a:prstGeom prst="rect">
+            <a:avLst/>
+          </a:prstGeom>
+          <a:solidFill>
+            <a:srgbClr val="B8860B"/>
+          </a:solidFill>
+          <a:ln w="12700">
+            <a:solidFill>
+              <a:srgbClr val="B8860B"/>
+            </a:solidFill>
+            <a:prstDash val="solid"/>
+          </a:ln>
+        </p:spPr>
+      </p:sp>
+      <p:sp>
+        <p:nvSpPr>
+          <p:cNvPr id="5" name="Text 3"/>
+          <p:cNvSpPr txBox="1"/>
+          <p:nvPr/>
+        </p:nvSpPr>
+        <p:spPr>
+          <a:xfrm>
+            <a:off x="10515600" y="1161288"/>
+            <a:ext cx="914400" cy="530352"/>
+          </a:xfrm>
+          <a:prstGeom prst="rect">
+            <a:avLst/>
+          </a:prstGeom>
+          <a:noFill/>
+          <a:ln/>
+        </p:spPr>
+        <p:txBody>
+          <a:bodyPr wrap="square" lIns="0" tIns="0" rIns="0" bIns="0" rtlCol="0" anchor="ctr"/>
+          <a:lstStyle/>
+          <a:p>
+            <a:pPr rtl="1" algn="r" indent="0" marL="0">
+              <a:buNone/>
+            </a:pPr>
+            <a:r>
+              <a:rPr lang="ar-AE" altLang="en-US" sz="1500" b="1" dirty="0">
+                <a:solidFill>
+                  <a:srgbClr val="B8860B"/>
+                </a:solidFill>
+                <a:latin typeface="Noto Naskh Arabic"/>
+                <a:cs typeface="adwa-assalaf"/>
+              </a:rPr>
+              <a:t>دور الشاشة:</a:t>
+            </a:r>
+            <a:endParaRPr lang="ar-AE" sz="1500" dirty="0"/>
+          </a:p>
+        </p:txBody>
+      </p:sp>
+      <p:sp>
+        <p:nvSpPr>
+          <p:cNvPr id="6" name="Text 4"/>
+          <p:cNvSpPr txBox="1"/>
+          <p:nvPr/>
+        </p:nvSpPr>
+        <p:spPr>
+          <a:xfrm>
+            <a:off x="731520" y="1161288"/>
+            <a:ext cx="9857232" cy="530352"/>
+          </a:xfrm>
+          <a:prstGeom prst="rect">
+            <a:avLst/>
+          </a:prstGeom>
+          <a:noFill/>
+          <a:ln/>
+        </p:spPr>
+        <p:txBody>
+          <a:bodyPr wrap="square" lIns="0" tIns="0" rIns="0" bIns="0" rtlCol="0" anchor="ctr"/>
+          <a:lstStyle/>
+          <a:p>
+            <a:pPr rtl="1" algn="r" indent="0" marL="0">
+              <a:buNone/>
+            </a:pPr>
+            <a:r>
+              <a:rPr lang="ar-AE" altLang="en-US" sz="1500" dirty="0">
+                <a:solidFill>
+                  <a:srgbClr val="12263F"/>
+                </a:solidFill>
+                <a:latin typeface="Noto Naskh Arabic"/>
+                <a:cs typeface="adwa-assalaf"/>
+              </a:rPr>
+              <a:t>بوابة الذاكرة المؤسسية: لا يُحفظ درس ولا منهج إلا بإقراركم</a:t>
+            </a:r>
+            <a:endParaRPr lang="ar-AE" sz="1500" dirty="0"/>
+          </a:p>
+        </p:txBody>
+      </p:sp>
+      <p:sp>
+        <p:nvSpPr>
+          <p:cNvPr id="7" name="screen-frame"/>
+          <p:cNvSpPr/>
+          <p:nvPr/>
+        </p:nvSpPr>
+        <p:spPr>
+          <a:xfrm>
+            <a:off x="1133856" y="1819656"/>
+            <a:ext cx="6784848" cy="3864483"/>
+          </a:xfrm>
+          <a:prstGeom prst="roundRect">
+            <a:avLst>
+              <a:gd name="adj" fmla="val 1893"/>
             </a:avLst>
           </a:prstGeom>
           <a:solidFill>
@@ -13316,7 +15128,7 @@
       </p:sp>
       <p:pic>
         <p:nvPicPr>
-          <p:cNvPr id="4" name="screenshot" descr="/tmp/claude-0/-home-user/11b98046-3116-585b-b221-e5c2e170e62a/scratchpad/deck/bshots/11_governance.jpg">    </p:cNvPr>
+          <p:cNvPr id="8" name="screenshot" descr="/tmp/claude-0/-home-user/11b98046-3116-585b-b221-e5c2e170e62a/scratchpad/deck/bshots/11_governance.jpg">    </p:cNvPr>
           <p:cNvPicPr>
             <a:picLocks noChangeAspect="1"/>
           </p:cNvPicPr>
@@ -13330,8 +15142,8 @@
         </p:blipFill>
         <p:spPr>
           <a:xfrm>
-            <a:off x="548640" y="1325880"/>
-            <a:ext cx="7315200" cy="4114800"/>
+            <a:off x="1188720" y="1874520"/>
+            <a:ext cx="6675120" cy="3754755"/>
           </a:xfrm>
           <a:prstGeom prst="rect">
             <a:avLst/>
@@ -13340,13 +15152,13 @@
       </p:pic>
       <p:sp>
         <p:nvSpPr>
-          <p:cNvPr id="5" name="num-1"/>
+          <p:cNvPr id="9" name="num-1"/>
           <p:cNvSpPr/>
           <p:nvPr/>
         </p:nvSpPr>
         <p:spPr>
           <a:xfrm>
-            <a:off x="11219688" y="1316736"/>
+            <a:off x="11219688" y="1865376"/>
             <a:ext cx="420624" cy="420624"/>
           </a:xfrm>
           <a:prstGeom prst="ellipse">
@@ -13365,13 +15177,13 @@
       </p:sp>
       <p:sp>
         <p:nvSpPr>
-          <p:cNvPr id="6" name="Text 3"/>
-          <p:cNvSpPr txBox="1"/>
-          <p:nvPr/>
-        </p:nvSpPr>
-        <p:spPr>
-          <a:xfrm>
-            <a:off x="11219688" y="1316736"/>
+          <p:cNvPr id="10" name="Text 7"/>
+          <p:cNvSpPr txBox="1"/>
+          <p:nvPr/>
+        </p:nvSpPr>
+        <p:spPr>
+          <a:xfrm>
+            <a:off x="11219688" y="1865376"/>
             <a:ext cx="420624" cy="420624"/>
           </a:xfrm>
           <a:prstGeom prst="rect">
@@ -13404,13 +15216,13 @@
       </p:sp>
       <p:sp>
         <p:nvSpPr>
-          <p:cNvPr id="7" name="Text 4"/>
-          <p:cNvSpPr txBox="1"/>
-          <p:nvPr/>
-        </p:nvSpPr>
-        <p:spPr>
-          <a:xfrm>
-            <a:off x="8183880" y="1298448"/>
+          <p:cNvPr id="11" name="Text 8"/>
+          <p:cNvSpPr txBox="1"/>
+          <p:nvPr/>
+        </p:nvSpPr>
+        <p:spPr>
+          <a:xfrm>
+            <a:off x="8183880" y="1847088"/>
             <a:ext cx="2889504" cy="384048"/>
           </a:xfrm>
           <a:prstGeom prst="rect">
@@ -13442,13 +15254,13 @@
       </p:sp>
       <p:sp>
         <p:nvSpPr>
-          <p:cNvPr id="8" name="Text 5"/>
-          <p:cNvSpPr txBox="1"/>
-          <p:nvPr/>
-        </p:nvSpPr>
-        <p:spPr>
-          <a:xfrm>
-            <a:off x="8183880" y="1682496"/>
+          <p:cNvPr id="12" name="Text 9"/>
+          <p:cNvSpPr txBox="1"/>
+          <p:nvPr/>
+        </p:nvSpPr>
+        <p:spPr>
+          <a:xfrm>
+            <a:off x="8183880" y="2231136"/>
             <a:ext cx="2889504" cy="758952"/>
           </a:xfrm>
           <a:prstGeom prst="rect">
@@ -13480,13 +15292,13 @@
       </p:sp>
       <p:sp>
         <p:nvSpPr>
-          <p:cNvPr id="9" name="num-2"/>
+          <p:cNvPr id="13" name="num-2"/>
           <p:cNvSpPr/>
           <p:nvPr/>
         </p:nvSpPr>
         <p:spPr>
           <a:xfrm>
-            <a:off x="11219688" y="2459736"/>
+            <a:off x="11219688" y="3008376"/>
             <a:ext cx="420624" cy="420624"/>
           </a:xfrm>
           <a:prstGeom prst="ellipse">
@@ -13505,13 +15317,13 @@
       </p:sp>
       <p:sp>
         <p:nvSpPr>
-          <p:cNvPr id="10" name="Text 7"/>
-          <p:cNvSpPr txBox="1"/>
-          <p:nvPr/>
-        </p:nvSpPr>
-        <p:spPr>
-          <a:xfrm>
-            <a:off x="11219688" y="2459736"/>
+          <p:cNvPr id="14" name="Text 11"/>
+          <p:cNvSpPr txBox="1"/>
+          <p:nvPr/>
+        </p:nvSpPr>
+        <p:spPr>
+          <a:xfrm>
+            <a:off x="11219688" y="3008376"/>
             <a:ext cx="420624" cy="420624"/>
           </a:xfrm>
           <a:prstGeom prst="rect">
@@ -13544,13 +15356,13 @@
       </p:sp>
       <p:sp>
         <p:nvSpPr>
-          <p:cNvPr id="11" name="Text 8"/>
-          <p:cNvSpPr txBox="1"/>
-          <p:nvPr/>
-        </p:nvSpPr>
-        <p:spPr>
-          <a:xfrm>
-            <a:off x="8183880" y="2441448"/>
+          <p:cNvPr id="15" name="Text 12"/>
+          <p:cNvSpPr txBox="1"/>
+          <p:nvPr/>
+        </p:nvSpPr>
+        <p:spPr>
+          <a:xfrm>
+            <a:off x="8183880" y="2990088"/>
             <a:ext cx="2889504" cy="384048"/>
           </a:xfrm>
           <a:prstGeom prst="rect">
@@ -13582,13 +15394,13 @@
       </p:sp>
       <p:sp>
         <p:nvSpPr>
-          <p:cNvPr id="12" name="Text 9"/>
-          <p:cNvSpPr txBox="1"/>
-          <p:nvPr/>
-        </p:nvSpPr>
-        <p:spPr>
-          <a:xfrm>
-            <a:off x="8183880" y="2825496"/>
+          <p:cNvPr id="16" name="Text 13"/>
+          <p:cNvSpPr txBox="1"/>
+          <p:nvPr/>
+        </p:nvSpPr>
+        <p:spPr>
+          <a:xfrm>
+            <a:off x="8183880" y="3374136"/>
             <a:ext cx="2889504" cy="758952"/>
           </a:xfrm>
           <a:prstGeom prst="rect">
@@ -13640,13 +15452,13 @@
       </p:sp>
       <p:sp>
         <p:nvSpPr>
-          <p:cNvPr id="13" name="num-3"/>
+          <p:cNvPr id="17" name="num-3"/>
           <p:cNvSpPr/>
           <p:nvPr/>
         </p:nvSpPr>
         <p:spPr>
           <a:xfrm>
-            <a:off x="11219688" y="3602736"/>
+            <a:off x="11219688" y="4151376"/>
             <a:ext cx="420624" cy="420624"/>
           </a:xfrm>
           <a:prstGeom prst="ellipse">
@@ -13665,13 +15477,13 @@
       </p:sp>
       <p:sp>
         <p:nvSpPr>
-          <p:cNvPr id="14" name="Text 11"/>
-          <p:cNvSpPr txBox="1"/>
-          <p:nvPr/>
-        </p:nvSpPr>
-        <p:spPr>
-          <a:xfrm>
-            <a:off x="11219688" y="3602736"/>
+          <p:cNvPr id="18" name="Text 15"/>
+          <p:cNvSpPr txBox="1"/>
+          <p:nvPr/>
+        </p:nvSpPr>
+        <p:spPr>
+          <a:xfrm>
+            <a:off x="11219688" y="4151376"/>
             <a:ext cx="420624" cy="420624"/>
           </a:xfrm>
           <a:prstGeom prst="rect">
@@ -13704,13 +15516,13 @@
       </p:sp>
       <p:sp>
         <p:nvSpPr>
-          <p:cNvPr id="15" name="Text 12"/>
-          <p:cNvSpPr txBox="1"/>
-          <p:nvPr/>
-        </p:nvSpPr>
-        <p:spPr>
-          <a:xfrm>
-            <a:off x="8183880" y="3584448"/>
+          <p:cNvPr id="19" name="Text 16"/>
+          <p:cNvSpPr txBox="1"/>
+          <p:nvPr/>
+        </p:nvSpPr>
+        <p:spPr>
+          <a:xfrm>
+            <a:off x="8183880" y="4133088"/>
             <a:ext cx="2889504" cy="384048"/>
           </a:xfrm>
           <a:prstGeom prst="rect">
@@ -13742,13 +15554,13 @@
       </p:sp>
       <p:sp>
         <p:nvSpPr>
-          <p:cNvPr id="16" name="Text 13"/>
-          <p:cNvSpPr txBox="1"/>
-          <p:nvPr/>
-        </p:nvSpPr>
-        <p:spPr>
-          <a:xfrm>
-            <a:off x="8183880" y="3968496"/>
+          <p:cNvPr id="20" name="Text 17"/>
+          <p:cNvSpPr txBox="1"/>
+          <p:nvPr/>
+        </p:nvSpPr>
+        <p:spPr>
+          <a:xfrm>
+            <a:off x="8183880" y="4517136"/>
             <a:ext cx="2889504" cy="758952"/>
           </a:xfrm>
           <a:prstGeom prst="rect">
@@ -13896,18 +15708,146 @@
       </p:sp>
       <p:sp>
         <p:nvSpPr>
-          <p:cNvPr id="3" name="screen-frame"/>
+          <p:cNvPr id="3" name="role-band"/>
           <p:cNvSpPr/>
           <p:nvPr/>
         </p:nvSpPr>
         <p:spPr>
           <a:xfrm>
-            <a:off x="493776" y="1271016"/>
-            <a:ext cx="7424928" cy="4224528"/>
+            <a:off x="548640" y="1161288"/>
+            <a:ext cx="11091672" cy="530352"/>
           </a:xfrm>
           <a:prstGeom prst="roundRect">
             <a:avLst>
-              <a:gd name="adj" fmla="val 1732"/>
+              <a:gd name="adj" fmla="val 13793"/>
+            </a:avLst>
+          </a:prstGeom>
+          <a:solidFill>
+            <a:srgbClr val="EAF2FA"/>
+          </a:solidFill>
+          <a:ln w="12700">
+            <a:solidFill>
+              <a:srgbClr val="EAF2FA"/>
+            </a:solidFill>
+            <a:prstDash val="solid"/>
+          </a:ln>
+        </p:spPr>
+      </p:sp>
+      <p:sp>
+        <p:nvSpPr>
+          <p:cNvPr id="4" name="Shape 2"/>
+          <p:cNvSpPr/>
+          <p:nvPr/>
+        </p:nvSpPr>
+        <p:spPr>
+          <a:xfrm>
+            <a:off x="11548872" y="1161288"/>
+            <a:ext cx="91440" cy="530352"/>
+          </a:xfrm>
+          <a:prstGeom prst="rect">
+            <a:avLst/>
+          </a:prstGeom>
+          <a:solidFill>
+            <a:srgbClr val="B8860B"/>
+          </a:solidFill>
+          <a:ln w="12700">
+            <a:solidFill>
+              <a:srgbClr val="B8860B"/>
+            </a:solidFill>
+            <a:prstDash val="solid"/>
+          </a:ln>
+        </p:spPr>
+      </p:sp>
+      <p:sp>
+        <p:nvSpPr>
+          <p:cNvPr id="5" name="Text 3"/>
+          <p:cNvSpPr txBox="1"/>
+          <p:nvPr/>
+        </p:nvSpPr>
+        <p:spPr>
+          <a:xfrm>
+            <a:off x="10515600" y="1161288"/>
+            <a:ext cx="914400" cy="530352"/>
+          </a:xfrm>
+          <a:prstGeom prst="rect">
+            <a:avLst/>
+          </a:prstGeom>
+          <a:noFill/>
+          <a:ln/>
+        </p:spPr>
+        <p:txBody>
+          <a:bodyPr wrap="square" lIns="0" tIns="0" rIns="0" bIns="0" rtlCol="0" anchor="ctr"/>
+          <a:lstStyle/>
+          <a:p>
+            <a:pPr rtl="1" algn="r" indent="0" marL="0">
+              <a:buNone/>
+            </a:pPr>
+            <a:r>
+              <a:rPr lang="ar-AE" altLang="en-US" sz="1500" b="1" dirty="0">
+                <a:solidFill>
+                  <a:srgbClr val="B8860B"/>
+                </a:solidFill>
+                <a:latin typeface="Noto Naskh Arabic"/>
+                <a:cs typeface="adwa-assalaf"/>
+              </a:rPr>
+              <a:t>دور الشاشة:</a:t>
+            </a:r>
+            <a:endParaRPr lang="ar-AE" sz="1500" dirty="0"/>
+          </a:p>
+        </p:txBody>
+      </p:sp>
+      <p:sp>
+        <p:nvSpPr>
+          <p:cNvPr id="6" name="Text 4"/>
+          <p:cNvSpPr txBox="1"/>
+          <p:nvPr/>
+        </p:nvSpPr>
+        <p:spPr>
+          <a:xfrm>
+            <a:off x="731520" y="1161288"/>
+            <a:ext cx="9857232" cy="530352"/>
+          </a:xfrm>
+          <a:prstGeom prst="rect">
+            <a:avLst/>
+          </a:prstGeom>
+          <a:noFill/>
+          <a:ln/>
+        </p:spPr>
+        <p:txBody>
+          <a:bodyPr wrap="square" lIns="0" tIns="0" rIns="0" bIns="0" rtlCol="0" anchor="ctr"/>
+          <a:lstStyle/>
+          <a:p>
+            <a:pPr rtl="1" algn="r" indent="0" marL="0">
+              <a:buNone/>
+            </a:pPr>
+            <a:r>
+              <a:rPr lang="ar-AE" altLang="en-US" sz="1500" dirty="0">
+                <a:solidFill>
+                  <a:srgbClr val="12263F"/>
+                </a:solidFill>
+                <a:latin typeface="Noto Naskh Arabic"/>
+                <a:cs typeface="adwa-assalaf"/>
+              </a:rPr>
+              <a:t>الأصول الأصلية محفوظة للقراءة فقط ببصمتها، ويُكشف أي عبث بها</a:t>
+            </a:r>
+            <a:endParaRPr lang="ar-AE" sz="1500" dirty="0"/>
+          </a:p>
+        </p:txBody>
+      </p:sp>
+      <p:sp>
+        <p:nvSpPr>
+          <p:cNvPr id="7" name="screen-frame"/>
+          <p:cNvSpPr/>
+          <p:nvPr/>
+        </p:nvSpPr>
+        <p:spPr>
+          <a:xfrm>
+            <a:off x="1133856" y="1819656"/>
+            <a:ext cx="6784848" cy="3864483"/>
+          </a:xfrm>
+          <a:prstGeom prst="roundRect">
+            <a:avLst>
+              <a:gd name="adj" fmla="val 1893"/>
             </a:avLst>
           </a:prstGeom>
           <a:solidFill>
@@ -13930,7 +15870,7 @@
       </p:sp>
       <p:pic>
         <p:nvPicPr>
-          <p:cNvPr id="4" name="screenshot" descr="/tmp/claude-0/-home-user/11b98046-3116-585b-b221-e5c2e170e62a/scratchpad/deck/bshots/12_vault.jpg">    </p:cNvPr>
+          <p:cNvPr id="8" name="screenshot" descr="/tmp/claude-0/-home-user/11b98046-3116-585b-b221-e5c2e170e62a/scratchpad/deck/bshots/12_vault.jpg">    </p:cNvPr>
           <p:cNvPicPr>
             <a:picLocks noChangeAspect="1"/>
           </p:cNvPicPr>
@@ -13944,8 +15884,8 @@
         </p:blipFill>
         <p:spPr>
           <a:xfrm>
-            <a:off x="548640" y="1325880"/>
-            <a:ext cx="7315200" cy="4114800"/>
+            <a:off x="1188720" y="1874520"/>
+            <a:ext cx="6675120" cy="3754755"/>
           </a:xfrm>
           <a:prstGeom prst="rect">
             <a:avLst/>
@@ -13954,13 +15894,13 @@
       </p:pic>
       <p:sp>
         <p:nvSpPr>
-          <p:cNvPr id="5" name="num-1"/>
+          <p:cNvPr id="9" name="num-1"/>
           <p:cNvSpPr/>
           <p:nvPr/>
         </p:nvSpPr>
         <p:spPr>
           <a:xfrm>
-            <a:off x="11219688" y="1316736"/>
+            <a:off x="11219688" y="1865376"/>
             <a:ext cx="420624" cy="420624"/>
           </a:xfrm>
           <a:prstGeom prst="ellipse">
@@ -13979,13 +15919,13 @@
       </p:sp>
       <p:sp>
         <p:nvSpPr>
-          <p:cNvPr id="6" name="Text 3"/>
-          <p:cNvSpPr txBox="1"/>
-          <p:nvPr/>
-        </p:nvSpPr>
-        <p:spPr>
-          <a:xfrm>
-            <a:off x="11219688" y="1316736"/>
+          <p:cNvPr id="10" name="Text 7"/>
+          <p:cNvSpPr txBox="1"/>
+          <p:nvPr/>
+        </p:nvSpPr>
+        <p:spPr>
+          <a:xfrm>
+            <a:off x="11219688" y="1865376"/>
             <a:ext cx="420624" cy="420624"/>
           </a:xfrm>
           <a:prstGeom prst="rect">
@@ -14018,13 +15958,13 @@
       </p:sp>
       <p:sp>
         <p:nvSpPr>
-          <p:cNvPr id="7" name="Text 4"/>
-          <p:cNvSpPr txBox="1"/>
-          <p:nvPr/>
-        </p:nvSpPr>
-        <p:spPr>
-          <a:xfrm>
-            <a:off x="8183880" y="1298448"/>
+          <p:cNvPr id="11" name="Text 8"/>
+          <p:cNvSpPr txBox="1"/>
+          <p:nvPr/>
+        </p:nvSpPr>
+        <p:spPr>
+          <a:xfrm>
+            <a:off x="8183880" y="1847088"/>
             <a:ext cx="2889504" cy="384048"/>
           </a:xfrm>
           <a:prstGeom prst="rect">
@@ -14056,13 +15996,13 @@
       </p:sp>
       <p:sp>
         <p:nvSpPr>
-          <p:cNvPr id="8" name="Text 5"/>
-          <p:cNvSpPr txBox="1"/>
-          <p:nvPr/>
-        </p:nvSpPr>
-        <p:spPr>
-          <a:xfrm>
-            <a:off x="8183880" y="1682496"/>
+          <p:cNvPr id="12" name="Text 9"/>
+          <p:cNvSpPr txBox="1"/>
+          <p:nvPr/>
+        </p:nvSpPr>
+        <p:spPr>
+          <a:xfrm>
+            <a:off x="8183880" y="2231136"/>
             <a:ext cx="2889504" cy="758952"/>
           </a:xfrm>
           <a:prstGeom prst="rect">
@@ -14114,13 +16054,13 @@
       </p:sp>
       <p:sp>
         <p:nvSpPr>
-          <p:cNvPr id="9" name="num-2"/>
+          <p:cNvPr id="13" name="num-2"/>
           <p:cNvSpPr/>
           <p:nvPr/>
         </p:nvSpPr>
         <p:spPr>
           <a:xfrm>
-            <a:off x="11219688" y="2459736"/>
+            <a:off x="11219688" y="3008376"/>
             <a:ext cx="420624" cy="420624"/>
           </a:xfrm>
           <a:prstGeom prst="ellipse">
@@ -14139,13 +16079,13 @@
       </p:sp>
       <p:sp>
         <p:nvSpPr>
-          <p:cNvPr id="10" name="Text 7"/>
-          <p:cNvSpPr txBox="1"/>
-          <p:nvPr/>
-        </p:nvSpPr>
-        <p:spPr>
-          <a:xfrm>
-            <a:off x="11219688" y="2459736"/>
+          <p:cNvPr id="14" name="Text 11"/>
+          <p:cNvSpPr txBox="1"/>
+          <p:nvPr/>
+        </p:nvSpPr>
+        <p:spPr>
+          <a:xfrm>
+            <a:off x="11219688" y="3008376"/>
             <a:ext cx="420624" cy="420624"/>
           </a:xfrm>
           <a:prstGeom prst="rect">
@@ -14178,13 +16118,13 @@
       </p:sp>
       <p:sp>
         <p:nvSpPr>
-          <p:cNvPr id="11" name="Text 8"/>
-          <p:cNvSpPr txBox="1"/>
-          <p:nvPr/>
-        </p:nvSpPr>
-        <p:spPr>
-          <a:xfrm>
-            <a:off x="8183880" y="2441448"/>
+          <p:cNvPr id="15" name="Text 12"/>
+          <p:cNvSpPr txBox="1"/>
+          <p:nvPr/>
+        </p:nvSpPr>
+        <p:spPr>
+          <a:xfrm>
+            <a:off x="8183880" y="2990088"/>
             <a:ext cx="2889504" cy="384048"/>
           </a:xfrm>
           <a:prstGeom prst="rect">
@@ -14216,13 +16156,13 @@
       </p:sp>
       <p:sp>
         <p:nvSpPr>
-          <p:cNvPr id="12" name="Text 9"/>
-          <p:cNvSpPr txBox="1"/>
-          <p:nvPr/>
-        </p:nvSpPr>
-        <p:spPr>
-          <a:xfrm>
-            <a:off x="8183880" y="2825496"/>
+          <p:cNvPr id="16" name="Text 13"/>
+          <p:cNvSpPr txBox="1"/>
+          <p:nvPr/>
+        </p:nvSpPr>
+        <p:spPr>
+          <a:xfrm>
+            <a:off x="8183880" y="3374136"/>
             <a:ext cx="2889504" cy="758952"/>
           </a:xfrm>
           <a:prstGeom prst="rect">
@@ -14254,13 +16194,13 @@
       </p:sp>
       <p:sp>
         <p:nvSpPr>
-          <p:cNvPr id="13" name="num-3"/>
+          <p:cNvPr id="17" name="num-3"/>
           <p:cNvSpPr/>
           <p:nvPr/>
         </p:nvSpPr>
         <p:spPr>
           <a:xfrm>
-            <a:off x="11219688" y="3602736"/>
+            <a:off x="11219688" y="4151376"/>
             <a:ext cx="420624" cy="420624"/>
           </a:xfrm>
           <a:prstGeom prst="ellipse">
@@ -14279,13 +16219,13 @@
       </p:sp>
       <p:sp>
         <p:nvSpPr>
-          <p:cNvPr id="14" name="Text 11"/>
-          <p:cNvSpPr txBox="1"/>
-          <p:nvPr/>
-        </p:nvSpPr>
-        <p:spPr>
-          <a:xfrm>
-            <a:off x="11219688" y="3602736"/>
+          <p:cNvPr id="18" name="Text 15"/>
+          <p:cNvSpPr txBox="1"/>
+          <p:nvPr/>
+        </p:nvSpPr>
+        <p:spPr>
+          <a:xfrm>
+            <a:off x="11219688" y="4151376"/>
             <a:ext cx="420624" cy="420624"/>
           </a:xfrm>
           <a:prstGeom prst="rect">
@@ -14318,13 +16258,13 @@
       </p:sp>
       <p:sp>
         <p:nvSpPr>
-          <p:cNvPr id="15" name="Text 12"/>
-          <p:cNvSpPr txBox="1"/>
-          <p:nvPr/>
-        </p:nvSpPr>
-        <p:spPr>
-          <a:xfrm>
-            <a:off x="8183880" y="3584448"/>
+          <p:cNvPr id="19" name="Text 16"/>
+          <p:cNvSpPr txBox="1"/>
+          <p:nvPr/>
+        </p:nvSpPr>
+        <p:spPr>
+          <a:xfrm>
+            <a:off x="8183880" y="4133088"/>
             <a:ext cx="2889504" cy="384048"/>
           </a:xfrm>
           <a:prstGeom prst="rect">
@@ -14356,13 +16296,13 @@
       </p:sp>
       <p:sp>
         <p:nvSpPr>
-          <p:cNvPr id="16" name="Text 13"/>
-          <p:cNvSpPr txBox="1"/>
-          <p:nvPr/>
-        </p:nvSpPr>
-        <p:spPr>
-          <a:xfrm>
-            <a:off x="8183880" y="3968496"/>
+          <p:cNvPr id="20" name="Text 17"/>
+          <p:cNvSpPr txBox="1"/>
+          <p:nvPr/>
+        </p:nvSpPr>
+        <p:spPr>
+          <a:xfrm>
+            <a:off x="8183880" y="4517136"/>
             <a:ext cx="2889504" cy="758952"/>
           </a:xfrm>
           <a:prstGeom prst="rect">
@@ -14414,13 +16354,13 @@
       </p:sp>
       <p:sp>
         <p:nvSpPr>
-          <p:cNvPr id="17" name="Text 14"/>
-          <p:cNvSpPr txBox="1"/>
-          <p:nvPr/>
-        </p:nvSpPr>
-        <p:spPr>
-          <a:xfrm>
-            <a:off x="548640" y="5596128"/>
+          <p:cNvPr id="21" name="Text 18"/>
+          <p:cNvSpPr txBox="1"/>
+          <p:nvPr/>
+        </p:nvSpPr>
+        <p:spPr>
+          <a:xfrm>
+            <a:off x="548640" y="5766435"/>
             <a:ext cx="7315200" cy="365760"/>
           </a:xfrm>
           <a:prstGeom prst="rect">
@@ -14568,18 +16508,166 @@
       </p:sp>
       <p:sp>
         <p:nvSpPr>
-          <p:cNvPr id="3" name="screen-frame"/>
+          <p:cNvPr id="3" name="role-band"/>
           <p:cNvSpPr/>
           <p:nvPr/>
         </p:nvSpPr>
         <p:spPr>
           <a:xfrm>
-            <a:off x="493776" y="1271016"/>
-            <a:ext cx="7424928" cy="4224528"/>
+            <a:off x="548640" y="1161288"/>
+            <a:ext cx="11091672" cy="530352"/>
           </a:xfrm>
           <a:prstGeom prst="roundRect">
             <a:avLst>
-              <a:gd name="adj" fmla="val 1732"/>
+              <a:gd name="adj" fmla="val 13793"/>
+            </a:avLst>
+          </a:prstGeom>
+          <a:solidFill>
+            <a:srgbClr val="EAF2FA"/>
+          </a:solidFill>
+          <a:ln w="12700">
+            <a:solidFill>
+              <a:srgbClr val="EAF2FA"/>
+            </a:solidFill>
+            <a:prstDash val="solid"/>
+          </a:ln>
+        </p:spPr>
+      </p:sp>
+      <p:sp>
+        <p:nvSpPr>
+          <p:cNvPr id="4" name="Shape 2"/>
+          <p:cNvSpPr/>
+          <p:nvPr/>
+        </p:nvSpPr>
+        <p:spPr>
+          <a:xfrm>
+            <a:off x="11548872" y="1161288"/>
+            <a:ext cx="91440" cy="530352"/>
+          </a:xfrm>
+          <a:prstGeom prst="rect">
+            <a:avLst/>
+          </a:prstGeom>
+          <a:solidFill>
+            <a:srgbClr val="B8860B"/>
+          </a:solidFill>
+          <a:ln w="12700">
+            <a:solidFill>
+              <a:srgbClr val="B8860B"/>
+            </a:solidFill>
+            <a:prstDash val="solid"/>
+          </a:ln>
+        </p:spPr>
+      </p:sp>
+      <p:sp>
+        <p:nvSpPr>
+          <p:cNvPr id="5" name="Text 3"/>
+          <p:cNvSpPr txBox="1"/>
+          <p:nvPr/>
+        </p:nvSpPr>
+        <p:spPr>
+          <a:xfrm>
+            <a:off x="10515600" y="1161288"/>
+            <a:ext cx="914400" cy="530352"/>
+          </a:xfrm>
+          <a:prstGeom prst="rect">
+            <a:avLst/>
+          </a:prstGeom>
+          <a:noFill/>
+          <a:ln/>
+        </p:spPr>
+        <p:txBody>
+          <a:bodyPr wrap="square" lIns="0" tIns="0" rIns="0" bIns="0" rtlCol="0" anchor="ctr"/>
+          <a:lstStyle/>
+          <a:p>
+            <a:pPr rtl="1" algn="r" indent="0" marL="0">
+              <a:buNone/>
+            </a:pPr>
+            <a:r>
+              <a:rPr lang="ar-AE" altLang="en-US" sz="1500" b="1" dirty="0">
+                <a:solidFill>
+                  <a:srgbClr val="B8860B"/>
+                </a:solidFill>
+                <a:latin typeface="Noto Naskh Arabic"/>
+                <a:cs typeface="adwa-assalaf"/>
+              </a:rPr>
+              <a:t>دور الشاشة:</a:t>
+            </a:r>
+            <a:endParaRPr lang="ar-AE" sz="1500" dirty="0"/>
+          </a:p>
+        </p:txBody>
+      </p:sp>
+      <p:sp>
+        <p:nvSpPr>
+          <p:cNvPr id="6" name="Text 4"/>
+          <p:cNvSpPr txBox="1"/>
+          <p:nvPr/>
+        </p:nvSpPr>
+        <p:spPr>
+          <a:xfrm>
+            <a:off x="731520" y="1161288"/>
+            <a:ext cx="9857232" cy="530352"/>
+          </a:xfrm>
+          <a:prstGeom prst="rect">
+            <a:avLst/>
+          </a:prstGeom>
+          <a:noFill/>
+          <a:ln/>
+        </p:spPr>
+        <p:txBody>
+          <a:bodyPr wrap="square" lIns="0" tIns="0" rIns="0" bIns="0" rtlCol="0" anchor="ctr"/>
+          <a:lstStyle/>
+          <a:p>
+            <a:pPr rtl="1" algn="r" indent="0" marL="0">
+              <a:buNone/>
+            </a:pPr>
+            <a:r>
+              <a:rPr lang="ar-AE" altLang="en-US" sz="1500" dirty="0">
+                <a:solidFill>
+                  <a:srgbClr val="12263F"/>
+                </a:solidFill>
+                <a:latin typeface="Noto Naskh Arabic"/>
+                <a:cs typeface="adwa-assalaf"/>
+              </a:rPr>
+              <a:t>مختبر التحقق: فحص النص قبل اعتماده، والتحقق من </a:t>
+            </a:r>
+            <a:r>
+              <a:rPr lang="ar-AE" altLang="en-US" sz="1500" dirty="0">
+                <a:solidFill>
+                  <a:srgbClr val="12263F"/>
+                </a:solidFill>
+                <a:latin typeface="Calibri"/>
+                <a:cs typeface="Calibri"/>
+              </a:rPr>
+              <a:t>DOI</a:t>
+            </a:r>
+            <a:r>
+              <a:rPr lang="ar-AE" altLang="en-US" sz="1500" dirty="0">
+                <a:solidFill>
+                  <a:srgbClr val="12263F"/>
+                </a:solidFill>
+                <a:latin typeface="Noto Naskh Arabic"/>
+                <a:cs typeface="adwa-assalaf"/>
+              </a:rPr>
+              <a:t>، وسلامة المنظومة</a:t>
+            </a:r>
+            <a:endParaRPr lang="ar-AE" sz="1500" dirty="0"/>
+          </a:p>
+        </p:txBody>
+      </p:sp>
+      <p:sp>
+        <p:nvSpPr>
+          <p:cNvPr id="7" name="screen-frame"/>
+          <p:cNvSpPr/>
+          <p:nvPr/>
+        </p:nvSpPr>
+        <p:spPr>
+          <a:xfrm>
+            <a:off x="1133856" y="1819656"/>
+            <a:ext cx="6784848" cy="3864483"/>
+          </a:xfrm>
+          <a:prstGeom prst="roundRect">
+            <a:avLst>
+              <a:gd name="adj" fmla="val 1893"/>
             </a:avLst>
           </a:prstGeom>
           <a:solidFill>
@@ -14602,7 +16690,7 @@
       </p:sp>
       <p:pic>
         <p:nvPicPr>
-          <p:cNvPr id="4" name="screenshot" descr="/tmp/claude-0/-home-user/11b98046-3116-585b-b221-e5c2e170e62a/scratchpad/deck/bshots/13b_check.jpg">    </p:cNvPr>
+          <p:cNvPr id="8" name="screenshot" descr="/tmp/claude-0/-home-user/11b98046-3116-585b-b221-e5c2e170e62a/scratchpad/deck/bshots/13b_check.jpg">    </p:cNvPr>
           <p:cNvPicPr>
             <a:picLocks noChangeAspect="1"/>
           </p:cNvPicPr>
@@ -14616,8 +16704,8 @@
         </p:blipFill>
         <p:spPr>
           <a:xfrm>
-            <a:off x="548640" y="1325880"/>
-            <a:ext cx="7315200" cy="4114800"/>
+            <a:off x="1188720" y="1874520"/>
+            <a:ext cx="6675120" cy="3754755"/>
           </a:xfrm>
           <a:prstGeom prst="rect">
             <a:avLst/>
@@ -14626,13 +16714,13 @@
       </p:pic>
       <p:sp>
         <p:nvSpPr>
-          <p:cNvPr id="5" name="num-1"/>
+          <p:cNvPr id="9" name="num-1"/>
           <p:cNvSpPr/>
           <p:nvPr/>
         </p:nvSpPr>
         <p:spPr>
           <a:xfrm>
-            <a:off x="11219688" y="1316736"/>
+            <a:off x="11219688" y="1865376"/>
             <a:ext cx="420624" cy="420624"/>
           </a:xfrm>
           <a:prstGeom prst="ellipse">
@@ -14651,13 +16739,13 @@
       </p:sp>
       <p:sp>
         <p:nvSpPr>
-          <p:cNvPr id="6" name="Text 3"/>
-          <p:cNvSpPr txBox="1"/>
-          <p:nvPr/>
-        </p:nvSpPr>
-        <p:spPr>
-          <a:xfrm>
-            <a:off x="11219688" y="1316736"/>
+          <p:cNvPr id="10" name="Text 7"/>
+          <p:cNvSpPr txBox="1"/>
+          <p:nvPr/>
+        </p:nvSpPr>
+        <p:spPr>
+          <a:xfrm>
+            <a:off x="11219688" y="1865376"/>
             <a:ext cx="420624" cy="420624"/>
           </a:xfrm>
           <a:prstGeom prst="rect">
@@ -14690,13 +16778,13 @@
       </p:sp>
       <p:sp>
         <p:nvSpPr>
-          <p:cNvPr id="7" name="Text 4"/>
-          <p:cNvSpPr txBox="1"/>
-          <p:nvPr/>
-        </p:nvSpPr>
-        <p:spPr>
-          <a:xfrm>
-            <a:off x="8183880" y="1298448"/>
+          <p:cNvPr id="11" name="Text 8"/>
+          <p:cNvSpPr txBox="1"/>
+          <p:nvPr/>
+        </p:nvSpPr>
+        <p:spPr>
+          <a:xfrm>
+            <a:off x="8183880" y="1847088"/>
             <a:ext cx="2889504" cy="384048"/>
           </a:xfrm>
           <a:prstGeom prst="rect">
@@ -14728,13 +16816,13 @@
       </p:sp>
       <p:sp>
         <p:nvSpPr>
-          <p:cNvPr id="8" name="Text 5"/>
-          <p:cNvSpPr txBox="1"/>
-          <p:nvPr/>
-        </p:nvSpPr>
-        <p:spPr>
-          <a:xfrm>
-            <a:off x="8183880" y="1682496"/>
+          <p:cNvPr id="12" name="Text 9"/>
+          <p:cNvSpPr txBox="1"/>
+          <p:nvPr/>
+        </p:nvSpPr>
+        <p:spPr>
+          <a:xfrm>
+            <a:off x="8183880" y="2231136"/>
             <a:ext cx="2889504" cy="758952"/>
           </a:xfrm>
           <a:prstGeom prst="rect">
@@ -14786,13 +16874,13 @@
       </p:sp>
       <p:sp>
         <p:nvSpPr>
-          <p:cNvPr id="9" name="num-2"/>
+          <p:cNvPr id="13" name="num-2"/>
           <p:cNvSpPr/>
           <p:nvPr/>
         </p:nvSpPr>
         <p:spPr>
           <a:xfrm>
-            <a:off x="11219688" y="2459736"/>
+            <a:off x="11219688" y="3008376"/>
             <a:ext cx="420624" cy="420624"/>
           </a:xfrm>
           <a:prstGeom prst="ellipse">
@@ -14811,13 +16899,13 @@
       </p:sp>
       <p:sp>
         <p:nvSpPr>
-          <p:cNvPr id="10" name="Text 7"/>
-          <p:cNvSpPr txBox="1"/>
-          <p:nvPr/>
-        </p:nvSpPr>
-        <p:spPr>
-          <a:xfrm>
-            <a:off x="11219688" y="2459736"/>
+          <p:cNvPr id="14" name="Text 11"/>
+          <p:cNvSpPr txBox="1"/>
+          <p:nvPr/>
+        </p:nvSpPr>
+        <p:spPr>
+          <a:xfrm>
+            <a:off x="11219688" y="3008376"/>
             <a:ext cx="420624" cy="420624"/>
           </a:xfrm>
           <a:prstGeom prst="rect">
@@ -14850,13 +16938,13 @@
       </p:sp>
       <p:sp>
         <p:nvSpPr>
-          <p:cNvPr id="11" name="Text 8"/>
-          <p:cNvSpPr txBox="1"/>
-          <p:nvPr/>
-        </p:nvSpPr>
-        <p:spPr>
-          <a:xfrm>
-            <a:off x="8183880" y="2441448"/>
+          <p:cNvPr id="15" name="Text 12"/>
+          <p:cNvSpPr txBox="1"/>
+          <p:nvPr/>
+        </p:nvSpPr>
+        <p:spPr>
+          <a:xfrm>
+            <a:off x="8183880" y="2990088"/>
             <a:ext cx="2889504" cy="384048"/>
           </a:xfrm>
           <a:prstGeom prst="rect">
@@ -14898,13 +16986,13 @@
       </p:sp>
       <p:sp>
         <p:nvSpPr>
-          <p:cNvPr id="12" name="Text 9"/>
-          <p:cNvSpPr txBox="1"/>
-          <p:nvPr/>
-        </p:nvSpPr>
-        <p:spPr>
-          <a:xfrm>
-            <a:off x="8183880" y="2825496"/>
+          <p:cNvPr id="16" name="Text 13"/>
+          <p:cNvSpPr txBox="1"/>
+          <p:nvPr/>
+        </p:nvSpPr>
+        <p:spPr>
+          <a:xfrm>
+            <a:off x="8183880" y="3374136"/>
             <a:ext cx="2889504" cy="758952"/>
           </a:xfrm>
           <a:prstGeom prst="rect">
@@ -14936,13 +17024,13 @@
       </p:sp>
       <p:sp>
         <p:nvSpPr>
-          <p:cNvPr id="13" name="num-3"/>
+          <p:cNvPr id="17" name="num-3"/>
           <p:cNvSpPr/>
           <p:nvPr/>
         </p:nvSpPr>
         <p:spPr>
           <a:xfrm>
-            <a:off x="11219688" y="3602736"/>
+            <a:off x="11219688" y="4151376"/>
             <a:ext cx="420624" cy="420624"/>
           </a:xfrm>
           <a:prstGeom prst="ellipse">
@@ -14961,13 +17049,13 @@
       </p:sp>
       <p:sp>
         <p:nvSpPr>
-          <p:cNvPr id="14" name="Text 11"/>
-          <p:cNvSpPr txBox="1"/>
-          <p:nvPr/>
-        </p:nvSpPr>
-        <p:spPr>
-          <a:xfrm>
-            <a:off x="11219688" y="3602736"/>
+          <p:cNvPr id="18" name="Text 15"/>
+          <p:cNvSpPr txBox="1"/>
+          <p:nvPr/>
+        </p:nvSpPr>
+        <p:spPr>
+          <a:xfrm>
+            <a:off x="11219688" y="4151376"/>
             <a:ext cx="420624" cy="420624"/>
           </a:xfrm>
           <a:prstGeom prst="rect">
@@ -15000,13 +17088,13 @@
       </p:sp>
       <p:sp>
         <p:nvSpPr>
-          <p:cNvPr id="15" name="Text 12"/>
-          <p:cNvSpPr txBox="1"/>
-          <p:nvPr/>
-        </p:nvSpPr>
-        <p:spPr>
-          <a:xfrm>
-            <a:off x="8183880" y="3584448"/>
+          <p:cNvPr id="19" name="Text 16"/>
+          <p:cNvSpPr txBox="1"/>
+          <p:nvPr/>
+        </p:nvSpPr>
+        <p:spPr>
+          <a:xfrm>
+            <a:off x="8183880" y="4133088"/>
             <a:ext cx="2889504" cy="384048"/>
           </a:xfrm>
           <a:prstGeom prst="rect">
@@ -15038,13 +17126,13 @@
       </p:sp>
       <p:sp>
         <p:nvSpPr>
-          <p:cNvPr id="16" name="Text 13"/>
-          <p:cNvSpPr txBox="1"/>
-          <p:nvPr/>
-        </p:nvSpPr>
-        <p:spPr>
-          <a:xfrm>
-            <a:off x="8183880" y="3968496"/>
+          <p:cNvPr id="20" name="Text 17"/>
+          <p:cNvSpPr txBox="1"/>
+          <p:nvPr/>
+        </p:nvSpPr>
+        <p:spPr>
+          <a:xfrm>
+            <a:off x="8183880" y="4517136"/>
             <a:ext cx="2889504" cy="758952"/>
           </a:xfrm>
           <a:prstGeom prst="rect">
@@ -15076,13 +17164,13 @@
       </p:sp>
       <p:sp>
         <p:nvSpPr>
-          <p:cNvPr id="17" name="Text 14"/>
-          <p:cNvSpPr txBox="1"/>
-          <p:nvPr/>
-        </p:nvSpPr>
-        <p:spPr>
-          <a:xfrm>
-            <a:off x="548640" y="5596128"/>
+          <p:cNvPr id="21" name="Text 18"/>
+          <p:cNvSpPr txBox="1"/>
+          <p:nvPr/>
+        </p:nvSpPr>
+        <p:spPr>
+          <a:xfrm>
+            <a:off x="548640" y="5766435"/>
             <a:ext cx="7315200" cy="365760"/>
           </a:xfrm>
           <a:prstGeom prst="rect">
@@ -15230,18 +17318,146 @@
       </p:sp>
       <p:sp>
         <p:nvSpPr>
-          <p:cNvPr id="3" name="screen-frame"/>
+          <p:cNvPr id="3" name="role-band"/>
           <p:cNvSpPr/>
           <p:nvPr/>
         </p:nvSpPr>
         <p:spPr>
           <a:xfrm>
-            <a:off x="493776" y="1271016"/>
-            <a:ext cx="7424928" cy="4224528"/>
+            <a:off x="548640" y="1161288"/>
+            <a:ext cx="11091672" cy="530352"/>
           </a:xfrm>
           <a:prstGeom prst="roundRect">
             <a:avLst>
-              <a:gd name="adj" fmla="val 1732"/>
+              <a:gd name="adj" fmla="val 13793"/>
+            </a:avLst>
+          </a:prstGeom>
+          <a:solidFill>
+            <a:srgbClr val="EAF2FA"/>
+          </a:solidFill>
+          <a:ln w="12700">
+            <a:solidFill>
+              <a:srgbClr val="EAF2FA"/>
+            </a:solidFill>
+            <a:prstDash val="solid"/>
+          </a:ln>
+        </p:spPr>
+      </p:sp>
+      <p:sp>
+        <p:nvSpPr>
+          <p:cNvPr id="4" name="Shape 2"/>
+          <p:cNvSpPr/>
+          <p:nvPr/>
+        </p:nvSpPr>
+        <p:spPr>
+          <a:xfrm>
+            <a:off x="11548872" y="1161288"/>
+            <a:ext cx="91440" cy="530352"/>
+          </a:xfrm>
+          <a:prstGeom prst="rect">
+            <a:avLst/>
+          </a:prstGeom>
+          <a:solidFill>
+            <a:srgbClr val="B8860B"/>
+          </a:solidFill>
+          <a:ln w="12700">
+            <a:solidFill>
+              <a:srgbClr val="B8860B"/>
+            </a:solidFill>
+            <a:prstDash val="solid"/>
+          </a:ln>
+        </p:spPr>
+      </p:sp>
+      <p:sp>
+        <p:nvSpPr>
+          <p:cNvPr id="5" name="Text 3"/>
+          <p:cNvSpPr txBox="1"/>
+          <p:nvPr/>
+        </p:nvSpPr>
+        <p:spPr>
+          <a:xfrm>
+            <a:off x="10515600" y="1161288"/>
+            <a:ext cx="914400" cy="530352"/>
+          </a:xfrm>
+          <a:prstGeom prst="rect">
+            <a:avLst/>
+          </a:prstGeom>
+          <a:noFill/>
+          <a:ln/>
+        </p:spPr>
+        <p:txBody>
+          <a:bodyPr wrap="square" lIns="0" tIns="0" rIns="0" bIns="0" rtlCol="0" anchor="ctr"/>
+          <a:lstStyle/>
+          <a:p>
+            <a:pPr rtl="1" algn="r" indent="0" marL="0">
+              <a:buNone/>
+            </a:pPr>
+            <a:r>
+              <a:rPr lang="ar-AE" altLang="en-US" sz="1500" b="1" dirty="0">
+                <a:solidFill>
+                  <a:srgbClr val="B8860B"/>
+                </a:solidFill>
+                <a:latin typeface="Noto Naskh Arabic"/>
+                <a:cs typeface="adwa-assalaf"/>
+              </a:rPr>
+              <a:t>دور الشاشة:</a:t>
+            </a:r>
+            <a:endParaRPr lang="ar-AE" sz="1500" dirty="0"/>
+          </a:p>
+        </p:txBody>
+      </p:sp>
+      <p:sp>
+        <p:nvSpPr>
+          <p:cNvPr id="6" name="Text 4"/>
+          <p:cNvSpPr txBox="1"/>
+          <p:nvPr/>
+        </p:nvSpPr>
+        <p:spPr>
+          <a:xfrm>
+            <a:off x="731520" y="1161288"/>
+            <a:ext cx="9857232" cy="530352"/>
+          </a:xfrm>
+          <a:prstGeom prst="rect">
+            <a:avLst/>
+          </a:prstGeom>
+          <a:noFill/>
+          <a:ln/>
+        </p:spPr>
+        <p:txBody>
+          <a:bodyPr wrap="square" lIns="0" tIns="0" rIns="0" bIns="0" rtlCol="0" anchor="ctr"/>
+          <a:lstStyle/>
+          <a:p>
+            <a:pPr rtl="1" algn="r" indent="0" marL="0">
+              <a:buNone/>
+            </a:pPr>
+            <a:r>
+              <a:rPr lang="ar-AE" altLang="en-US" sz="1500" dirty="0">
+                <a:solidFill>
+                  <a:srgbClr val="12263F"/>
+                </a:solidFill>
+                <a:latin typeface="Noto Naskh Arabic"/>
+                <a:cs typeface="adwa-assalaf"/>
+              </a:rPr>
+              <a:t>ذاكرة الأفعال: كل إجراء بتاريخه وفاعله وقراره، والكلفة مجمّعة أسفله</a:t>
+            </a:r>
+            <a:endParaRPr lang="ar-AE" sz="1500" dirty="0"/>
+          </a:p>
+        </p:txBody>
+      </p:sp>
+      <p:sp>
+        <p:nvSpPr>
+          <p:cNvPr id="7" name="screen-frame"/>
+          <p:cNvSpPr/>
+          <p:nvPr/>
+        </p:nvSpPr>
+        <p:spPr>
+          <a:xfrm>
+            <a:off x="1133856" y="1819656"/>
+            <a:ext cx="6784848" cy="3864483"/>
+          </a:xfrm>
+          <a:prstGeom prst="roundRect">
+            <a:avLst>
+              <a:gd name="adj" fmla="val 1893"/>
             </a:avLst>
           </a:prstGeom>
           <a:solidFill>
@@ -15264,7 +17480,7 @@
       </p:sp>
       <p:pic>
         <p:nvPicPr>
-          <p:cNvPr id="4" name="screenshot" descr="/tmp/claude-0/-home-user/11b98046-3116-585b-b221-e5c2e170e62a/scratchpad/deck/bshots/14_log.jpg">    </p:cNvPr>
+          <p:cNvPr id="8" name="screenshot" descr="/tmp/claude-0/-home-user/11b98046-3116-585b-b221-e5c2e170e62a/scratchpad/deck/bshots/14_log.jpg">    </p:cNvPr>
           <p:cNvPicPr>
             <a:picLocks noChangeAspect="1"/>
           </p:cNvPicPr>
@@ -15278,8 +17494,8 @@
         </p:blipFill>
         <p:spPr>
           <a:xfrm>
-            <a:off x="548640" y="1325880"/>
-            <a:ext cx="7315200" cy="4114800"/>
+            <a:off x="1188720" y="1874520"/>
+            <a:ext cx="6675120" cy="3754755"/>
           </a:xfrm>
           <a:prstGeom prst="rect">
             <a:avLst/>
@@ -15288,13 +17504,13 @@
       </p:pic>
       <p:sp>
         <p:nvSpPr>
-          <p:cNvPr id="5" name="num-1"/>
+          <p:cNvPr id="9" name="num-1"/>
           <p:cNvSpPr/>
           <p:nvPr/>
         </p:nvSpPr>
         <p:spPr>
           <a:xfrm>
-            <a:off x="11219688" y="1316736"/>
+            <a:off x="11219688" y="1865376"/>
             <a:ext cx="420624" cy="420624"/>
           </a:xfrm>
           <a:prstGeom prst="ellipse">
@@ -15313,13 +17529,13 @@
       </p:sp>
       <p:sp>
         <p:nvSpPr>
-          <p:cNvPr id="6" name="Text 3"/>
-          <p:cNvSpPr txBox="1"/>
-          <p:nvPr/>
-        </p:nvSpPr>
-        <p:spPr>
-          <a:xfrm>
-            <a:off x="11219688" y="1316736"/>
+          <p:cNvPr id="10" name="Text 7"/>
+          <p:cNvSpPr txBox="1"/>
+          <p:nvPr/>
+        </p:nvSpPr>
+        <p:spPr>
+          <a:xfrm>
+            <a:off x="11219688" y="1865376"/>
             <a:ext cx="420624" cy="420624"/>
           </a:xfrm>
           <a:prstGeom prst="rect">
@@ -15352,13 +17568,13 @@
       </p:sp>
       <p:sp>
         <p:nvSpPr>
-          <p:cNvPr id="7" name="Text 4"/>
-          <p:cNvSpPr txBox="1"/>
-          <p:nvPr/>
-        </p:nvSpPr>
-        <p:spPr>
-          <a:xfrm>
-            <a:off x="8183880" y="1298448"/>
+          <p:cNvPr id="11" name="Text 8"/>
+          <p:cNvSpPr txBox="1"/>
+          <p:nvPr/>
+        </p:nvSpPr>
+        <p:spPr>
+          <a:xfrm>
+            <a:off x="8183880" y="1847088"/>
             <a:ext cx="2889504" cy="384048"/>
           </a:xfrm>
           <a:prstGeom prst="rect">
@@ -15390,13 +17606,13 @@
       </p:sp>
       <p:sp>
         <p:nvSpPr>
-          <p:cNvPr id="8" name="Text 5"/>
-          <p:cNvSpPr txBox="1"/>
-          <p:nvPr/>
-        </p:nvSpPr>
-        <p:spPr>
-          <a:xfrm>
-            <a:off x="8183880" y="1682496"/>
+          <p:cNvPr id="12" name="Text 9"/>
+          <p:cNvSpPr txBox="1"/>
+          <p:nvPr/>
+        </p:nvSpPr>
+        <p:spPr>
+          <a:xfrm>
+            <a:off x="8183880" y="2231136"/>
             <a:ext cx="2889504" cy="758952"/>
           </a:xfrm>
           <a:prstGeom prst="rect">
@@ -15428,13 +17644,13 @@
       </p:sp>
       <p:sp>
         <p:nvSpPr>
-          <p:cNvPr id="9" name="num-2"/>
+          <p:cNvPr id="13" name="num-2"/>
           <p:cNvSpPr/>
           <p:nvPr/>
         </p:nvSpPr>
         <p:spPr>
           <a:xfrm>
-            <a:off x="11219688" y="2459736"/>
+            <a:off x="11219688" y="3008376"/>
             <a:ext cx="420624" cy="420624"/>
           </a:xfrm>
           <a:prstGeom prst="ellipse">
@@ -15453,13 +17669,13 @@
       </p:sp>
       <p:sp>
         <p:nvSpPr>
-          <p:cNvPr id="10" name="Text 7"/>
-          <p:cNvSpPr txBox="1"/>
-          <p:nvPr/>
-        </p:nvSpPr>
-        <p:spPr>
-          <a:xfrm>
-            <a:off x="11219688" y="2459736"/>
+          <p:cNvPr id="14" name="Text 11"/>
+          <p:cNvSpPr txBox="1"/>
+          <p:nvPr/>
+        </p:nvSpPr>
+        <p:spPr>
+          <a:xfrm>
+            <a:off x="11219688" y="3008376"/>
             <a:ext cx="420624" cy="420624"/>
           </a:xfrm>
           <a:prstGeom prst="rect">
@@ -15492,13 +17708,13 @@
       </p:sp>
       <p:sp>
         <p:nvSpPr>
-          <p:cNvPr id="11" name="Text 8"/>
-          <p:cNvSpPr txBox="1"/>
-          <p:nvPr/>
-        </p:nvSpPr>
-        <p:spPr>
-          <a:xfrm>
-            <a:off x="8183880" y="2441448"/>
+          <p:cNvPr id="15" name="Text 12"/>
+          <p:cNvSpPr txBox="1"/>
+          <p:nvPr/>
+        </p:nvSpPr>
+        <p:spPr>
+          <a:xfrm>
+            <a:off x="8183880" y="2990088"/>
             <a:ext cx="2889504" cy="384048"/>
           </a:xfrm>
           <a:prstGeom prst="rect">
@@ -15530,13 +17746,13 @@
       </p:sp>
       <p:sp>
         <p:nvSpPr>
-          <p:cNvPr id="12" name="Text 9"/>
-          <p:cNvSpPr txBox="1"/>
-          <p:nvPr/>
-        </p:nvSpPr>
-        <p:spPr>
-          <a:xfrm>
-            <a:off x="8183880" y="2825496"/>
+          <p:cNvPr id="16" name="Text 13"/>
+          <p:cNvSpPr txBox="1"/>
+          <p:nvPr/>
+        </p:nvSpPr>
+        <p:spPr>
+          <a:xfrm>
+            <a:off x="8183880" y="3374136"/>
             <a:ext cx="2889504" cy="758952"/>
           </a:xfrm>
           <a:prstGeom prst="rect">
@@ -15568,13 +17784,13 @@
       </p:sp>
       <p:sp>
         <p:nvSpPr>
-          <p:cNvPr id="13" name="num-3"/>
+          <p:cNvPr id="17" name="num-3"/>
           <p:cNvSpPr/>
           <p:nvPr/>
         </p:nvSpPr>
         <p:spPr>
           <a:xfrm>
-            <a:off x="11219688" y="3602736"/>
+            <a:off x="11219688" y="4151376"/>
             <a:ext cx="420624" cy="420624"/>
           </a:xfrm>
           <a:prstGeom prst="ellipse">
@@ -15593,13 +17809,13 @@
       </p:sp>
       <p:sp>
         <p:nvSpPr>
-          <p:cNvPr id="14" name="Text 11"/>
-          <p:cNvSpPr txBox="1"/>
-          <p:nvPr/>
-        </p:nvSpPr>
-        <p:spPr>
-          <a:xfrm>
-            <a:off x="11219688" y="3602736"/>
+          <p:cNvPr id="18" name="Text 15"/>
+          <p:cNvSpPr txBox="1"/>
+          <p:nvPr/>
+        </p:nvSpPr>
+        <p:spPr>
+          <a:xfrm>
+            <a:off x="11219688" y="4151376"/>
             <a:ext cx="420624" cy="420624"/>
           </a:xfrm>
           <a:prstGeom prst="rect">
@@ -15632,13 +17848,13 @@
       </p:sp>
       <p:sp>
         <p:nvSpPr>
-          <p:cNvPr id="15" name="Text 12"/>
-          <p:cNvSpPr txBox="1"/>
-          <p:nvPr/>
-        </p:nvSpPr>
-        <p:spPr>
-          <a:xfrm>
-            <a:off x="8183880" y="3584448"/>
+          <p:cNvPr id="19" name="Text 16"/>
+          <p:cNvSpPr txBox="1"/>
+          <p:nvPr/>
+        </p:nvSpPr>
+        <p:spPr>
+          <a:xfrm>
+            <a:off x="8183880" y="4133088"/>
             <a:ext cx="2889504" cy="384048"/>
           </a:xfrm>
           <a:prstGeom prst="rect">
@@ -15670,13 +17886,13 @@
       </p:sp>
       <p:sp>
         <p:nvSpPr>
-          <p:cNvPr id="16" name="Text 13"/>
-          <p:cNvSpPr txBox="1"/>
-          <p:nvPr/>
-        </p:nvSpPr>
-        <p:spPr>
-          <a:xfrm>
-            <a:off x="8183880" y="3968496"/>
+          <p:cNvPr id="20" name="Text 17"/>
+          <p:cNvSpPr txBox="1"/>
+          <p:nvPr/>
+        </p:nvSpPr>
+        <p:spPr>
+          <a:xfrm>
+            <a:off x="8183880" y="4517136"/>
             <a:ext cx="2889504" cy="758952"/>
           </a:xfrm>
           <a:prstGeom prst="rect">
@@ -15824,18 +18040,166 @@
       </p:sp>
       <p:sp>
         <p:nvSpPr>
-          <p:cNvPr id="3" name="screen-frame"/>
+          <p:cNvPr id="3" name="role-band"/>
           <p:cNvSpPr/>
           <p:nvPr/>
         </p:nvSpPr>
         <p:spPr>
           <a:xfrm>
-            <a:off x="493776" y="1271016"/>
-            <a:ext cx="7424928" cy="4224528"/>
+            <a:off x="548640" y="1161288"/>
+            <a:ext cx="11091672" cy="530352"/>
           </a:xfrm>
           <a:prstGeom prst="roundRect">
             <a:avLst>
-              <a:gd name="adj" fmla="val 1732"/>
+              <a:gd name="adj" fmla="val 13793"/>
+            </a:avLst>
+          </a:prstGeom>
+          <a:solidFill>
+            <a:srgbClr val="EAF2FA"/>
+          </a:solidFill>
+          <a:ln w="12700">
+            <a:solidFill>
+              <a:srgbClr val="EAF2FA"/>
+            </a:solidFill>
+            <a:prstDash val="solid"/>
+          </a:ln>
+        </p:spPr>
+      </p:sp>
+      <p:sp>
+        <p:nvSpPr>
+          <p:cNvPr id="4" name="Shape 2"/>
+          <p:cNvSpPr/>
+          <p:nvPr/>
+        </p:nvSpPr>
+        <p:spPr>
+          <a:xfrm>
+            <a:off x="11548872" y="1161288"/>
+            <a:ext cx="91440" cy="530352"/>
+          </a:xfrm>
+          <a:prstGeom prst="rect">
+            <a:avLst/>
+          </a:prstGeom>
+          <a:solidFill>
+            <a:srgbClr val="B8860B"/>
+          </a:solidFill>
+          <a:ln w="12700">
+            <a:solidFill>
+              <a:srgbClr val="B8860B"/>
+            </a:solidFill>
+            <a:prstDash val="solid"/>
+          </a:ln>
+        </p:spPr>
+      </p:sp>
+      <p:sp>
+        <p:nvSpPr>
+          <p:cNvPr id="5" name="Text 3"/>
+          <p:cNvSpPr txBox="1"/>
+          <p:nvPr/>
+        </p:nvSpPr>
+        <p:spPr>
+          <a:xfrm>
+            <a:off x="10515600" y="1161288"/>
+            <a:ext cx="914400" cy="530352"/>
+          </a:xfrm>
+          <a:prstGeom prst="rect">
+            <a:avLst/>
+          </a:prstGeom>
+          <a:noFill/>
+          <a:ln/>
+        </p:spPr>
+        <p:txBody>
+          <a:bodyPr wrap="square" lIns="0" tIns="0" rIns="0" bIns="0" rtlCol="0" anchor="ctr"/>
+          <a:lstStyle/>
+          <a:p>
+            <a:pPr rtl="1" algn="r" indent="0" marL="0">
+              <a:buNone/>
+            </a:pPr>
+            <a:r>
+              <a:rPr lang="ar-AE" altLang="en-US" sz="1500" b="1" dirty="0">
+                <a:solidFill>
+                  <a:srgbClr val="B8860B"/>
+                </a:solidFill>
+                <a:latin typeface="Noto Naskh Arabic"/>
+                <a:cs typeface="adwa-assalaf"/>
+              </a:rPr>
+              <a:t>دور الشاشة:</a:t>
+            </a:r>
+            <a:endParaRPr lang="ar-AE" sz="1500" dirty="0"/>
+          </a:p>
+        </p:txBody>
+      </p:sp>
+      <p:sp>
+        <p:nvSpPr>
+          <p:cNvPr id="6" name="Text 4"/>
+          <p:cNvSpPr txBox="1"/>
+          <p:nvPr/>
+        </p:nvSpPr>
+        <p:spPr>
+          <a:xfrm>
+            <a:off x="731520" y="1161288"/>
+            <a:ext cx="9857232" cy="530352"/>
+          </a:xfrm>
+          <a:prstGeom prst="rect">
+            <a:avLst/>
+          </a:prstGeom>
+          <a:noFill/>
+          <a:ln/>
+        </p:spPr>
+        <p:txBody>
+          <a:bodyPr wrap="square" lIns="0" tIns="0" rIns="0" bIns="0" rtlCol="0" anchor="ctr"/>
+          <a:lstStyle/>
+          <a:p>
+            <a:pPr rtl="1" algn="r" indent="0" marL="0">
+              <a:buNone/>
+            </a:pPr>
+            <a:r>
+              <a:rPr lang="ar-AE" altLang="en-US" sz="1500" dirty="0">
+                <a:solidFill>
+                  <a:srgbClr val="12263F"/>
+                </a:solidFill>
+                <a:latin typeface="Noto Naskh Arabic"/>
+                <a:cs typeface="adwa-assalaf"/>
+              </a:rPr>
+              <a:t>الاتصال بـ </a:t>
+            </a:r>
+            <a:r>
+              <a:rPr lang="ar-AE" altLang="en-US" sz="1500" dirty="0">
+                <a:solidFill>
+                  <a:srgbClr val="12263F"/>
+                </a:solidFill>
+                <a:latin typeface="Calibri"/>
+                <a:cs typeface="Calibri"/>
+              </a:rPr>
+              <a:t>Claude</a:t>
+            </a:r>
+            <a:r>
+              <a:rPr lang="ar-AE" altLang="en-US" sz="1500" dirty="0">
+                <a:solidFill>
+                  <a:srgbClr val="12263F"/>
+                </a:solidFill>
+                <a:latin typeface="Noto Naskh Arabic"/>
+                <a:cs typeface="adwa-assalaf"/>
+              </a:rPr>
+              <a:t> وحال المنظومة: أي المحركات جاهز، وأين البيانات</a:t>
+            </a:r>
+            <a:endParaRPr lang="ar-AE" sz="1500" dirty="0"/>
+          </a:p>
+        </p:txBody>
+      </p:sp>
+      <p:sp>
+        <p:nvSpPr>
+          <p:cNvPr id="7" name="screen-frame"/>
+          <p:cNvSpPr/>
+          <p:nvPr/>
+        </p:nvSpPr>
+        <p:spPr>
+          <a:xfrm>
+            <a:off x="1133856" y="1819656"/>
+            <a:ext cx="6784848" cy="3864483"/>
+          </a:xfrm>
+          <a:prstGeom prst="roundRect">
+            <a:avLst>
+              <a:gd name="adj" fmla="val 1893"/>
             </a:avLst>
           </a:prstGeom>
           <a:solidFill>
@@ -15858,7 +18222,7 @@
       </p:sp>
       <p:pic>
         <p:nvPicPr>
-          <p:cNvPr id="4" name="screenshot" descr="/tmp/claude-0/-home-user/11b98046-3116-585b-b221-e5c2e170e62a/scratchpad/deck/bshots/15_settings.jpg">    </p:cNvPr>
+          <p:cNvPr id="8" name="screenshot" descr="/tmp/claude-0/-home-user/11b98046-3116-585b-b221-e5c2e170e62a/scratchpad/deck/bshots/15_settings.jpg">    </p:cNvPr>
           <p:cNvPicPr>
             <a:picLocks noChangeAspect="1"/>
           </p:cNvPicPr>
@@ -15872,8 +18236,8 @@
         </p:blipFill>
         <p:spPr>
           <a:xfrm>
-            <a:off x="548640" y="1325880"/>
-            <a:ext cx="7315200" cy="4114800"/>
+            <a:off x="1188720" y="1874520"/>
+            <a:ext cx="6675120" cy="3754755"/>
           </a:xfrm>
           <a:prstGeom prst="rect">
             <a:avLst/>
@@ -15882,13 +18246,13 @@
       </p:pic>
       <p:sp>
         <p:nvSpPr>
-          <p:cNvPr id="5" name="num-1"/>
+          <p:cNvPr id="9" name="num-1"/>
           <p:cNvSpPr/>
           <p:nvPr/>
         </p:nvSpPr>
         <p:spPr>
           <a:xfrm>
-            <a:off x="11219688" y="1316736"/>
+            <a:off x="11219688" y="1865376"/>
             <a:ext cx="420624" cy="420624"/>
           </a:xfrm>
           <a:prstGeom prst="ellipse">
@@ -15907,13 +18271,13 @@
       </p:sp>
       <p:sp>
         <p:nvSpPr>
-          <p:cNvPr id="6" name="Text 3"/>
-          <p:cNvSpPr txBox="1"/>
-          <p:nvPr/>
-        </p:nvSpPr>
-        <p:spPr>
-          <a:xfrm>
-            <a:off x="11219688" y="1316736"/>
+          <p:cNvPr id="10" name="Text 7"/>
+          <p:cNvSpPr txBox="1"/>
+          <p:nvPr/>
+        </p:nvSpPr>
+        <p:spPr>
+          <a:xfrm>
+            <a:off x="11219688" y="1865376"/>
             <a:ext cx="420624" cy="420624"/>
           </a:xfrm>
           <a:prstGeom prst="rect">
@@ -15946,13 +18310,13 @@
       </p:sp>
       <p:sp>
         <p:nvSpPr>
-          <p:cNvPr id="7" name="Text 4"/>
-          <p:cNvSpPr txBox="1"/>
-          <p:nvPr/>
-        </p:nvSpPr>
-        <p:spPr>
-          <a:xfrm>
-            <a:off x="8183880" y="1298448"/>
+          <p:cNvPr id="11" name="Text 8"/>
+          <p:cNvSpPr txBox="1"/>
+          <p:nvPr/>
+        </p:nvSpPr>
+        <p:spPr>
+          <a:xfrm>
+            <a:off x="8183880" y="1847088"/>
             <a:ext cx="2889504" cy="384048"/>
           </a:xfrm>
           <a:prstGeom prst="rect">
@@ -15984,13 +18348,13 @@
       </p:sp>
       <p:sp>
         <p:nvSpPr>
-          <p:cNvPr id="8" name="Text 5"/>
-          <p:cNvSpPr txBox="1"/>
-          <p:nvPr/>
-        </p:nvSpPr>
-        <p:spPr>
-          <a:xfrm>
-            <a:off x="8183880" y="1682496"/>
+          <p:cNvPr id="12" name="Text 9"/>
+          <p:cNvSpPr txBox="1"/>
+          <p:nvPr/>
+        </p:nvSpPr>
+        <p:spPr>
+          <a:xfrm>
+            <a:off x="8183880" y="2231136"/>
             <a:ext cx="2889504" cy="758952"/>
           </a:xfrm>
           <a:prstGeom prst="rect">
@@ -16082,13 +18446,13 @@
       </p:sp>
       <p:sp>
         <p:nvSpPr>
-          <p:cNvPr id="9" name="num-2"/>
+          <p:cNvPr id="13" name="num-2"/>
           <p:cNvSpPr/>
           <p:nvPr/>
         </p:nvSpPr>
         <p:spPr>
           <a:xfrm>
-            <a:off x="11219688" y="2459736"/>
+            <a:off x="11219688" y="3008376"/>
             <a:ext cx="420624" cy="420624"/>
           </a:xfrm>
           <a:prstGeom prst="ellipse">
@@ -16107,13 +18471,13 @@
       </p:sp>
       <p:sp>
         <p:nvSpPr>
-          <p:cNvPr id="10" name="Text 7"/>
-          <p:cNvSpPr txBox="1"/>
-          <p:nvPr/>
-        </p:nvSpPr>
-        <p:spPr>
-          <a:xfrm>
-            <a:off x="11219688" y="2459736"/>
+          <p:cNvPr id="14" name="Text 11"/>
+          <p:cNvSpPr txBox="1"/>
+          <p:nvPr/>
+        </p:nvSpPr>
+        <p:spPr>
+          <a:xfrm>
+            <a:off x="11219688" y="3008376"/>
             <a:ext cx="420624" cy="420624"/>
           </a:xfrm>
           <a:prstGeom prst="rect">
@@ -16146,13 +18510,13 @@
       </p:sp>
       <p:sp>
         <p:nvSpPr>
-          <p:cNvPr id="11" name="Text 8"/>
-          <p:cNvSpPr txBox="1"/>
-          <p:nvPr/>
-        </p:nvSpPr>
-        <p:spPr>
-          <a:xfrm>
-            <a:off x="8183880" y="2441448"/>
+          <p:cNvPr id="15" name="Text 12"/>
+          <p:cNvSpPr txBox="1"/>
+          <p:nvPr/>
+        </p:nvSpPr>
+        <p:spPr>
+          <a:xfrm>
+            <a:off x="8183880" y="2990088"/>
             <a:ext cx="2889504" cy="384048"/>
           </a:xfrm>
           <a:prstGeom prst="rect">
@@ -16184,13 +18548,13 @@
       </p:sp>
       <p:sp>
         <p:nvSpPr>
-          <p:cNvPr id="12" name="Text 9"/>
-          <p:cNvSpPr txBox="1"/>
-          <p:nvPr/>
-        </p:nvSpPr>
-        <p:spPr>
-          <a:xfrm>
-            <a:off x="8183880" y="2825496"/>
+          <p:cNvPr id="16" name="Text 13"/>
+          <p:cNvSpPr txBox="1"/>
+          <p:nvPr/>
+        </p:nvSpPr>
+        <p:spPr>
+          <a:xfrm>
+            <a:off x="8183880" y="3374136"/>
             <a:ext cx="2889504" cy="758952"/>
           </a:xfrm>
           <a:prstGeom prst="rect">
@@ -16222,13 +18586,13 @@
       </p:sp>
       <p:sp>
         <p:nvSpPr>
-          <p:cNvPr id="13" name="num-3"/>
+          <p:cNvPr id="17" name="num-3"/>
           <p:cNvSpPr/>
           <p:nvPr/>
         </p:nvSpPr>
         <p:spPr>
           <a:xfrm>
-            <a:off x="11219688" y="3602736"/>
+            <a:off x="11219688" y="4151376"/>
             <a:ext cx="420624" cy="420624"/>
           </a:xfrm>
           <a:prstGeom prst="ellipse">
@@ -16247,13 +18611,13 @@
       </p:sp>
       <p:sp>
         <p:nvSpPr>
-          <p:cNvPr id="14" name="Text 11"/>
-          <p:cNvSpPr txBox="1"/>
-          <p:nvPr/>
-        </p:nvSpPr>
-        <p:spPr>
-          <a:xfrm>
-            <a:off x="11219688" y="3602736"/>
+          <p:cNvPr id="18" name="Text 15"/>
+          <p:cNvSpPr txBox="1"/>
+          <p:nvPr/>
+        </p:nvSpPr>
+        <p:spPr>
+          <a:xfrm>
+            <a:off x="11219688" y="4151376"/>
             <a:ext cx="420624" cy="420624"/>
           </a:xfrm>
           <a:prstGeom prst="rect">
@@ -16286,13 +18650,13 @@
       </p:sp>
       <p:sp>
         <p:nvSpPr>
-          <p:cNvPr id="15" name="Text 12"/>
-          <p:cNvSpPr txBox="1"/>
-          <p:nvPr/>
-        </p:nvSpPr>
-        <p:spPr>
-          <a:xfrm>
-            <a:off x="8183880" y="3584448"/>
+          <p:cNvPr id="19" name="Text 16"/>
+          <p:cNvSpPr txBox="1"/>
+          <p:nvPr/>
+        </p:nvSpPr>
+        <p:spPr>
+          <a:xfrm>
+            <a:off x="8183880" y="4133088"/>
             <a:ext cx="2889504" cy="384048"/>
           </a:xfrm>
           <a:prstGeom prst="rect">
@@ -16324,13 +18688,13 @@
       </p:sp>
       <p:sp>
         <p:nvSpPr>
-          <p:cNvPr id="16" name="Text 13"/>
-          <p:cNvSpPr txBox="1"/>
-          <p:nvPr/>
-        </p:nvSpPr>
-        <p:spPr>
-          <a:xfrm>
-            <a:off x="8183880" y="3968496"/>
+          <p:cNvPr id="20" name="Text 17"/>
+          <p:cNvSpPr txBox="1"/>
+          <p:nvPr/>
+        </p:nvSpPr>
+        <p:spPr>
+          <a:xfrm>
+            <a:off x="8183880" y="4517136"/>
             <a:ext cx="2889504" cy="758952"/>
           </a:xfrm>
           <a:prstGeom prst="rect">
@@ -16498,18 +18862,146 @@
       </p:sp>
       <p:sp>
         <p:nvSpPr>
-          <p:cNvPr id="3" name="screen-frame"/>
+          <p:cNvPr id="3" name="role-band"/>
           <p:cNvSpPr/>
           <p:nvPr/>
         </p:nvSpPr>
         <p:spPr>
           <a:xfrm>
-            <a:off x="493776" y="1271016"/>
-            <a:ext cx="7424928" cy="4224528"/>
+            <a:off x="548640" y="1161288"/>
+            <a:ext cx="11091672" cy="530352"/>
           </a:xfrm>
           <a:prstGeom prst="roundRect">
             <a:avLst>
-              <a:gd name="adj" fmla="val 1732"/>
+              <a:gd name="adj" fmla="val 13793"/>
+            </a:avLst>
+          </a:prstGeom>
+          <a:solidFill>
+            <a:srgbClr val="EAF2FA"/>
+          </a:solidFill>
+          <a:ln w="12700">
+            <a:solidFill>
+              <a:srgbClr val="EAF2FA"/>
+            </a:solidFill>
+            <a:prstDash val="solid"/>
+          </a:ln>
+        </p:spPr>
+      </p:sp>
+      <p:sp>
+        <p:nvSpPr>
+          <p:cNvPr id="4" name="Shape 2"/>
+          <p:cNvSpPr/>
+          <p:nvPr/>
+        </p:nvSpPr>
+        <p:spPr>
+          <a:xfrm>
+            <a:off x="11548872" y="1161288"/>
+            <a:ext cx="91440" cy="530352"/>
+          </a:xfrm>
+          <a:prstGeom prst="rect">
+            <a:avLst/>
+          </a:prstGeom>
+          <a:solidFill>
+            <a:srgbClr val="B8860B"/>
+          </a:solidFill>
+          <a:ln w="12700">
+            <a:solidFill>
+              <a:srgbClr val="B8860B"/>
+            </a:solidFill>
+            <a:prstDash val="solid"/>
+          </a:ln>
+        </p:spPr>
+      </p:sp>
+      <p:sp>
+        <p:nvSpPr>
+          <p:cNvPr id="5" name="Text 3"/>
+          <p:cNvSpPr txBox="1"/>
+          <p:nvPr/>
+        </p:nvSpPr>
+        <p:spPr>
+          <a:xfrm>
+            <a:off x="10515600" y="1161288"/>
+            <a:ext cx="914400" cy="530352"/>
+          </a:xfrm>
+          <a:prstGeom prst="rect">
+            <a:avLst/>
+          </a:prstGeom>
+          <a:noFill/>
+          <a:ln/>
+        </p:spPr>
+        <p:txBody>
+          <a:bodyPr wrap="square" lIns="0" tIns="0" rIns="0" bIns="0" rtlCol="0" anchor="ctr"/>
+          <a:lstStyle/>
+          <a:p>
+            <a:pPr rtl="1" algn="r" indent="0" marL="0">
+              <a:buNone/>
+            </a:pPr>
+            <a:r>
+              <a:rPr lang="ar-AE" altLang="en-US" sz="1500" b="1" dirty="0">
+                <a:solidFill>
+                  <a:srgbClr val="B8860B"/>
+                </a:solidFill>
+                <a:latin typeface="Noto Naskh Arabic"/>
+                <a:cs typeface="adwa-assalaf"/>
+              </a:rPr>
+              <a:t>دور الشاشة:</a:t>
+            </a:r>
+            <a:endParaRPr lang="ar-AE" sz="1500" dirty="0"/>
+          </a:p>
+        </p:txBody>
+      </p:sp>
+      <p:sp>
+        <p:nvSpPr>
+          <p:cNvPr id="6" name="Text 4"/>
+          <p:cNvSpPr txBox="1"/>
+          <p:nvPr/>
+        </p:nvSpPr>
+        <p:spPr>
+          <a:xfrm>
+            <a:off x="731520" y="1161288"/>
+            <a:ext cx="9857232" cy="530352"/>
+          </a:xfrm>
+          <a:prstGeom prst="rect">
+            <a:avLst/>
+          </a:prstGeom>
+          <a:noFill/>
+          <a:ln/>
+        </p:spPr>
+        <p:txBody>
+          <a:bodyPr wrap="square" lIns="0" tIns="0" rIns="0" bIns="0" rtlCol="0" anchor="ctr"/>
+          <a:lstStyle/>
+          <a:p>
+            <a:pPr rtl="1" algn="r" indent="0" marL="0">
+              <a:buNone/>
+            </a:pPr>
+            <a:r>
+              <a:rPr lang="ar-AE" altLang="en-US" sz="1500" dirty="0">
+                <a:solidFill>
+                  <a:srgbClr val="12263F"/>
+                </a:solidFill>
+                <a:latin typeface="Noto Naskh Arabic"/>
+                <a:cs typeface="adwa-assalaf"/>
+              </a:rPr>
+              <a:t>تخصيص المؤسسة بهويتكم: خط «أضواء السلف» وأيقونة تختارونها</a:t>
+            </a:r>
+            <a:endParaRPr lang="ar-AE" sz="1500" dirty="0"/>
+          </a:p>
+        </p:txBody>
+      </p:sp>
+      <p:sp>
+        <p:nvSpPr>
+          <p:cNvPr id="7" name="screen-frame"/>
+          <p:cNvSpPr/>
+          <p:nvPr/>
+        </p:nvSpPr>
+        <p:spPr>
+          <a:xfrm>
+            <a:off x="1133856" y="1819656"/>
+            <a:ext cx="6784848" cy="3864483"/>
+          </a:xfrm>
+          <a:prstGeom prst="roundRect">
+            <a:avLst>
+              <a:gd name="adj" fmla="val 1893"/>
             </a:avLst>
           </a:prstGeom>
           <a:solidFill>
@@ -16532,7 +19024,7 @@
       </p:sp>
       <p:pic>
         <p:nvPicPr>
-          <p:cNvPr id="4" name="screenshot" descr="/tmp/claude-0/-home-user/11b98046-3116-585b-b221-e5c2e170e62a/scratchpad/deck/bshots/15b_identity.jpg">    </p:cNvPr>
+          <p:cNvPr id="8" name="screenshot" descr="/tmp/claude-0/-home-user/11b98046-3116-585b-b221-e5c2e170e62a/scratchpad/deck/bshots/15b_identity.jpg">    </p:cNvPr>
           <p:cNvPicPr>
             <a:picLocks noChangeAspect="1"/>
           </p:cNvPicPr>
@@ -16546,8 +19038,8 @@
         </p:blipFill>
         <p:spPr>
           <a:xfrm>
-            <a:off x="548640" y="1325880"/>
-            <a:ext cx="7315200" cy="4114800"/>
+            <a:off x="1188720" y="1874520"/>
+            <a:ext cx="6675120" cy="3754755"/>
           </a:xfrm>
           <a:prstGeom prst="rect">
             <a:avLst/>
@@ -16556,13 +19048,13 @@
       </p:pic>
       <p:sp>
         <p:nvSpPr>
-          <p:cNvPr id="5" name="num-1"/>
+          <p:cNvPr id="9" name="num-1"/>
           <p:cNvSpPr/>
           <p:nvPr/>
         </p:nvSpPr>
         <p:spPr>
           <a:xfrm>
-            <a:off x="11219688" y="1316736"/>
+            <a:off x="11219688" y="1865376"/>
             <a:ext cx="420624" cy="420624"/>
           </a:xfrm>
           <a:prstGeom prst="ellipse">
@@ -16581,13 +19073,13 @@
       </p:sp>
       <p:sp>
         <p:nvSpPr>
-          <p:cNvPr id="6" name="Text 3"/>
-          <p:cNvSpPr txBox="1"/>
-          <p:nvPr/>
-        </p:nvSpPr>
-        <p:spPr>
-          <a:xfrm>
-            <a:off x="11219688" y="1316736"/>
+          <p:cNvPr id="10" name="Text 7"/>
+          <p:cNvSpPr txBox="1"/>
+          <p:nvPr/>
+        </p:nvSpPr>
+        <p:spPr>
+          <a:xfrm>
+            <a:off x="11219688" y="1865376"/>
             <a:ext cx="420624" cy="420624"/>
           </a:xfrm>
           <a:prstGeom prst="rect">
@@ -16620,13 +19112,13 @@
       </p:sp>
       <p:sp>
         <p:nvSpPr>
-          <p:cNvPr id="7" name="Text 4"/>
-          <p:cNvSpPr txBox="1"/>
-          <p:nvPr/>
-        </p:nvSpPr>
-        <p:spPr>
-          <a:xfrm>
-            <a:off x="8183880" y="1298448"/>
+          <p:cNvPr id="11" name="Text 8"/>
+          <p:cNvSpPr txBox="1"/>
+          <p:nvPr/>
+        </p:nvSpPr>
+        <p:spPr>
+          <a:xfrm>
+            <a:off x="8183880" y="1847088"/>
             <a:ext cx="2889504" cy="384048"/>
           </a:xfrm>
           <a:prstGeom prst="rect">
@@ -16658,13 +19150,13 @@
       </p:sp>
       <p:sp>
         <p:nvSpPr>
-          <p:cNvPr id="8" name="Text 5"/>
-          <p:cNvSpPr txBox="1"/>
-          <p:nvPr/>
-        </p:nvSpPr>
-        <p:spPr>
-          <a:xfrm>
-            <a:off x="8183880" y="1682496"/>
+          <p:cNvPr id="12" name="Text 9"/>
+          <p:cNvSpPr txBox="1"/>
+          <p:nvPr/>
+        </p:nvSpPr>
+        <p:spPr>
+          <a:xfrm>
+            <a:off x="8183880" y="2231136"/>
             <a:ext cx="2889504" cy="758952"/>
           </a:xfrm>
           <a:prstGeom prst="rect">
@@ -16726,13 +19218,13 @@
       </p:sp>
       <p:sp>
         <p:nvSpPr>
-          <p:cNvPr id="9" name="num-2"/>
+          <p:cNvPr id="13" name="num-2"/>
           <p:cNvSpPr/>
           <p:nvPr/>
         </p:nvSpPr>
         <p:spPr>
           <a:xfrm>
-            <a:off x="11219688" y="2459736"/>
+            <a:off x="11219688" y="3008376"/>
             <a:ext cx="420624" cy="420624"/>
           </a:xfrm>
           <a:prstGeom prst="ellipse">
@@ -16751,13 +19243,13 @@
       </p:sp>
       <p:sp>
         <p:nvSpPr>
-          <p:cNvPr id="10" name="Text 7"/>
-          <p:cNvSpPr txBox="1"/>
-          <p:nvPr/>
-        </p:nvSpPr>
-        <p:spPr>
-          <a:xfrm>
-            <a:off x="11219688" y="2459736"/>
+          <p:cNvPr id="14" name="Text 11"/>
+          <p:cNvSpPr txBox="1"/>
+          <p:nvPr/>
+        </p:nvSpPr>
+        <p:spPr>
+          <a:xfrm>
+            <a:off x="11219688" y="3008376"/>
             <a:ext cx="420624" cy="420624"/>
           </a:xfrm>
           <a:prstGeom prst="rect">
@@ -16790,13 +19282,13 @@
       </p:sp>
       <p:sp>
         <p:nvSpPr>
-          <p:cNvPr id="11" name="Text 8"/>
-          <p:cNvSpPr txBox="1"/>
-          <p:nvPr/>
-        </p:nvSpPr>
-        <p:spPr>
-          <a:xfrm>
-            <a:off x="8183880" y="2441448"/>
+          <p:cNvPr id="15" name="Text 12"/>
+          <p:cNvSpPr txBox="1"/>
+          <p:nvPr/>
+        </p:nvSpPr>
+        <p:spPr>
+          <a:xfrm>
+            <a:off x="8183880" y="2990088"/>
             <a:ext cx="2889504" cy="384048"/>
           </a:xfrm>
           <a:prstGeom prst="rect">
@@ -16828,13 +19320,13 @@
       </p:sp>
       <p:sp>
         <p:nvSpPr>
-          <p:cNvPr id="12" name="Text 9"/>
-          <p:cNvSpPr txBox="1"/>
-          <p:nvPr/>
-        </p:nvSpPr>
-        <p:spPr>
-          <a:xfrm>
-            <a:off x="8183880" y="2825496"/>
+          <p:cNvPr id="16" name="Text 13"/>
+          <p:cNvSpPr txBox="1"/>
+          <p:nvPr/>
+        </p:nvSpPr>
+        <p:spPr>
+          <a:xfrm>
+            <a:off x="8183880" y="3374136"/>
             <a:ext cx="2889504" cy="758952"/>
           </a:xfrm>
           <a:prstGeom prst="rect">
@@ -16866,13 +19358,13 @@
       </p:sp>
       <p:sp>
         <p:nvSpPr>
-          <p:cNvPr id="13" name="num-3"/>
+          <p:cNvPr id="17" name="num-3"/>
           <p:cNvSpPr/>
           <p:nvPr/>
         </p:nvSpPr>
         <p:spPr>
           <a:xfrm>
-            <a:off x="11219688" y="3602736"/>
+            <a:off x="11219688" y="4151376"/>
             <a:ext cx="420624" cy="420624"/>
           </a:xfrm>
           <a:prstGeom prst="ellipse">
@@ -16891,13 +19383,13 @@
       </p:sp>
       <p:sp>
         <p:nvSpPr>
-          <p:cNvPr id="14" name="Text 11"/>
-          <p:cNvSpPr txBox="1"/>
-          <p:nvPr/>
-        </p:nvSpPr>
-        <p:spPr>
-          <a:xfrm>
-            <a:off x="11219688" y="3602736"/>
+          <p:cNvPr id="18" name="Text 15"/>
+          <p:cNvSpPr txBox="1"/>
+          <p:nvPr/>
+        </p:nvSpPr>
+        <p:spPr>
+          <a:xfrm>
+            <a:off x="11219688" y="4151376"/>
             <a:ext cx="420624" cy="420624"/>
           </a:xfrm>
           <a:prstGeom prst="rect">
@@ -16930,13 +19422,13 @@
       </p:sp>
       <p:sp>
         <p:nvSpPr>
-          <p:cNvPr id="15" name="Text 12"/>
-          <p:cNvSpPr txBox="1"/>
-          <p:nvPr/>
-        </p:nvSpPr>
-        <p:spPr>
-          <a:xfrm>
-            <a:off x="8183880" y="3584448"/>
+          <p:cNvPr id="19" name="Text 16"/>
+          <p:cNvSpPr txBox="1"/>
+          <p:nvPr/>
+        </p:nvSpPr>
+        <p:spPr>
+          <a:xfrm>
+            <a:off x="8183880" y="4133088"/>
             <a:ext cx="2889504" cy="384048"/>
           </a:xfrm>
           <a:prstGeom prst="rect">
@@ -16968,13 +19460,13 @@
       </p:sp>
       <p:sp>
         <p:nvSpPr>
-          <p:cNvPr id="16" name="Text 13"/>
-          <p:cNvSpPr txBox="1"/>
-          <p:nvPr/>
-        </p:nvSpPr>
-        <p:spPr>
-          <a:xfrm>
-            <a:off x="8183880" y="3968496"/>
+          <p:cNvPr id="20" name="Text 17"/>
+          <p:cNvSpPr txBox="1"/>
+          <p:nvPr/>
+        </p:nvSpPr>
+        <p:spPr>
+          <a:xfrm>
+            <a:off x="8183880" y="4517136"/>
             <a:ext cx="2889504" cy="758952"/>
           </a:xfrm>
           <a:prstGeom prst="rect">
@@ -22987,18 +25479,146 @@
       </p:sp>
       <p:sp>
         <p:nvSpPr>
-          <p:cNvPr id="3" name="screen-frame"/>
+          <p:cNvPr id="3" name="role-band"/>
           <p:cNvSpPr/>
           <p:nvPr/>
         </p:nvSpPr>
         <p:spPr>
           <a:xfrm>
-            <a:off x="493776" y="1271016"/>
-            <a:ext cx="7424928" cy="4224528"/>
+            <a:off x="548640" y="1161288"/>
+            <a:ext cx="11091672" cy="530352"/>
           </a:xfrm>
           <a:prstGeom prst="roundRect">
             <a:avLst>
-              <a:gd name="adj" fmla="val 1732"/>
+              <a:gd name="adj" fmla="val 13793"/>
+            </a:avLst>
+          </a:prstGeom>
+          <a:solidFill>
+            <a:srgbClr val="EAF2FA"/>
+          </a:solidFill>
+          <a:ln w="12700">
+            <a:solidFill>
+              <a:srgbClr val="EAF2FA"/>
+            </a:solidFill>
+            <a:prstDash val="solid"/>
+          </a:ln>
+        </p:spPr>
+      </p:sp>
+      <p:sp>
+        <p:nvSpPr>
+          <p:cNvPr id="4" name="Shape 2"/>
+          <p:cNvSpPr/>
+          <p:nvPr/>
+        </p:nvSpPr>
+        <p:spPr>
+          <a:xfrm>
+            <a:off x="11548872" y="1161288"/>
+            <a:ext cx="91440" cy="530352"/>
+          </a:xfrm>
+          <a:prstGeom prst="rect">
+            <a:avLst/>
+          </a:prstGeom>
+          <a:solidFill>
+            <a:srgbClr val="B8860B"/>
+          </a:solidFill>
+          <a:ln w="12700">
+            <a:solidFill>
+              <a:srgbClr val="B8860B"/>
+            </a:solidFill>
+            <a:prstDash val="solid"/>
+          </a:ln>
+        </p:spPr>
+      </p:sp>
+      <p:sp>
+        <p:nvSpPr>
+          <p:cNvPr id="5" name="Text 3"/>
+          <p:cNvSpPr txBox="1"/>
+          <p:nvPr/>
+        </p:nvSpPr>
+        <p:spPr>
+          <a:xfrm>
+            <a:off x="10515600" y="1161288"/>
+            <a:ext cx="914400" cy="530352"/>
+          </a:xfrm>
+          <a:prstGeom prst="rect">
+            <a:avLst/>
+          </a:prstGeom>
+          <a:noFill/>
+          <a:ln/>
+        </p:spPr>
+        <p:txBody>
+          <a:bodyPr wrap="square" lIns="0" tIns="0" rIns="0" bIns="0" rtlCol="0" anchor="ctr"/>
+          <a:lstStyle/>
+          <a:p>
+            <a:pPr rtl="1" algn="r" indent="0" marL="0">
+              <a:buNone/>
+            </a:pPr>
+            <a:r>
+              <a:rPr lang="ar-AE" altLang="en-US" sz="1500" b="1" dirty="0">
+                <a:solidFill>
+                  <a:srgbClr val="B8860B"/>
+                </a:solidFill>
+                <a:latin typeface="Noto Naskh Arabic"/>
+                <a:cs typeface="adwa-assalaf"/>
+              </a:rPr>
+              <a:t>دور الشاشة:</a:t>
+            </a:r>
+            <a:endParaRPr lang="ar-AE" sz="1500" dirty="0"/>
+          </a:p>
+        </p:txBody>
+      </p:sp>
+      <p:sp>
+        <p:nvSpPr>
+          <p:cNvPr id="6" name="Text 4"/>
+          <p:cNvSpPr txBox="1"/>
+          <p:nvPr/>
+        </p:nvSpPr>
+        <p:spPr>
+          <a:xfrm>
+            <a:off x="731520" y="1161288"/>
+            <a:ext cx="9857232" cy="530352"/>
+          </a:xfrm>
+          <a:prstGeom prst="rect">
+            <a:avLst/>
+          </a:prstGeom>
+          <a:noFill/>
+          <a:ln/>
+        </p:spPr>
+        <p:txBody>
+          <a:bodyPr wrap="square" lIns="0" tIns="0" rIns="0" bIns="0" rtlCol="0" anchor="ctr"/>
+          <a:lstStyle/>
+          <a:p>
+            <a:pPr rtl="1" algn="r" indent="0" marL="0">
+              <a:buNone/>
+            </a:pPr>
+            <a:r>
+              <a:rPr lang="ar-AE" altLang="en-US" sz="1500" dirty="0">
+                <a:solidFill>
+                  <a:srgbClr val="12263F"/>
+                </a:solidFill>
+                <a:latin typeface="Noto Naskh Arabic"/>
+                <a:cs typeface="adwa-assalaf"/>
+              </a:rPr>
+              <a:t>نقطة الانطلاق: حال المؤسسة في نظرة واحدة، والطريق إلى كل قسم، ومنها يُختار المحرك</a:t>
+            </a:r>
+            <a:endParaRPr lang="ar-AE" sz="1500" dirty="0"/>
+          </a:p>
+        </p:txBody>
+      </p:sp>
+      <p:sp>
+        <p:nvSpPr>
+          <p:cNvPr id="7" name="screen-frame"/>
+          <p:cNvSpPr/>
+          <p:nvPr/>
+        </p:nvSpPr>
+        <p:spPr>
+          <a:xfrm>
+            <a:off x="1133856" y="1819656"/>
+            <a:ext cx="6784848" cy="3864483"/>
+          </a:xfrm>
+          <a:prstGeom prst="roundRect">
+            <a:avLst>
+              <a:gd name="adj" fmla="val 1893"/>
             </a:avLst>
           </a:prstGeom>
           <a:solidFill>
@@ -23021,7 +25641,7 @@
       </p:sp>
       <p:pic>
         <p:nvPicPr>
-          <p:cNvPr id="4" name="screenshot" descr="/tmp/claude-0/-home-user/11b98046-3116-585b-b221-e5c2e170e62a/scratchpad/deck/bshots/01_home.jpg">    </p:cNvPr>
+          <p:cNvPr id="8" name="screenshot" descr="/tmp/claude-0/-home-user/11b98046-3116-585b-b221-e5c2e170e62a/scratchpad/deck/bshots/01_home.jpg">    </p:cNvPr>
           <p:cNvPicPr>
             <a:picLocks noChangeAspect="1"/>
           </p:cNvPicPr>
@@ -23035,8 +25655,8 @@
         </p:blipFill>
         <p:spPr>
           <a:xfrm>
-            <a:off x="548640" y="1325880"/>
-            <a:ext cx="7315200" cy="4114800"/>
+            <a:off x="1188720" y="1874520"/>
+            <a:ext cx="6675120" cy="3754755"/>
           </a:xfrm>
           <a:prstGeom prst="rect">
             <a:avLst/>
@@ -23045,13 +25665,13 @@
       </p:pic>
       <p:sp>
         <p:nvSpPr>
-          <p:cNvPr id="5" name="num-1"/>
+          <p:cNvPr id="9" name="num-1"/>
           <p:cNvSpPr/>
           <p:nvPr/>
         </p:nvSpPr>
         <p:spPr>
           <a:xfrm>
-            <a:off x="11219688" y="1316736"/>
+            <a:off x="11219688" y="1865376"/>
             <a:ext cx="420624" cy="420624"/>
           </a:xfrm>
           <a:prstGeom prst="ellipse">
@@ -23070,13 +25690,13 @@
       </p:sp>
       <p:sp>
         <p:nvSpPr>
-          <p:cNvPr id="6" name="Text 3"/>
-          <p:cNvSpPr txBox="1"/>
-          <p:nvPr/>
-        </p:nvSpPr>
-        <p:spPr>
-          <a:xfrm>
-            <a:off x="11219688" y="1316736"/>
+          <p:cNvPr id="10" name="Text 7"/>
+          <p:cNvSpPr txBox="1"/>
+          <p:nvPr/>
+        </p:nvSpPr>
+        <p:spPr>
+          <a:xfrm>
+            <a:off x="11219688" y="1865376"/>
             <a:ext cx="420624" cy="420624"/>
           </a:xfrm>
           <a:prstGeom prst="rect">
@@ -23109,13 +25729,13 @@
       </p:sp>
       <p:sp>
         <p:nvSpPr>
-          <p:cNvPr id="7" name="Text 4"/>
-          <p:cNvSpPr txBox="1"/>
-          <p:nvPr/>
-        </p:nvSpPr>
-        <p:spPr>
-          <a:xfrm>
-            <a:off x="8183880" y="1298448"/>
+          <p:cNvPr id="11" name="Text 8"/>
+          <p:cNvSpPr txBox="1"/>
+          <p:nvPr/>
+        </p:nvSpPr>
+        <p:spPr>
+          <a:xfrm>
+            <a:off x="8183880" y="1847088"/>
             <a:ext cx="2889504" cy="384048"/>
           </a:xfrm>
           <a:prstGeom prst="rect">
@@ -23147,13 +25767,13 @@
       </p:sp>
       <p:sp>
         <p:nvSpPr>
-          <p:cNvPr id="8" name="Text 5"/>
-          <p:cNvSpPr txBox="1"/>
-          <p:nvPr/>
-        </p:nvSpPr>
-        <p:spPr>
-          <a:xfrm>
-            <a:off x="8183880" y="1682496"/>
+          <p:cNvPr id="12" name="Text 9"/>
+          <p:cNvSpPr txBox="1"/>
+          <p:nvPr/>
+        </p:nvSpPr>
+        <p:spPr>
+          <a:xfrm>
+            <a:off x="8183880" y="2231136"/>
             <a:ext cx="2889504" cy="758952"/>
           </a:xfrm>
           <a:prstGeom prst="rect">
@@ -23185,13 +25805,13 @@
       </p:sp>
       <p:sp>
         <p:nvSpPr>
-          <p:cNvPr id="9" name="num-2"/>
+          <p:cNvPr id="13" name="num-2"/>
           <p:cNvSpPr/>
           <p:nvPr/>
         </p:nvSpPr>
         <p:spPr>
           <a:xfrm>
-            <a:off x="11219688" y="2459736"/>
+            <a:off x="11219688" y="3008376"/>
             <a:ext cx="420624" cy="420624"/>
           </a:xfrm>
           <a:prstGeom prst="ellipse">
@@ -23210,13 +25830,13 @@
       </p:sp>
       <p:sp>
         <p:nvSpPr>
-          <p:cNvPr id="10" name="Text 7"/>
-          <p:cNvSpPr txBox="1"/>
-          <p:nvPr/>
-        </p:nvSpPr>
-        <p:spPr>
-          <a:xfrm>
-            <a:off x="11219688" y="2459736"/>
+          <p:cNvPr id="14" name="Text 11"/>
+          <p:cNvSpPr txBox="1"/>
+          <p:nvPr/>
+        </p:nvSpPr>
+        <p:spPr>
+          <a:xfrm>
+            <a:off x="11219688" y="3008376"/>
             <a:ext cx="420624" cy="420624"/>
           </a:xfrm>
           <a:prstGeom prst="rect">
@@ -23249,13 +25869,13 @@
       </p:sp>
       <p:sp>
         <p:nvSpPr>
-          <p:cNvPr id="11" name="Text 8"/>
-          <p:cNvSpPr txBox="1"/>
-          <p:nvPr/>
-        </p:nvSpPr>
-        <p:spPr>
-          <a:xfrm>
-            <a:off x="8183880" y="2441448"/>
+          <p:cNvPr id="15" name="Text 12"/>
+          <p:cNvSpPr txBox="1"/>
+          <p:nvPr/>
+        </p:nvSpPr>
+        <p:spPr>
+          <a:xfrm>
+            <a:off x="8183880" y="2990088"/>
             <a:ext cx="2889504" cy="384048"/>
           </a:xfrm>
           <a:prstGeom prst="rect">
@@ -23287,13 +25907,13 @@
       </p:sp>
       <p:sp>
         <p:nvSpPr>
-          <p:cNvPr id="12" name="Text 9"/>
-          <p:cNvSpPr txBox="1"/>
-          <p:nvPr/>
-        </p:nvSpPr>
-        <p:spPr>
-          <a:xfrm>
-            <a:off x="8183880" y="2825496"/>
+          <p:cNvPr id="16" name="Text 13"/>
+          <p:cNvSpPr txBox="1"/>
+          <p:nvPr/>
+        </p:nvSpPr>
+        <p:spPr>
+          <a:xfrm>
+            <a:off x="8183880" y="3374136"/>
             <a:ext cx="2889504" cy="758952"/>
           </a:xfrm>
           <a:prstGeom prst="rect">
@@ -23325,13 +25945,13 @@
       </p:sp>
       <p:sp>
         <p:nvSpPr>
-          <p:cNvPr id="13" name="num-3"/>
+          <p:cNvPr id="17" name="num-3"/>
           <p:cNvSpPr/>
           <p:nvPr/>
         </p:nvSpPr>
         <p:spPr>
           <a:xfrm>
-            <a:off x="11219688" y="3602736"/>
+            <a:off x="11219688" y="4151376"/>
             <a:ext cx="420624" cy="420624"/>
           </a:xfrm>
           <a:prstGeom prst="ellipse">
@@ -23350,13 +25970,13 @@
       </p:sp>
       <p:sp>
         <p:nvSpPr>
-          <p:cNvPr id="14" name="Text 11"/>
-          <p:cNvSpPr txBox="1"/>
-          <p:nvPr/>
-        </p:nvSpPr>
-        <p:spPr>
-          <a:xfrm>
-            <a:off x="11219688" y="3602736"/>
+          <p:cNvPr id="18" name="Text 15"/>
+          <p:cNvSpPr txBox="1"/>
+          <p:nvPr/>
+        </p:nvSpPr>
+        <p:spPr>
+          <a:xfrm>
+            <a:off x="11219688" y="4151376"/>
             <a:ext cx="420624" cy="420624"/>
           </a:xfrm>
           <a:prstGeom prst="rect">
@@ -23389,13 +26009,13 @@
       </p:sp>
       <p:sp>
         <p:nvSpPr>
-          <p:cNvPr id="15" name="Text 12"/>
-          <p:cNvSpPr txBox="1"/>
-          <p:nvPr/>
-        </p:nvSpPr>
-        <p:spPr>
-          <a:xfrm>
-            <a:off x="8183880" y="3584448"/>
+          <p:cNvPr id="19" name="Text 16"/>
+          <p:cNvSpPr txBox="1"/>
+          <p:nvPr/>
+        </p:nvSpPr>
+        <p:spPr>
+          <a:xfrm>
+            <a:off x="8183880" y="4133088"/>
             <a:ext cx="2889504" cy="384048"/>
           </a:xfrm>
           <a:prstGeom prst="rect">
@@ -23427,13 +26047,13 @@
       </p:sp>
       <p:sp>
         <p:nvSpPr>
-          <p:cNvPr id="16" name="Text 13"/>
-          <p:cNvSpPr txBox="1"/>
-          <p:nvPr/>
-        </p:nvSpPr>
-        <p:spPr>
-          <a:xfrm>
-            <a:off x="8183880" y="3968496"/>
+          <p:cNvPr id="20" name="Text 17"/>
+          <p:cNvSpPr txBox="1"/>
+          <p:nvPr/>
+        </p:nvSpPr>
+        <p:spPr>
+          <a:xfrm>
+            <a:off x="8183880" y="4517136"/>
             <a:ext cx="2889504" cy="758952"/>
           </a:xfrm>
           <a:prstGeom prst="rect">
@@ -23465,13 +26085,13 @@
       </p:sp>
       <p:sp>
         <p:nvSpPr>
-          <p:cNvPr id="17" name="Text 14"/>
-          <p:cNvSpPr txBox="1"/>
-          <p:nvPr/>
-        </p:nvSpPr>
-        <p:spPr>
-          <a:xfrm>
-            <a:off x="548640" y="5596128"/>
+          <p:cNvPr id="21" name="Text 18"/>
+          <p:cNvSpPr txBox="1"/>
+          <p:nvPr/>
+        </p:nvSpPr>
+        <p:spPr>
+          <a:xfrm>
+            <a:off x="548640" y="5766435"/>
             <a:ext cx="7315200" cy="365760"/>
           </a:xfrm>
           <a:prstGeom prst="rect">
@@ -23619,18 +26239,146 @@
       </p:sp>
       <p:sp>
         <p:nvSpPr>
-          <p:cNvPr id="3" name="screen-frame"/>
+          <p:cNvPr id="3" name="role-band"/>
           <p:cNvSpPr/>
           <p:nvPr/>
         </p:nvSpPr>
         <p:spPr>
           <a:xfrm>
-            <a:off x="493776" y="1271016"/>
-            <a:ext cx="7424928" cy="4224528"/>
+            <a:off x="548640" y="1161288"/>
+            <a:ext cx="11091672" cy="530352"/>
           </a:xfrm>
           <a:prstGeom prst="roundRect">
             <a:avLst>
-              <a:gd name="adj" fmla="val 1732"/>
+              <a:gd name="adj" fmla="val 13793"/>
+            </a:avLst>
+          </a:prstGeom>
+          <a:solidFill>
+            <a:srgbClr val="EAF2FA"/>
+          </a:solidFill>
+          <a:ln w="12700">
+            <a:solidFill>
+              <a:srgbClr val="EAF2FA"/>
+            </a:solidFill>
+            <a:prstDash val="solid"/>
+          </a:ln>
+        </p:spPr>
+      </p:sp>
+      <p:sp>
+        <p:nvSpPr>
+          <p:cNvPr id="4" name="Shape 2"/>
+          <p:cNvSpPr/>
+          <p:nvPr/>
+        </p:nvSpPr>
+        <p:spPr>
+          <a:xfrm>
+            <a:off x="11548872" y="1161288"/>
+            <a:ext cx="91440" cy="530352"/>
+          </a:xfrm>
+          <a:prstGeom prst="rect">
+            <a:avLst/>
+          </a:prstGeom>
+          <a:solidFill>
+            <a:srgbClr val="B8860B"/>
+          </a:solidFill>
+          <a:ln w="12700">
+            <a:solidFill>
+              <a:srgbClr val="B8860B"/>
+            </a:solidFill>
+            <a:prstDash val="solid"/>
+          </a:ln>
+        </p:spPr>
+      </p:sp>
+      <p:sp>
+        <p:nvSpPr>
+          <p:cNvPr id="5" name="Text 3"/>
+          <p:cNvSpPr txBox="1"/>
+          <p:nvPr/>
+        </p:nvSpPr>
+        <p:spPr>
+          <a:xfrm>
+            <a:off x="10515600" y="1161288"/>
+            <a:ext cx="914400" cy="530352"/>
+          </a:xfrm>
+          <a:prstGeom prst="rect">
+            <a:avLst/>
+          </a:prstGeom>
+          <a:noFill/>
+          <a:ln/>
+        </p:spPr>
+        <p:txBody>
+          <a:bodyPr wrap="square" lIns="0" tIns="0" rIns="0" bIns="0" rtlCol="0" anchor="ctr"/>
+          <a:lstStyle/>
+          <a:p>
+            <a:pPr rtl="1" algn="r" indent="0" marL="0">
+              <a:buNone/>
+            </a:pPr>
+            <a:r>
+              <a:rPr lang="ar-AE" altLang="en-US" sz="1500" b="1" dirty="0">
+                <a:solidFill>
+                  <a:srgbClr val="B8860B"/>
+                </a:solidFill>
+                <a:latin typeface="Noto Naskh Arabic"/>
+                <a:cs typeface="adwa-assalaf"/>
+              </a:rPr>
+              <a:t>دور الشاشة:</a:t>
+            </a:r>
+            <a:endParaRPr lang="ar-AE" sz="1500" dirty="0"/>
+          </a:p>
+        </p:txBody>
+      </p:sp>
+      <p:sp>
+        <p:nvSpPr>
+          <p:cNvPr id="6" name="Text 4"/>
+          <p:cNvSpPr txBox="1"/>
+          <p:nvPr/>
+        </p:nvSpPr>
+        <p:spPr>
+          <a:xfrm>
+            <a:off x="731520" y="1161288"/>
+            <a:ext cx="9857232" cy="530352"/>
+          </a:xfrm>
+          <a:prstGeom prst="rect">
+            <a:avLst/>
+          </a:prstGeom>
+          <a:noFill/>
+          <a:ln/>
+        </p:spPr>
+        <p:txBody>
+          <a:bodyPr wrap="square" lIns="0" tIns="0" rIns="0" bIns="0" rtlCol="0" anchor="ctr"/>
+          <a:lstStyle/>
+          <a:p>
+            <a:pPr rtl="1" algn="r" indent="0" marL="0">
+              <a:buNone/>
+            </a:pPr>
+            <a:r>
+              <a:rPr lang="ar-AE" altLang="en-US" sz="1500" dirty="0">
+                <a:solidFill>
+                  <a:srgbClr val="12263F"/>
+                </a:solidFill>
+                <a:latin typeface="Noto Naskh Arabic"/>
+                <a:cs typeface="adwa-assalaf"/>
+              </a:rPr>
+              <a:t>جدول المؤشرات كاملاً، ومنه يُثبَّت خط الأساس، ثم الإدارات الخمس وأجناسها</a:t>
+            </a:r>
+            <a:endParaRPr lang="ar-AE" sz="1500" dirty="0"/>
+          </a:p>
+        </p:txBody>
+      </p:sp>
+      <p:sp>
+        <p:nvSpPr>
+          <p:cNvPr id="7" name="screen-frame"/>
+          <p:cNvSpPr/>
+          <p:nvPr/>
+        </p:nvSpPr>
+        <p:spPr>
+          <a:xfrm>
+            <a:off x="1133856" y="1819656"/>
+            <a:ext cx="6784848" cy="3864483"/>
+          </a:xfrm>
+          <a:prstGeom prst="roundRect">
+            <a:avLst>
+              <a:gd name="adj" fmla="val 1893"/>
             </a:avLst>
           </a:prstGeom>
           <a:solidFill>
@@ -23653,7 +26401,7 @@
       </p:sp>
       <p:pic>
         <p:nvPicPr>
-          <p:cNvPr id="4" name="screenshot" descr="/tmp/claude-0/-home-user/11b98046-3116-585b-b221-e5c2e170e62a/scratchpad/deck/bshots/01b_home_kpis.jpg">    </p:cNvPr>
+          <p:cNvPr id="8" name="screenshot" descr="/tmp/claude-0/-home-user/11b98046-3116-585b-b221-e5c2e170e62a/scratchpad/deck/bshots/01b_home_kpis.jpg">    </p:cNvPr>
           <p:cNvPicPr>
             <a:picLocks noChangeAspect="1"/>
           </p:cNvPicPr>
@@ -23667,8 +26415,8 @@
         </p:blipFill>
         <p:spPr>
           <a:xfrm>
-            <a:off x="548640" y="1325880"/>
-            <a:ext cx="7315200" cy="4114800"/>
+            <a:off x="1188720" y="1874520"/>
+            <a:ext cx="6675120" cy="3754755"/>
           </a:xfrm>
           <a:prstGeom prst="rect">
             <a:avLst/>
@@ -23677,13 +26425,13 @@
       </p:pic>
       <p:sp>
         <p:nvSpPr>
-          <p:cNvPr id="5" name="num-1"/>
+          <p:cNvPr id="9" name="num-1"/>
           <p:cNvSpPr/>
           <p:nvPr/>
         </p:nvSpPr>
         <p:spPr>
           <a:xfrm>
-            <a:off x="11219688" y="1316736"/>
+            <a:off x="11219688" y="1865376"/>
             <a:ext cx="420624" cy="420624"/>
           </a:xfrm>
           <a:prstGeom prst="ellipse">
@@ -23702,13 +26450,13 @@
       </p:sp>
       <p:sp>
         <p:nvSpPr>
-          <p:cNvPr id="6" name="Text 3"/>
-          <p:cNvSpPr txBox="1"/>
-          <p:nvPr/>
-        </p:nvSpPr>
-        <p:spPr>
-          <a:xfrm>
-            <a:off x="11219688" y="1316736"/>
+          <p:cNvPr id="10" name="Text 7"/>
+          <p:cNvSpPr txBox="1"/>
+          <p:nvPr/>
+        </p:nvSpPr>
+        <p:spPr>
+          <a:xfrm>
+            <a:off x="11219688" y="1865376"/>
             <a:ext cx="420624" cy="420624"/>
           </a:xfrm>
           <a:prstGeom prst="rect">
@@ -23741,13 +26489,13 @@
       </p:sp>
       <p:sp>
         <p:nvSpPr>
-          <p:cNvPr id="7" name="Text 4"/>
-          <p:cNvSpPr txBox="1"/>
-          <p:nvPr/>
-        </p:nvSpPr>
-        <p:spPr>
-          <a:xfrm>
-            <a:off x="8183880" y="1298448"/>
+          <p:cNvPr id="11" name="Text 8"/>
+          <p:cNvSpPr txBox="1"/>
+          <p:nvPr/>
+        </p:nvSpPr>
+        <p:spPr>
+          <a:xfrm>
+            <a:off x="8183880" y="1847088"/>
             <a:ext cx="2889504" cy="384048"/>
           </a:xfrm>
           <a:prstGeom prst="rect">
@@ -23779,13 +26527,13 @@
       </p:sp>
       <p:sp>
         <p:nvSpPr>
-          <p:cNvPr id="8" name="Text 5"/>
-          <p:cNvSpPr txBox="1"/>
-          <p:nvPr/>
-        </p:nvSpPr>
-        <p:spPr>
-          <a:xfrm>
-            <a:off x="8183880" y="1682496"/>
+          <p:cNvPr id="12" name="Text 9"/>
+          <p:cNvSpPr txBox="1"/>
+          <p:nvPr/>
+        </p:nvSpPr>
+        <p:spPr>
+          <a:xfrm>
+            <a:off x="8183880" y="2231136"/>
             <a:ext cx="2889504" cy="758952"/>
           </a:xfrm>
           <a:prstGeom prst="rect">
@@ -23817,13 +26565,13 @@
       </p:sp>
       <p:sp>
         <p:nvSpPr>
-          <p:cNvPr id="9" name="num-2"/>
+          <p:cNvPr id="13" name="num-2"/>
           <p:cNvSpPr/>
           <p:nvPr/>
         </p:nvSpPr>
         <p:spPr>
           <a:xfrm>
-            <a:off x="11219688" y="2459736"/>
+            <a:off x="11219688" y="3008376"/>
             <a:ext cx="420624" cy="420624"/>
           </a:xfrm>
           <a:prstGeom prst="ellipse">
@@ -23842,13 +26590,13 @@
       </p:sp>
       <p:sp>
         <p:nvSpPr>
-          <p:cNvPr id="10" name="Text 7"/>
-          <p:cNvSpPr txBox="1"/>
-          <p:nvPr/>
-        </p:nvSpPr>
-        <p:spPr>
-          <a:xfrm>
-            <a:off x="11219688" y="2459736"/>
+          <p:cNvPr id="14" name="Text 11"/>
+          <p:cNvSpPr txBox="1"/>
+          <p:nvPr/>
+        </p:nvSpPr>
+        <p:spPr>
+          <a:xfrm>
+            <a:off x="11219688" y="3008376"/>
             <a:ext cx="420624" cy="420624"/>
           </a:xfrm>
           <a:prstGeom prst="rect">
@@ -23881,13 +26629,13 @@
       </p:sp>
       <p:sp>
         <p:nvSpPr>
-          <p:cNvPr id="11" name="Text 8"/>
-          <p:cNvSpPr txBox="1"/>
-          <p:nvPr/>
-        </p:nvSpPr>
-        <p:spPr>
-          <a:xfrm>
-            <a:off x="8183880" y="2441448"/>
+          <p:cNvPr id="15" name="Text 12"/>
+          <p:cNvSpPr txBox="1"/>
+          <p:nvPr/>
+        </p:nvSpPr>
+        <p:spPr>
+          <a:xfrm>
+            <a:off x="8183880" y="2990088"/>
             <a:ext cx="2889504" cy="384048"/>
           </a:xfrm>
           <a:prstGeom prst="rect">
@@ -23919,13 +26667,13 @@
       </p:sp>
       <p:sp>
         <p:nvSpPr>
-          <p:cNvPr id="12" name="Text 9"/>
-          <p:cNvSpPr txBox="1"/>
-          <p:nvPr/>
-        </p:nvSpPr>
-        <p:spPr>
-          <a:xfrm>
-            <a:off x="8183880" y="2825496"/>
+          <p:cNvPr id="16" name="Text 13"/>
+          <p:cNvSpPr txBox="1"/>
+          <p:nvPr/>
+        </p:nvSpPr>
+        <p:spPr>
+          <a:xfrm>
+            <a:off x="8183880" y="3374136"/>
             <a:ext cx="2889504" cy="758952"/>
           </a:xfrm>
           <a:prstGeom prst="rect">
@@ -23977,13 +26725,13 @@
       </p:sp>
       <p:sp>
         <p:nvSpPr>
-          <p:cNvPr id="13" name="num-3"/>
+          <p:cNvPr id="17" name="num-3"/>
           <p:cNvSpPr/>
           <p:nvPr/>
         </p:nvSpPr>
         <p:spPr>
           <a:xfrm>
-            <a:off x="11219688" y="3602736"/>
+            <a:off x="11219688" y="4151376"/>
             <a:ext cx="420624" cy="420624"/>
           </a:xfrm>
           <a:prstGeom prst="ellipse">
@@ -24002,13 +26750,13 @@
       </p:sp>
       <p:sp>
         <p:nvSpPr>
-          <p:cNvPr id="14" name="Text 11"/>
-          <p:cNvSpPr txBox="1"/>
-          <p:nvPr/>
-        </p:nvSpPr>
-        <p:spPr>
-          <a:xfrm>
-            <a:off x="11219688" y="3602736"/>
+          <p:cNvPr id="18" name="Text 15"/>
+          <p:cNvSpPr txBox="1"/>
+          <p:nvPr/>
+        </p:nvSpPr>
+        <p:spPr>
+          <a:xfrm>
+            <a:off x="11219688" y="4151376"/>
             <a:ext cx="420624" cy="420624"/>
           </a:xfrm>
           <a:prstGeom prst="rect">
@@ -24041,13 +26789,13 @@
       </p:sp>
       <p:sp>
         <p:nvSpPr>
-          <p:cNvPr id="15" name="Text 12"/>
-          <p:cNvSpPr txBox="1"/>
-          <p:nvPr/>
-        </p:nvSpPr>
-        <p:spPr>
-          <a:xfrm>
-            <a:off x="8183880" y="3584448"/>
+          <p:cNvPr id="19" name="Text 16"/>
+          <p:cNvSpPr txBox="1"/>
+          <p:nvPr/>
+        </p:nvSpPr>
+        <p:spPr>
+          <a:xfrm>
+            <a:off x="8183880" y="4133088"/>
             <a:ext cx="2889504" cy="384048"/>
           </a:xfrm>
           <a:prstGeom prst="rect">
@@ -24079,13 +26827,13 @@
       </p:sp>
       <p:sp>
         <p:nvSpPr>
-          <p:cNvPr id="16" name="Text 13"/>
-          <p:cNvSpPr txBox="1"/>
-          <p:nvPr/>
-        </p:nvSpPr>
-        <p:spPr>
-          <a:xfrm>
-            <a:off x="8183880" y="3968496"/>
+          <p:cNvPr id="20" name="Text 17"/>
+          <p:cNvSpPr txBox="1"/>
+          <p:nvPr/>
+        </p:nvSpPr>
+        <p:spPr>
+          <a:xfrm>
+            <a:off x="8183880" y="4517136"/>
             <a:ext cx="2889504" cy="758952"/>
           </a:xfrm>
           <a:prstGeom prst="rect">
